--- a/docs/ShieldForge-McKesson-IG.pptx
+++ b/docs/ShieldForge-McKesson-IG.pptx
@@ -4,6 +4,12 @@
   <p:sldMasterIdLst>
     <p:sldMasterId id="2147483648" r:id="rId1"/>
   </p:sldMasterIdLst>
+  <p:notesMasterIdLst>
+    <p:notesMasterId r:id="rId11"/>
+  </p:notesMasterIdLst>
+  <p:handoutMasterIdLst>
+    <p:handoutMasterId r:id="rId12"/>
+  </p:handoutMasterIdLst>
   <p:sldIdLst>
     <p:sldId id="256" r:id="rId2"/>
     <p:sldId id="257" r:id="rId3"/>
@@ -15,9 +21,6 @@
     <p:sldId id="263" r:id="rId9"/>
     <p:sldId id="264" r:id="rId10"/>
   </p:sldIdLst>
-  <p:notesMasterIdLst>
-    <p:notesMasterId r:id="rId11"/>
-  </p:notesMasterIdLst>
   <p:sldSz cx="12192000" cy="6858000"/>
   <p:notesSz cx="6858000" cy="12192000"/>
   <p:defaultTextStyle>
@@ -115,34 +118,34 @@
   <p:extLst>
     <p:ext uri="{521415D9-36F7-43E2-AB2F-B90AF26B5E84}">
       <p14:sectionLst xmlns:p14="http://schemas.microsoft.com/office/powerpoint/2010/main">
-        <p14:section name="Opening" id="{68c14e3a-db50-0a83-3c52-493fbfc8a8be}">
+        <p14:section name="Opening" id="{68C14E3A-DB50-0A83-3C52-493FBFC8A8BE}">
           <p14:sldIdLst>
             <p14:sldId id="256"/>
           </p14:sldIdLst>
         </p14:section>
-        <p14:section name="ShieldForge" id="{6f3408eb-2c72-0ea8-b2e9-652117378790}">
+        <p14:section name="ShieldForge" id="{6F3408EB-2C72-0EA8-B2E9-652117378790}">
           <p14:sldIdLst>
             <p14:sldId id="257"/>
             <p14:sldId id="258"/>
           </p14:sldIdLst>
         </p14:section>
-        <p14:section name="SOX controls" id="{f6635583-3d31-7750-0d37-f9d44c6b82b9}">
+        <p14:section name="SOX controls" id="{F6635583-3D31-7750-0D37-F9D44C6B82B9}">
           <p14:sldIdLst>
             <p14:sldId id="259"/>
             <p14:sldId id="260"/>
           </p14:sldIdLst>
         </p14:section>
-        <p14:section name="Evidence" id="{6ca3d4f1-edaf-677f-2d83-d4aaa80dd41b}">
+        <p14:section name="Evidence" id="{6CA3D4F1-EDAF-677F-2D83-D4AAA80DD41B}">
           <p14:sldIdLst>
             <p14:sldId id="261"/>
           </p14:sldIdLst>
         </p14:section>
-        <p14:section name="Beyond Salesforce" id="{41a99f6b-0251-3ce8-f253-af0673ac0aef}">
+        <p14:section name="Beyond Salesforce" id="{41A99F6B-0251-3CE8-F253-AF0673AC0AEF}">
           <p14:sldIdLst>
             <p14:sldId id="262"/>
           </p14:sldIdLst>
         </p14:section>
-        <p14:section name="Next steps" id="{9ffd45db-ad17-00f1-7fda-f8daccff37df}">
+        <p14:section name="Next steps" id="{9FFD45DB-AD17-00F1-7FDA-F8DACCFF37DF}">
           <p14:sldIdLst>
             <p14:sldId id="263"/>
             <p14:sldId id="264"/>
@@ -155,6 +158,199 @@
     </p:ext>
   </p:extLst>
 </p:presentation>
+</file>
+
+<file path=ppt/handoutMasters/handoutMaster1.xml><?xml version="1.0" encoding="utf-8"?>
+<p:handoutMaster xmlns:a="http://schemas.openxmlformats.org/drawingml/2006/main" xmlns:r="http://schemas.openxmlformats.org/officeDocument/2006/relationships" xmlns:p="http://schemas.openxmlformats.org/presentationml/2006/main">
+  <p:cSld>
+    <p:bg>
+      <p:bgRef idx="1001">
+        <a:schemeClr val="bg1"/>
+      </p:bgRef>
+    </p:bg>
+    <p:spTree>
+      <p:nvGrpSpPr>
+        <p:cNvPr id="1" name=""/>
+        <p:cNvGrpSpPr/>
+        <p:nvPr/>
+      </p:nvGrpSpPr>
+      <p:grpSpPr>
+        <a:xfrm>
+          <a:off x="0" y="0"/>
+          <a:ext cx="0" cy="0"/>
+          <a:chOff x="0" y="0"/>
+          <a:chExt cx="0" cy="0"/>
+        </a:xfrm>
+      </p:grpSpPr>
+      <p:sp>
+        <p:nvSpPr>
+          <p:cNvPr id="2" name="Header Placeholder 1">
+            <a:extLst>
+              <a:ext uri="{FF2B5EF4-FFF2-40B4-BE49-F238E27FC236}">
+                <a16:creationId xmlns:a16="http://schemas.microsoft.com/office/drawing/2014/main" id="{DF5F32AA-3872-E56D-E7C9-0E92DDA4A292}"/>
+              </a:ext>
+            </a:extLst>
+          </p:cNvPr>
+          <p:cNvSpPr>
+            <a:spLocks noGrp="1"/>
+          </p:cNvSpPr>
+          <p:nvPr>
+            <p:ph type="hdr" sz="quarter"/>
+          </p:nvPr>
+        </p:nvSpPr>
+        <p:spPr>
+          <a:xfrm>
+            <a:off x="0" y="0"/>
+            <a:ext cx="2971800" cy="611188"/>
+          </a:xfrm>
+          <a:prstGeom prst="rect">
+            <a:avLst/>
+          </a:prstGeom>
+        </p:spPr>
+        <p:txBody>
+          <a:bodyPr vert="horz" lIns="91440" tIns="45720" rIns="91440" bIns="45720" rtlCol="0"/>
+          <a:lstStyle>
+            <a:lvl1pPr algn="l">
+              <a:defRPr sz="1200"/>
+            </a:lvl1pPr>
+          </a:lstStyle>
+          <a:p>
+            <a:r>
+              <a:rPr lang="en-IN"/>
+              <a:t>SHIELDFORGE</a:t>
+            </a:r>
+          </a:p>
+        </p:txBody>
+      </p:sp>
+      <p:sp>
+        <p:nvSpPr>
+          <p:cNvPr id="3" name="Date Placeholder 2">
+            <a:extLst>
+              <a:ext uri="{FF2B5EF4-FFF2-40B4-BE49-F238E27FC236}">
+                <a16:creationId xmlns:a16="http://schemas.microsoft.com/office/drawing/2014/main" id="{7295FF68-6B38-F1BB-5A33-879E844B2308}"/>
+              </a:ext>
+            </a:extLst>
+          </p:cNvPr>
+          <p:cNvSpPr>
+            <a:spLocks noGrp="1"/>
+          </p:cNvSpPr>
+          <p:nvPr>
+            <p:ph type="dt" sz="quarter" idx="1"/>
+          </p:nvPr>
+        </p:nvSpPr>
+        <p:spPr>
+          <a:xfrm>
+            <a:off x="3884613" y="0"/>
+            <a:ext cx="2971800" cy="611188"/>
+          </a:xfrm>
+          <a:prstGeom prst="rect">
+            <a:avLst/>
+          </a:prstGeom>
+        </p:spPr>
+        <p:txBody>
+          <a:bodyPr vert="horz" lIns="91440" tIns="45720" rIns="91440" bIns="45720" rtlCol="0"/>
+          <a:lstStyle>
+            <a:lvl1pPr algn="r">
+              <a:defRPr sz="1200"/>
+            </a:lvl1pPr>
+          </a:lstStyle>
+          <a:p>
+            <a:fld id="{3854F655-FE58-450B-AC5A-93C476E21D09}" type="datetimeFigureOut">
+              <a:rPr lang="en-IN" smtClean="0"/>
+              <a:t>22-10-2026</a:t>
+            </a:fld>
+            <a:endParaRPr lang="en-IN"/>
+          </a:p>
+        </p:txBody>
+      </p:sp>
+      <p:sp>
+        <p:nvSpPr>
+          <p:cNvPr id="4" name="Footer Placeholder 3">
+            <a:extLst>
+              <a:ext uri="{FF2B5EF4-FFF2-40B4-BE49-F238E27FC236}">
+                <a16:creationId xmlns:a16="http://schemas.microsoft.com/office/drawing/2014/main" id="{B7E3A02D-16F3-90F3-F707-C9A697278A79}"/>
+              </a:ext>
+            </a:extLst>
+          </p:cNvPr>
+          <p:cNvSpPr>
+            <a:spLocks noGrp="1"/>
+          </p:cNvSpPr>
+          <p:nvPr>
+            <p:ph type="ftr" sz="quarter" idx="2"/>
+          </p:nvPr>
+        </p:nvSpPr>
+        <p:spPr>
+          <a:xfrm>
+            <a:off x="0" y="11580813"/>
+            <a:ext cx="2971800" cy="611187"/>
+          </a:xfrm>
+          <a:prstGeom prst="rect">
+            <a:avLst/>
+          </a:prstGeom>
+        </p:spPr>
+        <p:txBody>
+          <a:bodyPr vert="horz" lIns="91440" tIns="45720" rIns="91440" bIns="45720" rtlCol="0" anchor="b"/>
+          <a:lstStyle>
+            <a:lvl1pPr algn="l">
+              <a:defRPr sz="1200"/>
+            </a:lvl1pPr>
+          </a:lstStyle>
+          <a:p>
+            <a:endParaRPr lang="en-IN"/>
+          </a:p>
+        </p:txBody>
+      </p:sp>
+      <p:sp>
+        <p:nvSpPr>
+          <p:cNvPr id="5" name="Slide Number Placeholder 4">
+            <a:extLst>
+              <a:ext uri="{FF2B5EF4-FFF2-40B4-BE49-F238E27FC236}">
+                <a16:creationId xmlns:a16="http://schemas.microsoft.com/office/drawing/2014/main" id="{90A8F794-3D67-7547-E594-FF1A2036AE98}"/>
+              </a:ext>
+            </a:extLst>
+          </p:cNvPr>
+          <p:cNvSpPr>
+            <a:spLocks noGrp="1"/>
+          </p:cNvSpPr>
+          <p:nvPr>
+            <p:ph type="sldNum" sz="quarter" idx="3"/>
+          </p:nvPr>
+        </p:nvSpPr>
+        <p:spPr>
+          <a:xfrm>
+            <a:off x="3884613" y="11580813"/>
+            <a:ext cx="2971800" cy="611187"/>
+          </a:xfrm>
+          <a:prstGeom prst="rect">
+            <a:avLst/>
+          </a:prstGeom>
+        </p:spPr>
+        <p:txBody>
+          <a:bodyPr vert="horz" lIns="91440" tIns="45720" rIns="91440" bIns="45720" rtlCol="0" anchor="b"/>
+          <a:lstStyle>
+            <a:lvl1pPr algn="r">
+              <a:defRPr sz="1200"/>
+            </a:lvl1pPr>
+          </a:lstStyle>
+          <a:p>
+            <a:fld id="{94AEF156-AC6D-4B76-8237-279ADCBAA53B}" type="slidenum">
+              <a:rPr lang="en-IN" smtClean="0"/>
+              <a:t>‹#›</a:t>
+            </a:fld>
+            <a:endParaRPr lang="en-IN"/>
+          </a:p>
+        </p:txBody>
+      </p:sp>
+    </p:spTree>
+    <p:extLst>
+      <p:ext uri="{BB962C8B-B14F-4D97-AF65-F5344CB8AC3E}">
+        <p14:creationId xmlns:p14="http://schemas.microsoft.com/office/powerpoint/2010/main" val="1609266993"/>
+      </p:ext>
+    </p:extLst>
+  </p:cSld>
+  <p:clrMap bg1="lt1" tx1="dk1" bg2="lt2" tx2="dk2" accent1="accent1" accent2="accent2" accent3="accent3" accent4="accent4" accent5="accent5" accent6="accent6" hlink="hlink" folHlink="folHlink"/>
+  <p:hf ftr="0" dt="0"/>
+</p:handoutMaster>
 </file>
 
 <file path=ppt/notesMasters/notesMaster1.xml><?xml version="1.0" encoding="utf-8"?>
@@ -192,7 +388,7 @@
         <p:spPr>
           <a:xfrm>
             <a:off x="0" y="0"/>
-            <a:ext cx="2971800" cy="458788"/>
+            <a:ext cx="2971800" cy="611188"/>
           </a:xfrm>
           <a:prstGeom prst="rect">
             <a:avLst/>
@@ -206,7 +402,10 @@
             </a:lvl1pPr>
           </a:lstStyle>
           <a:p>
-            <a:endParaRPr lang="en-US"/>
+            <a:r>
+              <a:rPr lang="en-US"/>
+              <a:t>SHIELDFORGE</a:t>
+            </a:r>
           </a:p>
         </p:txBody>
       </p:sp>
@@ -223,7 +422,7 @@
         <p:spPr>
           <a:xfrm>
             <a:off x="3884613" y="0"/>
-            <a:ext cx="2971800" cy="458788"/>
+            <a:ext cx="2971800" cy="611188"/>
           </a:xfrm>
           <a:prstGeom prst="rect">
             <a:avLst/>
@@ -237,9 +436,8 @@
             </a:lvl1pPr>
           </a:lstStyle>
           <a:p>
-            <a:fld id="{5282F153-3F37-0F45-9E97-73ACFA13230C}" type="datetimeFigureOut">
-              <a:rPr lang="en-US"/>
-              <a:t>7/23/19</a:t>
+            <a:fld id="{C4FF28AF-5DD8-4015-89E2-4FEA37B6F151}" type="datetimeFigureOut">
+              <a:t>10/22/2026</a:t>
             </a:fld>
             <a:endParaRPr lang="en-US"/>
           </a:p>
@@ -257,8 +455,8 @@
         </p:nvSpPr>
         <p:spPr>
           <a:xfrm>
-            <a:off x="685800" y="1143000"/>
-            <a:ext cx="5486400" cy="3086100"/>
+            <a:off x="-228600" y="1524000"/>
+            <a:ext cx="7315200" cy="4114800"/>
           </a:xfrm>
           <a:prstGeom prst="rect">
             <a:avLst/>
@@ -290,8 +488,8 @@
         </p:nvSpPr>
         <p:spPr>
           <a:xfrm>
-            <a:off x="685800" y="4400550"/>
-            <a:ext cx="5486400" cy="3600450"/>
+            <a:off x="685800" y="5867400"/>
+            <a:ext cx="5486400" cy="4800600"/>
           </a:xfrm>
           <a:prstGeom prst="rect">
             <a:avLst/>
@@ -349,8 +547,8 @@
         </p:nvSpPr>
         <p:spPr>
           <a:xfrm>
-            <a:off x="0" y="8685213"/>
-            <a:ext cx="2971800" cy="458787"/>
+            <a:off x="0" y="11580813"/>
+            <a:ext cx="2971800" cy="611187"/>
           </a:xfrm>
           <a:prstGeom prst="rect">
             <a:avLst/>
@@ -380,8 +578,8 @@
         </p:nvSpPr>
         <p:spPr>
           <a:xfrm>
-            <a:off x="3884613" y="8685213"/>
-            <a:ext cx="2971800" cy="458787"/>
+            <a:off x="3884613" y="11580813"/>
+            <a:ext cx="2971800" cy="611187"/>
           </a:xfrm>
           <a:prstGeom prst="rect">
             <a:avLst/>
@@ -395,8 +593,7 @@
             </a:lvl1pPr>
           </a:lstStyle>
           <a:p>
-            <a:fld id="{CE5E9CC1-C706-0F49-92D6-E571CC5EEA8F}" type="slidenum">
-              <a:rPr lang="en-US"/>
+            <a:fld id="{54B074BF-AE5D-4CC9-9FB3-BD35ED4D1616}" type="slidenum">
               <a:t>‹#›</a:t>
             </a:fld>
             <a:endParaRPr lang="en-US"/>
@@ -406,11 +603,12 @@
     </p:spTree>
     <p:extLst>
       <p:ext uri="{BB962C8B-B14F-4D97-AF65-F5344CB8AC3E}">
-        <p14:creationId xmlns:p14="http://schemas.microsoft.com/office/powerpoint/2010/main" val="1024086991"/>
+        <p14:creationId xmlns:p14="http://schemas.microsoft.com/office/powerpoint/2010/main" val="2117187558"/>
       </p:ext>
     </p:extLst>
   </p:cSld>
   <p:clrMap bg1="lt1" tx1="dk1" bg2="lt2" tx2="dk2" accent1="accent1" accent2="accent2" accent3="accent3" accent4="accent4" accent5="accent5" accent6="accent6" hlink="hlink" folHlink="folHlink"/>
+  <p:hf ftr="0" dt="0"/>
   <p:notesStyle>
     <a:lvl1pPr marL="0" algn="l" defTabSz="914400" rtl="0" eaLnBrk="1" latinLnBrk="0" hangingPunct="1">
       <a:defRPr sz="1200" kern="1200">
@@ -560,7 +758,6 @@
 BRAND: Supplied IG26-BrandGuidelines-6-9-26.pdf pp. 19, 34, 41-42, 59-60. Trenda IG Text fonts and IG-Gradient-Navy-01.png. Primary white logo reproduced from the supplied guide.
 SOURCES: User-supplied shieldforge-deck.pptx slides 1-4; ShieldForge SOX Compliance Report.pdf, 17-page sample generated 22 October 2026; meeting strategy and architecture narrative in the request. Architecture class names and scoring behavior follow the supplied narrative. Source code was not provided. Sample results describe CTS Developer Edition, not McKesson.</a:t>
             </a:r>
-            <a:endParaRPr lang="en-US" dirty="0"/>
           </a:p>
         </p:txBody>
       </p:sp>
@@ -584,6 +781,34 @@
               <a:t>1</a:t>
             </a:fld>
             <a:endParaRPr lang="en-US"/>
+          </a:p>
+        </p:txBody>
+      </p:sp>
+      <p:sp>
+        <p:nvSpPr>
+          <p:cNvPr id="5" name="Header Placeholder 4">
+            <a:extLst>
+              <a:ext uri="{FF2B5EF4-FFF2-40B4-BE49-F238E27FC236}">
+                <a16:creationId xmlns:a16="http://schemas.microsoft.com/office/drawing/2014/main" id="{FBD13B19-B8B6-9916-182B-6C238469EE0F}"/>
+              </a:ext>
+            </a:extLst>
+          </p:cNvPr>
+          <p:cNvSpPr>
+            <a:spLocks noGrp="1"/>
+          </p:cNvSpPr>
+          <p:nvPr>
+            <p:ph type="hdr" sz="quarter"/>
+          </p:nvPr>
+        </p:nvSpPr>
+        <p:spPr/>
+        <p:txBody>
+          <a:bodyPr/>
+          <a:lstStyle/>
+          <a:p>
+            <a:r>
+              <a:rPr lang="en-US"/>
+              <a:t>SHIELDFORGE</a:t>
+            </a:r>
           </a:p>
         </p:txBody>
       </p:sp>
@@ -656,7 +881,6 @@
 TRANSITION: "The core challenge is showing controls operating inside your environment."
 SOURCES: User-supplied shieldforge-deck.pptx slides 1-4; ShieldForge SOX Compliance Report.pdf, 17-page sample generated 22 October 2026; meeting strategy and architecture narrative in the request. Architecture class names and scoring behavior follow the supplied narrative. Source code was not provided. Sample results describe CTS Developer Edition, not McKesson.</a:t>
             </a:r>
-            <a:endParaRPr lang="en-US" dirty="0"/>
           </a:p>
         </p:txBody>
       </p:sp>
@@ -680,6 +904,34 @@
               <a:t>2</a:t>
             </a:fld>
             <a:endParaRPr lang="en-US"/>
+          </a:p>
+        </p:txBody>
+      </p:sp>
+      <p:sp>
+        <p:nvSpPr>
+          <p:cNvPr id="5" name="Header Placeholder 4">
+            <a:extLst>
+              <a:ext uri="{FF2B5EF4-FFF2-40B4-BE49-F238E27FC236}">
+                <a16:creationId xmlns:a16="http://schemas.microsoft.com/office/drawing/2014/main" id="{F0DEDAE6-6836-D57F-A588-8CA1BCC24006}"/>
+              </a:ext>
+            </a:extLst>
+          </p:cNvPr>
+          <p:cNvSpPr>
+            <a:spLocks noGrp="1"/>
+          </p:cNvSpPr>
+          <p:nvPr>
+            <p:ph type="hdr" sz="quarter"/>
+          </p:nvPr>
+        </p:nvSpPr>
+        <p:spPr/>
+        <p:txBody>
+          <a:bodyPr/>
+          <a:lstStyle/>
+          <a:p>
+            <a:r>
+              <a:rPr lang="en-US"/>
+              <a:t>SHIELDFORGE</a:t>
+            </a:r>
           </a:p>
         </p:txBody>
       </p:sp>
@@ -750,7 +1002,6 @@
 TRANSITION: "Here are the five control areas, with development governance alongside change management."
 SOURCES: User-supplied shieldforge-deck.pptx slides 1-4; ShieldForge SOX Compliance Report.pdf, 17-page sample generated 22 October 2026; meeting strategy and architecture narrative in the request. Architecture class names and scoring behavior follow the supplied narrative. Source code was not provided. Sample results describe CTS Developer Edition, not McKesson.</a:t>
             </a:r>
-            <a:endParaRPr lang="en-US" dirty="0"/>
           </a:p>
         </p:txBody>
       </p:sp>
@@ -774,6 +1025,34 @@
               <a:t>3</a:t>
             </a:fld>
             <a:endParaRPr lang="en-US"/>
+          </a:p>
+        </p:txBody>
+      </p:sp>
+      <p:sp>
+        <p:nvSpPr>
+          <p:cNvPr id="5" name="Header Placeholder 4">
+            <a:extLst>
+              <a:ext uri="{FF2B5EF4-FFF2-40B4-BE49-F238E27FC236}">
+                <a16:creationId xmlns:a16="http://schemas.microsoft.com/office/drawing/2014/main" id="{379E4129-FFD1-DFF6-8096-B3F174D0E8BC}"/>
+              </a:ext>
+            </a:extLst>
+          </p:cNvPr>
+          <p:cNvSpPr>
+            <a:spLocks noGrp="1"/>
+          </p:cNvSpPr>
+          <p:nvPr>
+            <p:ph type="hdr" sz="quarter"/>
+          </p:nvPr>
+        </p:nvSpPr>
+        <p:spPr/>
+        <p:txBody>
+          <a:bodyPr/>
+          <a:lstStyle/>
+          <a:p>
+            <a:r>
+              <a:rPr lang="en-US"/>
+              <a:t>SHIELDFORGE</a:t>
+            </a:r>
           </a:p>
         </p:txBody>
       </p:sp>
@@ -845,7 +1124,6 @@
 RESULTS: Pass, Exception, Deficiency and Not Assessed are report labels. Program Development also uses Informational. Auditors determine the significance of deficiencies. These headings organize the product walkthrough; specific audit objectives determine scope.
 SOURCES: User-supplied shieldforge-deck.pptx slides 1-4; ShieldForge SOX Compliance Report.pdf, 17-page sample generated 22 October 2026; meeting strategy and architecture narrative in the request. Architecture class names and scoring behavior follow the supplied narrative. Source code was not provided. Sample results describe CTS Developer Edition, not McKesson.</a:t>
             </a:r>
-            <a:endParaRPr lang="en-US" dirty="0"/>
           </a:p>
         </p:txBody>
       </p:sp>
@@ -869,6 +1147,34 @@
               <a:t>4</a:t>
             </a:fld>
             <a:endParaRPr lang="en-US"/>
+          </a:p>
+        </p:txBody>
+      </p:sp>
+      <p:sp>
+        <p:nvSpPr>
+          <p:cNvPr id="5" name="Header Placeholder 4">
+            <a:extLst>
+              <a:ext uri="{FF2B5EF4-FFF2-40B4-BE49-F238E27FC236}">
+                <a16:creationId xmlns:a16="http://schemas.microsoft.com/office/drawing/2014/main" id="{BED265F4-6048-0204-E900-224F5582FDFF}"/>
+              </a:ext>
+            </a:extLst>
+          </p:cNvPr>
+          <p:cNvSpPr>
+            <a:spLocks noGrp="1"/>
+          </p:cNvSpPr>
+          <p:nvPr>
+            <p:ph type="hdr" sz="quarter"/>
+          </p:nvPr>
+        </p:nvSpPr>
+        <p:spPr/>
+        <p:txBody>
+          <a:bodyPr/>
+          <a:lstStyle/>
+          <a:p>
+            <a:r>
+              <a:rPr lang="en-US"/>
+              <a:t>SHIELDFORGE</a:t>
+            </a:r>
           </a:p>
         </p:txBody>
       </p:sp>
@@ -939,7 +1245,6 @@
 PIVOT SETUP: "This separation gives us reusable patterns. A new system still needs a connector, entitlement semantics, approved mappings and validated evidence. Components that depend on Salesforce objects or runtime services need adaptation or porting."
 SOURCES: User-supplied shieldforge-deck.pptx slides 1-4; ShieldForge SOX Compliance Report.pdf, 17-page sample generated 22 October 2026; meeting strategy and architecture narrative in the request. Architecture class names and scoring behavior follow the supplied narrative. Source code was not provided. Sample results describe CTS Developer Edition, not McKesson.</a:t>
             </a:r>
-            <a:endParaRPr lang="en-US" dirty="0"/>
           </a:p>
         </p:txBody>
       </p:sp>
@@ -963,6 +1268,34 @@
               <a:t>5</a:t>
             </a:fld>
             <a:endParaRPr lang="en-US"/>
+          </a:p>
+        </p:txBody>
+      </p:sp>
+      <p:sp>
+        <p:nvSpPr>
+          <p:cNvPr id="5" name="Header Placeholder 4">
+            <a:extLst>
+              <a:ext uri="{FF2B5EF4-FFF2-40B4-BE49-F238E27FC236}">
+                <a16:creationId xmlns:a16="http://schemas.microsoft.com/office/drawing/2014/main" id="{5DA2CEE0-0258-B2A7-B88A-1F00C22910F4}"/>
+              </a:ext>
+            </a:extLst>
+          </p:cNvPr>
+          <p:cNvSpPr>
+            <a:spLocks noGrp="1"/>
+          </p:cNvSpPr>
+          <p:nvPr>
+            <p:ph type="hdr" sz="quarter"/>
+          </p:nvPr>
+        </p:nvSpPr>
+        <p:spPr/>
+        <p:txBody>
+          <a:bodyPr/>
+          <a:lstStyle/>
+          <a:p>
+            <a:r>
+              <a:rPr lang="en-US"/>
+              <a:t>SHIELDFORGE</a:t>
+            </a:r>
           </a:p>
         </p:txBody>
       </p:sp>
@@ -1036,7 +1369,6 @@
 VISUAL: Original attestation excerpt from sample PDF p. 17. Native table reproduces p. 2 domain results. The binder is internal evidence and explicitly disclaims an independent audit opinion.
 SOURCES: User-supplied shieldforge-deck.pptx slides 1-4; ShieldForge SOX Compliance Report.pdf, 17-page sample generated 22 October 2026; meeting strategy and architecture narrative in the request. Architecture class names and scoring behavior follow the supplied narrative. Source code was not provided. Sample results describe CTS Developer Edition, not McKesson.</a:t>
             </a:r>
-            <a:endParaRPr lang="en-US" dirty="0"/>
           </a:p>
         </p:txBody>
       </p:sp>
@@ -1060,6 +1392,34 @@
               <a:t>6</a:t>
             </a:fld>
             <a:endParaRPr lang="en-US"/>
+          </a:p>
+        </p:txBody>
+      </p:sp>
+      <p:sp>
+        <p:nvSpPr>
+          <p:cNvPr id="5" name="Header Placeholder 4">
+            <a:extLst>
+              <a:ext uri="{FF2B5EF4-FFF2-40B4-BE49-F238E27FC236}">
+                <a16:creationId xmlns:a16="http://schemas.microsoft.com/office/drawing/2014/main" id="{0CF3660E-F60F-2D49-A441-B14EB83C8713}"/>
+              </a:ext>
+            </a:extLst>
+          </p:cNvPr>
+          <p:cNvSpPr>
+            <a:spLocks noGrp="1"/>
+          </p:cNvSpPr>
+          <p:nvPr>
+            <p:ph type="hdr" sz="quarter"/>
+          </p:nvPr>
+        </p:nvSpPr>
+        <p:spPr/>
+        <p:txBody>
+          <a:bodyPr/>
+          <a:lstStyle/>
+          <a:p>
+            <a:r>
+              <a:rPr lang="en-US"/>
+              <a:t>SHIELDFORGE</a:t>
+            </a:r>
           </a:p>
         </p:txBody>
       </p:sp>
@@ -1134,7 +1494,6 @@
 All external-system examples are proposed mappings from the user's narrative and require validation. No working SAP, Workday or IAM connector appears in the supplied material.
 SOURCES: User-supplied shieldforge-deck.pptx slides 1-4; ShieldForge SOX Compliance Report.pdf, 17-page sample generated 22 October 2026; meeting strategy and architecture narrative in the request. Architecture class names and scoring behavior follow the supplied narrative. Source code was not provided. Sample results describe CTS Developer Edition, not McKesson.</a:t>
             </a:r>
-            <a:endParaRPr lang="en-US" dirty="0"/>
           </a:p>
         </p:txBody>
       </p:sp>
@@ -1158,6 +1517,34 @@
               <a:t>7</a:t>
             </a:fld>
             <a:endParaRPr lang="en-US"/>
+          </a:p>
+        </p:txBody>
+      </p:sp>
+      <p:sp>
+        <p:nvSpPr>
+          <p:cNvPr id="5" name="Header Placeholder 4">
+            <a:extLst>
+              <a:ext uri="{FF2B5EF4-FFF2-40B4-BE49-F238E27FC236}">
+                <a16:creationId xmlns:a16="http://schemas.microsoft.com/office/drawing/2014/main" id="{2ED88CD3-CF84-2335-5837-A68ED592BB7F}"/>
+              </a:ext>
+            </a:extLst>
+          </p:cNvPr>
+          <p:cNvSpPr>
+            <a:spLocks noGrp="1"/>
+          </p:cNvSpPr>
+          <p:nvPr>
+            <p:ph type="hdr" sz="quarter"/>
+          </p:nvPr>
+        </p:nvSpPr>
+        <p:spPr/>
+        <p:txBody>
+          <a:bodyPr/>
+          <a:lstStyle/>
+          <a:p>
+            <a:r>
+              <a:rPr lang="en-US"/>
+              <a:t>SHIELDFORGE</a:t>
+            </a:r>
           </a:p>
         </p:txBody>
       </p:sp>
@@ -1237,7 +1624,6 @@
 CLOSE: "Which application and control workflow would you like to use for that first mapping session?"
 SOURCES: User-supplied shieldforge-deck.pptx slides 1-4; ShieldForge SOX Compliance Report.pdf, 17-page sample generated 22 October 2026; meeting strategy and architecture narrative in the request. Architecture class names and scoring behavior follow the supplied narrative. Source code was not provided. Sample results describe CTS Developer Edition, not McKesson.</a:t>
             </a:r>
-            <a:endParaRPr lang="en-US" dirty="0"/>
           </a:p>
         </p:txBody>
       </p:sp>
@@ -1261,6 +1647,34 @@
               <a:t>8</a:t>
             </a:fld>
             <a:endParaRPr lang="en-US"/>
+          </a:p>
+        </p:txBody>
+      </p:sp>
+      <p:sp>
+        <p:nvSpPr>
+          <p:cNvPr id="5" name="Header Placeholder 4">
+            <a:extLst>
+              <a:ext uri="{FF2B5EF4-FFF2-40B4-BE49-F238E27FC236}">
+                <a16:creationId xmlns:a16="http://schemas.microsoft.com/office/drawing/2014/main" id="{F5535ADA-D864-CE52-62F5-3276BC08ACB9}"/>
+              </a:ext>
+            </a:extLst>
+          </p:cNvPr>
+          <p:cNvSpPr>
+            <a:spLocks noGrp="1"/>
+          </p:cNvSpPr>
+          <p:nvPr>
+            <p:ph type="hdr" sz="quarter"/>
+          </p:nvPr>
+        </p:nvSpPr>
+        <p:spPr/>
+        <p:txBody>
+          <a:bodyPr/>
+          <a:lstStyle/>
+          <a:p>
+            <a:r>
+              <a:rPr lang="en-US"/>
+              <a:t>SHIELDFORGE</a:t>
+            </a:r>
           </a:p>
         </p:txBody>
       </p:sp>
@@ -1321,10 +1735,6 @@
           <a:bodyPr/>
           <a:lstStyle/>
           <a:p>
-            <a:r>
-              <a:rPr lang="en-US" dirty="0"/>
-              <a:t/>
-            </a:r>
             <a:endParaRPr lang="en-US" dirty="0"/>
           </a:p>
         </p:txBody>
@@ -1349,6 +1759,34 @@
               <a:t>9</a:t>
             </a:fld>
             <a:endParaRPr lang="en-US"/>
+          </a:p>
+        </p:txBody>
+      </p:sp>
+      <p:sp>
+        <p:nvSpPr>
+          <p:cNvPr id="5" name="Header Placeholder 4">
+            <a:extLst>
+              <a:ext uri="{FF2B5EF4-FFF2-40B4-BE49-F238E27FC236}">
+                <a16:creationId xmlns:a16="http://schemas.microsoft.com/office/drawing/2014/main" id="{915F7A9C-DC56-02A7-0F50-DA534C6F36DF}"/>
+              </a:ext>
+            </a:extLst>
+          </p:cNvPr>
+          <p:cNvSpPr>
+            <a:spLocks noGrp="1"/>
+          </p:cNvSpPr>
+          <p:nvPr>
+            <p:ph type="hdr" sz="quarter"/>
+          </p:nvPr>
+        </p:nvSpPr>
+        <p:spPr/>
+        <p:txBody>
+          <a:bodyPr/>
+          <a:lstStyle/>
+          <a:p>
+            <a:r>
+              <a:rPr lang="en-US"/>
+              <a:t>SHIELDFORGE</a:t>
+            </a:r>
           </a:p>
         </p:txBody>
       </p:sp>
@@ -1428,14 +1866,14 @@
       </p:grpSpPr>
       <p:pic>
         <p:nvPicPr>
-          <p:cNvPr id="2" name="Image 0" descr="/tmp/claude-0/-home-user-Design/ec113594-1409-5d14-9233-57b3dcba7fdf/scratchpad/assets/logo_white.png">    </p:cNvPr>
+          <p:cNvPr id="2" name="Image 0" descr="/tmp/claude-0/-home-user-Design/ec113594-1409-5d14-9233-57b3dcba7fdf/scratchpad/assets/logo_white.png"/>
           <p:cNvPicPr>
             <a:picLocks noChangeAspect="1"/>
           </p:cNvPicPr>
           <p:nvPr/>
         </p:nvPicPr>
         <p:blipFill>
-          <a:blip r:embed="rId1"/>
+          <a:blip r:embed="rId3"/>
           <a:stretch>
             <a:fillRect/>
           </a:stretch>
@@ -1453,9 +1891,11 @@
       <p:sp>
         <p:nvSpPr>
           <p:cNvPr id="3" name="Text 0"/>
-          <p:cNvSpPr/>
+          <p:cNvSpPr>
+            <a:spLocks noGrp="1"/>
+          </p:cNvSpPr>
           <p:nvPr>
-            <p:ph idx="101" type="title" hasCustomPrompt="1"/>
+            <p:ph type="title" idx="101" hasCustomPrompt="1"/>
           </p:nvPr>
         </p:nvSpPr>
         <p:spPr>
@@ -1472,9 +1912,9 @@
         <p:txBody>
           <a:bodyPr wrap="square" rtlCol="0"/>
           <a:lstStyle>
-            <a:lvl1pPr algn="ctr" indent="0" marL="0">
-              <a:buNone/>
-              <a:defRPr lang="en-US" sz="5400" spc="1000" kern="0" dirty="0">
+            <a:lvl1pPr marL="0" indent="0" algn="ctr">
+              <a:buNone/>
+              <a:defRPr lang="en-US" sz="5400" kern="0" spc="1000" dirty="0">
                 <a:solidFill>
                   <a:schemeClr val="bg1"/>
                 </a:solidFill>
@@ -1485,7 +1925,7 @@
             </a:lvl1pPr>
           </a:lstStyle>
           <a:p>
-            <a:pPr algn="ctr" indent="0" marL="0">
+            <a:pPr marL="0" indent="0" algn="ctr">
               <a:buNone/>
             </a:pPr>
             <a:endParaRPr lang="en-US" sz="5400" dirty="0"/>
@@ -1495,9 +1935,11 @@
       <p:sp>
         <p:nvSpPr>
           <p:cNvPr id="4" name="Text 0"/>
-          <p:cNvSpPr/>
+          <p:cNvSpPr>
+            <a:spLocks noGrp="1"/>
+          </p:cNvSpPr>
           <p:nvPr>
-            <p:ph idx="102" type="body" hasCustomPrompt="1"/>
+            <p:ph type="body" idx="102" hasCustomPrompt="1"/>
           </p:nvPr>
         </p:nvSpPr>
         <p:spPr>
@@ -1514,7 +1956,7 @@
         <p:txBody>
           <a:bodyPr wrap="square" rtlCol="0"/>
           <a:lstStyle>
-            <a:lvl1pPr algn="ctr" indent="0" marL="0">
+            <a:lvl1pPr marL="0" indent="0" algn="ctr">
               <a:buNone/>
               <a:defRPr lang="en-US" sz="1600" dirty="0">
                 <a:solidFill>
@@ -1524,7 +1966,7 @@
             </a:lvl1pPr>
           </a:lstStyle>
           <a:p>
-            <a:pPr algn="ctr" indent="0" marL="0">
+            <a:pPr marL="0" indent="0" algn="ctr">
               <a:buNone/>
             </a:pPr>
             <a:endParaRPr lang="en-US" sz="1600" dirty="0"/>
@@ -1534,9 +1976,11 @@
       <p:sp>
         <p:nvSpPr>
           <p:cNvPr id="5" name="Text 0"/>
-          <p:cNvSpPr/>
+          <p:cNvSpPr>
+            <a:spLocks noGrp="1"/>
+          </p:cNvSpPr>
           <p:nvPr>
-            <p:ph idx="103" type="body" hasCustomPrompt="1"/>
+            <p:ph type="body" idx="103" hasCustomPrompt="1"/>
           </p:nvPr>
         </p:nvSpPr>
         <p:spPr>
@@ -1553,9 +1997,9 @@
         <p:txBody>
           <a:bodyPr wrap="square" rtlCol="0"/>
           <a:lstStyle>
-            <a:lvl1pPr algn="ctr" indent="0" marL="0">
-              <a:buNone/>
-              <a:defRPr lang="en-US" sz="900" b="1" spc="300" kern="0" dirty="0">
+            <a:lvl1pPr marL="0" indent="0" algn="ctr">
+              <a:buNone/>
+              <a:defRPr lang="en-US" sz="900" b="1" kern="0" spc="300" dirty="0">
                 <a:solidFill>
                   <a:schemeClr val="bg1"/>
                 </a:solidFill>
@@ -1563,7 +2007,7 @@
             </a:lvl1pPr>
           </a:lstStyle>
           <a:p>
-            <a:pPr algn="ctr" indent="0" marL="0">
+            <a:pPr marL="0" indent="0" algn="ctr">
               <a:buNone/>
             </a:pPr>
             <a:endParaRPr lang="en-US" sz="900" dirty="0"/>
@@ -1586,6 +2030,7 @@
         <a:solidFill>
           <a:srgbClr val="FFFFFF"/>
         </a:solidFill>
+        <a:effectLst/>
       </p:bgPr>
     </p:bg>
     <p:spTree>
@@ -1604,14 +2049,14 @@
       </p:grpSpPr>
       <p:pic>
         <p:nvPicPr>
-          <p:cNvPr id="2" name="Image 0" descr="/tmp/claude-0/-home-user-Design/ec113594-1409-5d14-9233-57b3dcba7fdf/scratchpad/assets/mark_black.png">    </p:cNvPr>
+          <p:cNvPr id="2" name="Image 0" descr="/tmp/claude-0/-home-user-Design/ec113594-1409-5d14-9233-57b3dcba7fdf/scratchpad/assets/mark_black.png"/>
           <p:cNvPicPr>
             <a:picLocks noChangeAspect="1"/>
           </p:cNvPicPr>
           <p:nvPr/>
         </p:nvPicPr>
         <p:blipFill>
-          <a:blip r:embed="rId1"/>
+          <a:blip r:embed="rId2"/>
           <a:stretch>
             <a:fillRect/>
           </a:stretch>
@@ -1647,16 +2092,16 @@
           <a:bodyPr wrap="square" lIns="0" tIns="0" rIns="0" bIns="0" rtlCol="0" anchor="ctr"/>
           <a:lstStyle/>
           <a:p>
-            <a:pPr indent="0" marL="0">
-              <a:buNone/>
-            </a:pPr>
-            <a:r>
-              <a:rPr lang="en-US" sz="800" b="1" spc="300" kern="0" dirty="0">
+            <a:pPr marL="0" indent="0">
+              <a:buNone/>
+            </a:pPr>
+            <a:r>
+              <a:rPr lang="en-US" sz="800" b="1" kern="0" spc="300" dirty="0">
                 <a:solidFill>
                   <a:schemeClr val="tx1"/>
                 </a:solidFill>
               </a:rPr>
-              <a:t>SHIELDFORGE  ·  DISCUSSION WITH MCKESSON</a:t>
+              <a:t>SHIELDFORGE</a:t>
             </a:r>
             <a:endParaRPr lang="en-US" sz="800" dirty="0"/>
           </a:p>
@@ -1665,9 +2110,11 @@
       <p:sp>
         <p:nvSpPr>
           <p:cNvPr id="4" name="Text 1"/>
-          <p:cNvSpPr/>
+          <p:cNvSpPr>
+            <a:spLocks noGrp="1"/>
+          </p:cNvSpPr>
           <p:nvPr>
-            <p:ph idx="102" type="title" hasCustomPrompt="1"/>
+            <p:ph type="title" idx="102" hasCustomPrompt="1"/>
           </p:nvPr>
         </p:nvSpPr>
         <p:spPr>
@@ -1684,7 +2131,7 @@
         <p:txBody>
           <a:bodyPr wrap="square" rtlCol="0"/>
           <a:lstStyle>
-            <a:lvl1pPr algn="l" indent="0" marL="0">
+            <a:lvl1pPr marL="0" indent="0" algn="l">
               <a:buNone/>
               <a:defRPr lang="en-US" sz="3200" b="1" dirty="0">
                 <a:solidFill>
@@ -1694,7 +2141,7 @@
             </a:lvl1pPr>
           </a:lstStyle>
           <a:p>
-            <a:pPr algn="l" indent="0" marL="0">
+            <a:pPr marL="0" indent="0" algn="l">
               <a:buNone/>
             </a:pPr>
             <a:endParaRPr lang="en-US" sz="3200" dirty="0"/>
@@ -1704,9 +2151,11 @@
       <p:sp>
         <p:nvSpPr>
           <p:cNvPr id="5" name="Text 1"/>
-          <p:cNvSpPr/>
+          <p:cNvSpPr>
+            <a:spLocks noGrp="1"/>
+          </p:cNvSpPr>
           <p:nvPr>
-            <p:ph idx="103" type="body" hasCustomPrompt="1"/>
+            <p:ph type="body" idx="103" hasCustomPrompt="1"/>
           </p:nvPr>
         </p:nvSpPr>
         <p:spPr>
@@ -1723,7 +2172,7 @@
         <p:txBody>
           <a:bodyPr wrap="square" rtlCol="0"/>
           <a:lstStyle>
-            <a:lvl1pPr algn="l" indent="0" marL="0">
+            <a:lvl1pPr marL="0" indent="0" algn="l">
               <a:buNone/>
               <a:defRPr lang="en-US" sz="1500" dirty="0">
                 <a:solidFill>
@@ -1733,7 +2182,7 @@
             </a:lvl1pPr>
           </a:lstStyle>
           <a:p>
-            <a:pPr algn="l" indent="0" marL="0">
+            <a:pPr marL="0" indent="0" algn="l">
               <a:buNone/>
             </a:pPr>
             <a:endParaRPr lang="en-US" sz="1500" dirty="0"/>
@@ -1760,7 +2209,7 @@
           </a:prstGeom>
           <a:extLst>
             <a:ext uri="{C572A759-6A51-4108-AA02-DFA0A04FC94B}">
-              <ma14:wrappingTextBoxFlag xmlns:ma14="http://schemas.microsoft.com/office/mac/drawingml/2011/main" val="0"/>
+              <ma14:wrappingTextBoxFlag xmlns="" xmlns:ma14="http://schemas.microsoft.com/office/mac/drawingml/2011/main" val="0"/>
             </a:ext>
           </a:extLst>
         </p:spPr>
@@ -1778,8 +2227,8 @@
           <a:p>
             <a:pPr algn="r"/>
             <a:fld id="{F7021451-1387-4CA6-816F-3879F97B5CBC}" type="slidenum">
-              <a:rPr b="0" lang="en-US"/>
-              <a:t>1003</a:t>
+              <a:rPr lang="en-US" b="0"/>
+              <a:t>‹#›</a:t>
             </a:fld>
             <a:endParaRPr lang="en-US"/>
           </a:p>
@@ -1826,14 +2275,14 @@
       </p:grpSpPr>
       <p:pic>
         <p:nvPicPr>
-          <p:cNvPr id="2" name="Image 0" descr="/tmp/claude-0/-home-user-Design/ec113594-1409-5d14-9233-57b3dcba7fdf/scratchpad/assets/mark_white.png">    </p:cNvPr>
+          <p:cNvPr id="2" name="Image 0" descr="/tmp/claude-0/-home-user-Design/ec113594-1409-5d14-9233-57b3dcba7fdf/scratchpad/assets/mark_white.png"/>
           <p:cNvPicPr>
             <a:picLocks noChangeAspect="1"/>
           </p:cNvPicPr>
           <p:nvPr/>
         </p:nvPicPr>
         <p:blipFill>
-          <a:blip r:embed="rId1"/>
+          <a:blip r:embed="rId3"/>
           <a:stretch>
             <a:fillRect/>
           </a:stretch>
@@ -1869,16 +2318,16 @@
           <a:bodyPr wrap="square" lIns="0" tIns="0" rIns="0" bIns="0" rtlCol="0" anchor="ctr"/>
           <a:lstStyle/>
           <a:p>
-            <a:pPr indent="0" marL="0">
-              <a:buNone/>
-            </a:pPr>
-            <a:r>
-              <a:rPr lang="en-US" sz="800" b="1" spc="300" kern="0" dirty="0">
+            <a:pPr marL="0" indent="0">
+              <a:buNone/>
+            </a:pPr>
+            <a:r>
+              <a:rPr lang="en-US" sz="800" b="1" kern="0" spc="300" dirty="0">
                 <a:solidFill>
                   <a:schemeClr val="bg1"/>
                 </a:solidFill>
               </a:rPr>
-              <a:t>SHIELDFORGE  ·  DISCUSSION WITH MCKESSON</a:t>
+              <a:t>SHIELDFORGE</a:t>
             </a:r>
             <a:endParaRPr lang="en-US" sz="800" dirty="0"/>
           </a:p>
@@ -1887,9 +2336,11 @@
       <p:sp>
         <p:nvSpPr>
           <p:cNvPr id="4" name="Text 1"/>
-          <p:cNvSpPr/>
+          <p:cNvSpPr>
+            <a:spLocks noGrp="1"/>
+          </p:cNvSpPr>
           <p:nvPr>
-            <p:ph idx="102" type="title" hasCustomPrompt="1"/>
+            <p:ph type="title" idx="102" hasCustomPrompt="1"/>
           </p:nvPr>
         </p:nvSpPr>
         <p:spPr>
@@ -1906,7 +2357,7 @@
         <p:txBody>
           <a:bodyPr wrap="square" rtlCol="0"/>
           <a:lstStyle>
-            <a:lvl1pPr algn="l" indent="0" marL="0">
+            <a:lvl1pPr marL="0" indent="0" algn="l">
               <a:buNone/>
               <a:defRPr lang="en-US" sz="3200" b="1" dirty="0">
                 <a:solidFill>
@@ -1916,7 +2367,7 @@
             </a:lvl1pPr>
           </a:lstStyle>
           <a:p>
-            <a:pPr algn="l" indent="0" marL="0">
+            <a:pPr marL="0" indent="0" algn="l">
               <a:buNone/>
             </a:pPr>
             <a:endParaRPr lang="en-US" sz="3200" dirty="0"/>
@@ -1926,9 +2377,11 @@
       <p:sp>
         <p:nvSpPr>
           <p:cNvPr id="5" name="Text 1"/>
-          <p:cNvSpPr/>
+          <p:cNvSpPr>
+            <a:spLocks noGrp="1"/>
+          </p:cNvSpPr>
           <p:nvPr>
-            <p:ph idx="103" type="body" hasCustomPrompt="1"/>
+            <p:ph type="body" idx="103" hasCustomPrompt="1"/>
           </p:nvPr>
         </p:nvSpPr>
         <p:spPr>
@@ -1945,7 +2398,7 @@
         <p:txBody>
           <a:bodyPr wrap="square" rtlCol="0"/>
           <a:lstStyle>
-            <a:lvl1pPr algn="l" indent="0" marL="0">
+            <a:lvl1pPr marL="0" indent="0" algn="l">
               <a:buNone/>
               <a:defRPr lang="en-US" sz="1500" dirty="0">
                 <a:solidFill>
@@ -1955,7 +2408,7 @@
             </a:lvl1pPr>
           </a:lstStyle>
           <a:p>
-            <a:pPr algn="l" indent="0" marL="0">
+            <a:pPr marL="0" indent="0" algn="l">
               <a:buNone/>
             </a:pPr>
             <a:endParaRPr lang="en-US" sz="1500" dirty="0"/>
@@ -1982,7 +2435,7 @@
           </a:prstGeom>
           <a:extLst>
             <a:ext uri="{C572A759-6A51-4108-AA02-DFA0A04FC94B}">
-              <ma14:wrappingTextBoxFlag xmlns:ma14="http://schemas.microsoft.com/office/mac/drawingml/2011/main" val="0"/>
+              <ma14:wrappingTextBoxFlag xmlns="" xmlns:ma14="http://schemas.microsoft.com/office/mac/drawingml/2011/main" val="0"/>
             </a:ext>
           </a:extLst>
         </p:spPr>
@@ -2000,8 +2453,8 @@
           <a:p>
             <a:pPr algn="r"/>
             <a:fld id="{F7021451-1387-4CA6-816F-3879F97B5CBC}" type="slidenum">
-              <a:rPr b="0" lang="en-US"/>
-              <a:t>1004</a:t>
+              <a:rPr lang="en-US" b="0"/>
+              <a:t>‹#›</a:t>
             </a:fld>
             <a:endParaRPr lang="en-US"/>
           </a:p>
@@ -2048,14 +2501,14 @@
       </p:grpSpPr>
       <p:pic>
         <p:nvPicPr>
-          <p:cNvPr id="2" name="Image 0" descr="/tmp/claude-0/-home-user-Design/ec113594-1409-5d14-9233-57b3dcba7fdf/scratchpad/assets/mark_white.png">    </p:cNvPr>
+          <p:cNvPr id="2" name="Image 0" descr="/tmp/claude-0/-home-user-Design/ec113594-1409-5d14-9233-57b3dcba7fdf/scratchpad/assets/mark_white.png"/>
           <p:cNvPicPr>
             <a:picLocks noChangeAspect="1"/>
           </p:cNvPicPr>
           <p:nvPr/>
         </p:nvPicPr>
         <p:blipFill>
-          <a:blip r:embed="rId1"/>
+          <a:blip r:embed="rId3"/>
           <a:stretch>
             <a:fillRect/>
           </a:stretch>
@@ -2091,16 +2544,16 @@
           <a:bodyPr wrap="square" lIns="0" tIns="0" rIns="0" bIns="0" rtlCol="0" anchor="ctr"/>
           <a:lstStyle/>
           <a:p>
-            <a:pPr indent="0" marL="0">
-              <a:buNone/>
-            </a:pPr>
-            <a:r>
-              <a:rPr lang="en-US" sz="800" b="1" spc="300" kern="0" dirty="0">
+            <a:pPr marL="0" indent="0">
+              <a:buNone/>
+            </a:pPr>
+            <a:r>
+              <a:rPr lang="en-US" sz="800" b="1" kern="0" spc="300" dirty="0">
                 <a:solidFill>
                   <a:schemeClr val="bg1"/>
                 </a:solidFill>
               </a:rPr>
-              <a:t>SHIELDFORGE  ·  DISCUSSION WITH MCKESSON</a:t>
+              <a:t>SHIELDFORGE</a:t>
             </a:r>
             <a:endParaRPr lang="en-US" sz="800" dirty="0"/>
           </a:p>
@@ -2109,9 +2562,11 @@
       <p:sp>
         <p:nvSpPr>
           <p:cNvPr id="4" name="Text 1"/>
-          <p:cNvSpPr/>
+          <p:cNvSpPr>
+            <a:spLocks noGrp="1"/>
+          </p:cNvSpPr>
           <p:nvPr>
-            <p:ph idx="102" type="title" hasCustomPrompt="1"/>
+            <p:ph type="title" idx="102" hasCustomPrompt="1"/>
           </p:nvPr>
         </p:nvSpPr>
         <p:spPr>
@@ -2128,7 +2583,7 @@
         <p:txBody>
           <a:bodyPr wrap="square" rtlCol="0"/>
           <a:lstStyle>
-            <a:lvl1pPr algn="l" indent="0" marL="0">
+            <a:lvl1pPr marL="0" indent="0" algn="l">
               <a:buNone/>
               <a:defRPr lang="en-US" sz="3200" b="1" dirty="0">
                 <a:solidFill>
@@ -2138,7 +2593,7 @@
             </a:lvl1pPr>
           </a:lstStyle>
           <a:p>
-            <a:pPr algn="l" indent="0" marL="0">
+            <a:pPr marL="0" indent="0" algn="l">
               <a:buNone/>
             </a:pPr>
             <a:endParaRPr lang="en-US" sz="3200" dirty="0"/>
@@ -2148,9 +2603,11 @@
       <p:sp>
         <p:nvSpPr>
           <p:cNvPr id="5" name="Text 1"/>
-          <p:cNvSpPr/>
+          <p:cNvSpPr>
+            <a:spLocks noGrp="1"/>
+          </p:cNvSpPr>
           <p:nvPr>
-            <p:ph idx="103" type="body" hasCustomPrompt="1"/>
+            <p:ph type="body" idx="103" hasCustomPrompt="1"/>
           </p:nvPr>
         </p:nvSpPr>
         <p:spPr>
@@ -2167,7 +2624,7 @@
         <p:txBody>
           <a:bodyPr wrap="square" rtlCol="0"/>
           <a:lstStyle>
-            <a:lvl1pPr algn="l" indent="0" marL="0">
+            <a:lvl1pPr marL="0" indent="0" algn="l">
               <a:buNone/>
               <a:defRPr lang="en-US" sz="1500" dirty="0">
                 <a:solidFill>
@@ -2177,7 +2634,7 @@
             </a:lvl1pPr>
           </a:lstStyle>
           <a:p>
-            <a:pPr algn="l" indent="0" marL="0">
+            <a:pPr marL="0" indent="0" algn="l">
               <a:buNone/>
             </a:pPr>
             <a:endParaRPr lang="en-US" sz="1500" dirty="0"/>
@@ -2204,7 +2661,7 @@
           </a:prstGeom>
           <a:extLst>
             <a:ext uri="{C572A759-6A51-4108-AA02-DFA0A04FC94B}">
-              <ma14:wrappingTextBoxFlag xmlns:ma14="http://schemas.microsoft.com/office/mac/drawingml/2011/main" val="0"/>
+              <ma14:wrappingTextBoxFlag xmlns="" xmlns:ma14="http://schemas.microsoft.com/office/mac/drawingml/2011/main" val="0"/>
             </a:ext>
           </a:extLst>
         </p:spPr>
@@ -2222,8 +2679,8 @@
           <a:p>
             <a:pPr algn="r"/>
             <a:fld id="{F7021451-1387-4CA6-816F-3879F97B5CBC}" type="slidenum">
-              <a:rPr b="0" lang="en-US"/>
-              <a:t>1005</a:t>
+              <a:rPr lang="en-US" b="0"/>
+              <a:t>‹#›</a:t>
             </a:fld>
             <a:endParaRPr lang="en-US"/>
           </a:p>
@@ -2270,14 +2727,14 @@
       </p:grpSpPr>
       <p:pic>
         <p:nvPicPr>
-          <p:cNvPr id="2" name="Image 0" descr="/tmp/claude-0/-home-user-Design/ec113594-1409-5d14-9233-57b3dcba7fdf/scratchpad/assets/mark_white.png">    </p:cNvPr>
+          <p:cNvPr id="2" name="Image 0" descr="/tmp/claude-0/-home-user-Design/ec113594-1409-5d14-9233-57b3dcba7fdf/scratchpad/assets/mark_white.png"/>
           <p:cNvPicPr>
             <a:picLocks noChangeAspect="1"/>
           </p:cNvPicPr>
           <p:nvPr/>
         </p:nvPicPr>
         <p:blipFill>
-          <a:blip r:embed="rId1"/>
+          <a:blip r:embed="rId3"/>
           <a:stretch>
             <a:fillRect/>
           </a:stretch>
@@ -2313,16 +2770,16 @@
           <a:bodyPr wrap="square" lIns="0" tIns="0" rIns="0" bIns="0" rtlCol="0" anchor="ctr"/>
           <a:lstStyle/>
           <a:p>
-            <a:pPr indent="0" marL="0">
-              <a:buNone/>
-            </a:pPr>
-            <a:r>
-              <a:rPr lang="en-US" sz="800" b="1" spc="300" kern="0" dirty="0">
+            <a:pPr marL="0" indent="0">
+              <a:buNone/>
+            </a:pPr>
+            <a:r>
+              <a:rPr lang="en-US" sz="800" b="1" kern="0" spc="300" dirty="0">
                 <a:solidFill>
                   <a:schemeClr val="bg1"/>
                 </a:solidFill>
               </a:rPr>
-              <a:t>SHIELDFORGE  ·  DISCUSSION WITH MCKESSON</a:t>
+              <a:t>SHIELDFORGE</a:t>
             </a:r>
             <a:endParaRPr lang="en-US" sz="800" dirty="0"/>
           </a:p>
@@ -2331,9 +2788,11 @@
       <p:sp>
         <p:nvSpPr>
           <p:cNvPr id="4" name="Text 1"/>
-          <p:cNvSpPr/>
+          <p:cNvSpPr>
+            <a:spLocks noGrp="1"/>
+          </p:cNvSpPr>
           <p:nvPr>
-            <p:ph idx="102" type="title" hasCustomPrompt="1"/>
+            <p:ph type="title" idx="102" hasCustomPrompt="1"/>
           </p:nvPr>
         </p:nvSpPr>
         <p:spPr>
@@ -2350,7 +2809,7 @@
         <p:txBody>
           <a:bodyPr wrap="square" rtlCol="0"/>
           <a:lstStyle>
-            <a:lvl1pPr algn="l" indent="0" marL="0">
+            <a:lvl1pPr marL="0" indent="0" algn="l">
               <a:buNone/>
               <a:defRPr lang="en-US" sz="3200" b="1" dirty="0">
                 <a:solidFill>
@@ -2360,7 +2819,7 @@
             </a:lvl1pPr>
           </a:lstStyle>
           <a:p>
-            <a:pPr algn="l" indent="0" marL="0">
+            <a:pPr marL="0" indent="0" algn="l">
               <a:buNone/>
             </a:pPr>
             <a:endParaRPr lang="en-US" sz="3200" dirty="0"/>
@@ -2370,9 +2829,11 @@
       <p:sp>
         <p:nvSpPr>
           <p:cNvPr id="5" name="Text 1"/>
-          <p:cNvSpPr/>
+          <p:cNvSpPr>
+            <a:spLocks noGrp="1"/>
+          </p:cNvSpPr>
           <p:nvPr>
-            <p:ph idx="103" type="body" hasCustomPrompt="1"/>
+            <p:ph type="body" idx="103" hasCustomPrompt="1"/>
           </p:nvPr>
         </p:nvSpPr>
         <p:spPr>
@@ -2389,7 +2850,7 @@
         <p:txBody>
           <a:bodyPr wrap="square" rtlCol="0"/>
           <a:lstStyle>
-            <a:lvl1pPr algn="l" indent="0" marL="0">
+            <a:lvl1pPr marL="0" indent="0" algn="l">
               <a:buNone/>
               <a:defRPr lang="en-US" sz="1500" dirty="0">
                 <a:solidFill>
@@ -2399,7 +2860,7 @@
             </a:lvl1pPr>
           </a:lstStyle>
           <a:p>
-            <a:pPr algn="l" indent="0" marL="0">
+            <a:pPr marL="0" indent="0" algn="l">
               <a:buNone/>
             </a:pPr>
             <a:endParaRPr lang="en-US" sz="1500" dirty="0"/>
@@ -2426,7 +2887,7 @@
           </a:prstGeom>
           <a:extLst>
             <a:ext uri="{C572A759-6A51-4108-AA02-DFA0A04FC94B}">
-              <ma14:wrappingTextBoxFlag xmlns:ma14="http://schemas.microsoft.com/office/mac/drawingml/2011/main" val="0"/>
+              <ma14:wrappingTextBoxFlag xmlns="" xmlns:ma14="http://schemas.microsoft.com/office/mac/drawingml/2011/main" val="0"/>
             </a:ext>
           </a:extLst>
         </p:spPr>
@@ -2444,8 +2905,8 @@
           <a:p>
             <a:pPr algn="r"/>
             <a:fld id="{F7021451-1387-4CA6-816F-3879F97B5CBC}" type="slidenum">
-              <a:rPr b="0" lang="en-US"/>
-              <a:t>1006</a:t>
+              <a:rPr lang="en-US" b="0"/>
+              <a:t>‹#›</a:t>
             </a:fld>
             <a:endParaRPr lang="en-US"/>
           </a:p>
@@ -2492,14 +2953,14 @@
       </p:grpSpPr>
       <p:pic>
         <p:nvPicPr>
-          <p:cNvPr id="2" name="Image 0" descr="/tmp/claude-0/-home-user-Design/ec113594-1409-5d14-9233-57b3dcba7fdf/scratchpad/assets/mark_white.png">    </p:cNvPr>
+          <p:cNvPr id="2" name="Image 0" descr="/tmp/claude-0/-home-user-Design/ec113594-1409-5d14-9233-57b3dcba7fdf/scratchpad/assets/mark_white.png"/>
           <p:cNvPicPr>
             <a:picLocks noChangeAspect="1"/>
           </p:cNvPicPr>
           <p:nvPr/>
         </p:nvPicPr>
         <p:blipFill>
-          <a:blip r:embed="rId1"/>
+          <a:blip r:embed="rId3"/>
           <a:stretch>
             <a:fillRect/>
           </a:stretch>
@@ -2535,16 +2996,16 @@
           <a:bodyPr wrap="square" lIns="0" tIns="0" rIns="0" bIns="0" rtlCol="0" anchor="ctr"/>
           <a:lstStyle/>
           <a:p>
-            <a:pPr indent="0" marL="0">
-              <a:buNone/>
-            </a:pPr>
-            <a:r>
-              <a:rPr lang="en-US" sz="800" b="1" spc="300" kern="0" dirty="0">
+            <a:pPr marL="0" indent="0">
+              <a:buNone/>
+            </a:pPr>
+            <a:r>
+              <a:rPr lang="en-US" sz="800" b="1" kern="0" spc="300" dirty="0">
                 <a:solidFill>
                   <a:schemeClr val="bg1"/>
                 </a:solidFill>
               </a:rPr>
-              <a:t>SHIELDFORGE  ·  DISCUSSION WITH MCKESSON</a:t>
+              <a:t>SHIELDFORGE</a:t>
             </a:r>
             <a:endParaRPr lang="en-US" sz="800" dirty="0"/>
           </a:p>
@@ -2553,9 +3014,11 @@
       <p:sp>
         <p:nvSpPr>
           <p:cNvPr id="4" name="Text 1"/>
-          <p:cNvSpPr/>
+          <p:cNvSpPr>
+            <a:spLocks noGrp="1"/>
+          </p:cNvSpPr>
           <p:nvPr>
-            <p:ph idx="102" type="title" hasCustomPrompt="1"/>
+            <p:ph type="title" idx="102" hasCustomPrompt="1"/>
           </p:nvPr>
         </p:nvSpPr>
         <p:spPr>
@@ -2572,7 +3035,7 @@
         <p:txBody>
           <a:bodyPr wrap="square" rtlCol="0"/>
           <a:lstStyle>
-            <a:lvl1pPr algn="l" indent="0" marL="0">
+            <a:lvl1pPr marL="0" indent="0" algn="l">
               <a:buNone/>
               <a:defRPr lang="en-US" sz="3200" b="1" dirty="0">
                 <a:solidFill>
@@ -2582,7 +3045,7 @@
             </a:lvl1pPr>
           </a:lstStyle>
           <a:p>
-            <a:pPr algn="l" indent="0" marL="0">
+            <a:pPr marL="0" indent="0" algn="l">
               <a:buNone/>
             </a:pPr>
             <a:endParaRPr lang="en-US" sz="3200" dirty="0"/>
@@ -2592,9 +3055,11 @@
       <p:sp>
         <p:nvSpPr>
           <p:cNvPr id="5" name="Text 1"/>
-          <p:cNvSpPr/>
+          <p:cNvSpPr>
+            <a:spLocks noGrp="1"/>
+          </p:cNvSpPr>
           <p:nvPr>
-            <p:ph idx="103" type="body" hasCustomPrompt="1"/>
+            <p:ph type="body" idx="103" hasCustomPrompt="1"/>
           </p:nvPr>
         </p:nvSpPr>
         <p:spPr>
@@ -2611,7 +3076,7 @@
         <p:txBody>
           <a:bodyPr wrap="square" rtlCol="0"/>
           <a:lstStyle>
-            <a:lvl1pPr algn="l" indent="0" marL="0">
+            <a:lvl1pPr marL="0" indent="0" algn="l">
               <a:buNone/>
               <a:defRPr lang="en-US" sz="1500" dirty="0">
                 <a:solidFill>
@@ -2621,7 +3086,7 @@
             </a:lvl1pPr>
           </a:lstStyle>
           <a:p>
-            <a:pPr algn="l" indent="0" marL="0">
+            <a:pPr marL="0" indent="0" algn="l">
               <a:buNone/>
             </a:pPr>
             <a:endParaRPr lang="en-US" sz="1500" dirty="0"/>
@@ -2648,7 +3113,7 @@
           </a:prstGeom>
           <a:extLst>
             <a:ext uri="{C572A759-6A51-4108-AA02-DFA0A04FC94B}">
-              <ma14:wrappingTextBoxFlag xmlns:ma14="http://schemas.microsoft.com/office/mac/drawingml/2011/main" val="0"/>
+              <ma14:wrappingTextBoxFlag xmlns="" xmlns:ma14="http://schemas.microsoft.com/office/mac/drawingml/2011/main" val="0"/>
             </a:ext>
           </a:extLst>
         </p:spPr>
@@ -2666,8 +3131,8 @@
           <a:p>
             <a:pPr algn="r"/>
             <a:fld id="{F7021451-1387-4CA6-816F-3879F97B5CBC}" type="slidenum">
-              <a:rPr b="0" lang="en-US"/>
-              <a:t>1007</a:t>
+              <a:rPr lang="en-US" b="0"/>
+              <a:t>‹#›</a:t>
             </a:fld>
             <a:endParaRPr lang="en-US"/>
           </a:p>
@@ -2689,6 +3154,7 @@
         <a:solidFill>
           <a:srgbClr val="000000"/>
         </a:solidFill>
+        <a:effectLst/>
       </p:bgPr>
     </p:bg>
     <p:spTree>
@@ -2707,31 +3173,7 @@
       </p:grpSpPr>
       <p:pic>
         <p:nvPicPr>
-          <p:cNvPr id="2" name="Image 0" descr="/tmp/claude-0/-home-user-Design/ec113594-1409-5d14-9233-57b3dcba7fdf/scratchpad/bgs/p47.png">    </p:cNvPr>
-          <p:cNvPicPr>
-            <a:picLocks noChangeAspect="1"/>
-          </p:cNvPicPr>
-          <p:nvPr/>
-        </p:nvPicPr>
-        <p:blipFill>
-          <a:blip r:embed="rId1"/>
-          <a:stretch>
-            <a:fillRect/>
-          </a:stretch>
-        </p:blipFill>
-        <p:spPr>
-          <a:xfrm>
-            <a:off x="1856232" y="822960"/>
-            <a:ext cx="8458200" cy="4773168"/>
-          </a:xfrm>
-          <a:prstGeom prst="rect">
-            <a:avLst/>
-          </a:prstGeom>
-        </p:spPr>
-      </p:pic>
-      <p:pic>
-        <p:nvPicPr>
-          <p:cNvPr id="3" name="Image 1" descr="/tmp/claude-0/-home-user-Design/ec113594-1409-5d14-9233-57b3dcba7fdf/scratchpad/assets/logo_white.png">    </p:cNvPr>
+          <p:cNvPr id="2" name="Image 0" descr="/tmp/claude-0/-home-user-Design/ec113594-1409-5d14-9233-57b3dcba7fdf/scratchpad/bgs/p47.png"/>
           <p:cNvPicPr>
             <a:picLocks noChangeAspect="1"/>
           </p:cNvPicPr>
@@ -2745,6 +3187,30 @@
         </p:blipFill>
         <p:spPr>
           <a:xfrm>
+            <a:off x="1856232" y="822960"/>
+            <a:ext cx="8458200" cy="4773168"/>
+          </a:xfrm>
+          <a:prstGeom prst="rect">
+            <a:avLst/>
+          </a:prstGeom>
+        </p:spPr>
+      </p:pic>
+      <p:pic>
+        <p:nvPicPr>
+          <p:cNvPr id="3" name="Image 1" descr="/tmp/claude-0/-home-user-Design/ec113594-1409-5d14-9233-57b3dcba7fdf/scratchpad/assets/logo_white.png"/>
+          <p:cNvPicPr>
+            <a:picLocks noChangeAspect="1"/>
+          </p:cNvPicPr>
+          <p:nvPr/>
+        </p:nvPicPr>
+        <p:blipFill>
+          <a:blip r:embed="rId3"/>
+          <a:stretch>
+            <a:fillRect/>
+          </a:stretch>
+        </p:blipFill>
+        <p:spPr>
+          <a:xfrm>
             <a:off x="5455768" y="6035040"/>
             <a:ext cx="1280160" cy="305410"/>
           </a:xfrm>
@@ -2756,9 +3222,11 @@
       <p:sp>
         <p:nvSpPr>
           <p:cNvPr id="4" name="Text 0"/>
-          <p:cNvSpPr/>
+          <p:cNvSpPr>
+            <a:spLocks noGrp="1"/>
+          </p:cNvSpPr>
           <p:nvPr>
-            <p:ph idx="102" type="title" hasCustomPrompt="1"/>
+            <p:ph type="title" idx="102" hasCustomPrompt="1"/>
           </p:nvPr>
         </p:nvSpPr>
         <p:spPr>
@@ -2775,9 +3243,9 @@
         <p:txBody>
           <a:bodyPr wrap="square" rtlCol="0"/>
           <a:lstStyle>
-            <a:lvl1pPr algn="ctr" indent="0" marL="0">
-              <a:buNone/>
-              <a:defRPr lang="en-US" sz="4000" spc="800" kern="0" dirty="0">
+            <a:lvl1pPr marL="0" indent="0" algn="ctr">
+              <a:buNone/>
+              <a:defRPr lang="en-US" sz="4000" kern="0" spc="800" dirty="0">
                 <a:solidFill>
                   <a:schemeClr val="bg1"/>
                 </a:solidFill>
@@ -2788,7 +3256,7 @@
             </a:lvl1pPr>
           </a:lstStyle>
           <a:p>
-            <a:pPr algn="ctr" indent="0" marL="0">
+            <a:pPr marL="0" indent="0" algn="ctr">
               <a:buNone/>
             </a:pPr>
             <a:endParaRPr lang="en-US" sz="4000" dirty="0"/>
@@ -2806,6 +3274,11 @@
 <file path=ppt/slideMasters/slideMaster1.xml><?xml version="1.0" encoding="utf-8"?>
 <p:sldMaster xmlns:a="http://schemas.openxmlformats.org/drawingml/2006/main" xmlns:r="http://schemas.openxmlformats.org/officeDocument/2006/relationships" xmlns:p="http://schemas.openxmlformats.org/presentationml/2006/main">
   <p:cSld>
+    <p:bg>
+      <p:bgRef idx="1001">
+        <a:schemeClr val="bg1"/>
+      </p:bgRef>
+    </p:bg>
     <p:spTree>
       <p:nvGrpSpPr>
         <p:cNvPr id="1" name=""/>
@@ -2840,7 +3313,7 @@
           </a:prstGeom>
           <a:extLst>
             <a:ext uri="{C572A759-6A51-4108-AA02-DFA0A04FC94B}">
-              <ma14:wrappingTextBoxFlag xmlns:ma14="http://schemas.microsoft.com/office/mac/drawingml/2011/main" val="0"/>
+              <ma14:wrappingTextBoxFlag xmlns="" xmlns:ma14="http://schemas.microsoft.com/office/mac/drawingml/2011/main" val="0"/>
             </a:ext>
           </a:extLst>
         </p:spPr>
@@ -2858,8 +3331,8 @@
           <a:p>
             <a:pPr algn="r"/>
             <a:fld id="{F7021451-1387-4CA6-816F-3879F97B5CBC}" type="slidenum">
-              <a:rPr b="0" lang="en-US"/>
-              <a:t>null</a:t>
+              <a:rPr lang="en-US" b="0"/>
+              <a:t>‹#›</a:t>
             </a:fld>
             <a:endParaRPr lang="en-US"/>
           </a:p>
@@ -3152,14 +3625,16 @@
       <p:sp>
         <p:nvSpPr>
           <p:cNvPr id="2" name="Text 0"/>
-          <p:cNvSpPr/>
+          <p:cNvSpPr>
+            <a:spLocks noGrp="1"/>
+          </p:cNvSpPr>
           <p:nvPr>
-            <p:ph idx="101" type="title" hasCustomPrompt="1"/>
+            <p:ph type="title" idx="101" hasCustomPrompt="1"/>
           </p:nvPr>
         </p:nvSpPr>
         <p:spPr>
           <a:xfrm>
-            <a:off x="1097280" y="2148840"/>
+            <a:off x="1097280" y="2377440"/>
             <a:ext cx="9997135" cy="1600200"/>
           </a:xfrm>
           <a:prstGeom prst="rect">
@@ -3172,28 +3647,17 @@
           <a:bodyPr wrap="square" lIns="0" tIns="0" rIns="0" bIns="0" rtlCol="0" anchor="ctr"/>
           <a:lstStyle/>
           <a:p>
-            <a:pPr algn="ctr" indent="0" marL="0">
-              <a:buNone/>
-            </a:pPr>
-            <a:r>
-              <a:rPr lang="en-US" sz="5400" spc="1000" kern="0" dirty="0">
-                <a:solidFill>
-                  <a:schemeClr val="bg1"/>
-                </a:solidFill>
-                <a:latin typeface="Trenda IG Text Light" pitchFamily="34" charset="0"/>
-                <a:ea typeface="Trenda IG Text Light" pitchFamily="34" charset="-122"/>
-                <a:cs typeface="Trenda IG Text Light" pitchFamily="34" charset="-120"/>
-              </a:rPr>
-              <a:t>SHIELDFORGE</a:t>
-            </a:r>
+            <a:pPr marL="0" indent="0" algn="ctr">
+              <a:buNone/>
+            </a:pPr>
             <a:endParaRPr lang="en-US" sz="5400" dirty="0"/>
           </a:p>
           <a:p>
-            <a:pPr algn="ctr" indent="0" marL="0">
-              <a:buNone/>
-            </a:pPr>
-            <a:r>
-              <a:rPr lang="en-US" sz="2200" spc="600" kern="0" dirty="0">
+            <a:pPr marL="0" indent="0" algn="ctr">
+              <a:buNone/>
+            </a:pPr>
+            <a:r>
+              <a:rPr lang="en-US" sz="2200" kern="0" spc="600" dirty="0">
                 <a:solidFill>
                   <a:schemeClr val="bg1"/>
                 </a:solidFill>
@@ -3210,9 +3674,11 @@
       <p:sp>
         <p:nvSpPr>
           <p:cNvPr id="3" name="Text 0"/>
-          <p:cNvSpPr/>
+          <p:cNvSpPr>
+            <a:spLocks noGrp="1"/>
+          </p:cNvSpPr>
           <p:nvPr>
-            <p:ph idx="102" type="body" hasCustomPrompt="1"/>
+            <p:ph type="body" idx="102" hasCustomPrompt="1"/>
           </p:nvPr>
         </p:nvSpPr>
         <p:spPr>
@@ -3230,21 +3696,7 @@
           <a:bodyPr wrap="square" lIns="0" tIns="0" rIns="0" bIns="0" rtlCol="0" anchor="t"/>
           <a:lstStyle/>
           <a:p>
-            <a:pPr algn="ctr" indent="0" marL="0">
-              <a:buNone/>
-            </a:pPr>
-            <a:r>
-              <a:rPr lang="en-US" sz="1800" b="1" dirty="0">
-                <a:solidFill>
-                  <a:srgbClr val="00D6F2"/>
-                </a:solidFill>
-              </a:rPr>
-              <a:t>Discussion with McKesson</a:t>
-            </a:r>
-            <a:endParaRPr lang="en-US" sz="1600" dirty="0"/>
-          </a:p>
-          <a:p>
-            <a:pPr algn="ctr" indent="0" marL="0">
+            <a:pPr marL="0" indent="0" algn="ctr">
               <a:buNone/>
             </a:pPr>
             <a:r>
@@ -3262,9 +3714,11 @@
       <p:sp>
         <p:nvSpPr>
           <p:cNvPr id="4" name="Text 0"/>
-          <p:cNvSpPr/>
+          <p:cNvSpPr>
+            <a:spLocks noGrp="1"/>
+          </p:cNvSpPr>
           <p:nvPr>
-            <p:ph idx="103" type="body" hasCustomPrompt="1"/>
+            <p:ph type="body" idx="103" hasCustomPrompt="1"/>
           </p:nvPr>
         </p:nvSpPr>
         <p:spPr>
@@ -3282,11 +3736,11 @@
           <a:bodyPr wrap="square" lIns="0" tIns="0" rIns="0" bIns="0" rtlCol="0"/>
           <a:lstStyle/>
           <a:p>
-            <a:pPr algn="ctr" indent="0" marL="0">
-              <a:buNone/>
-            </a:pPr>
-            <a:r>
-              <a:rPr lang="en-US" sz="900" b="1" spc="300" kern="0" dirty="0">
+            <a:pPr marL="0" indent="0" algn="ctr">
+              <a:buNone/>
+            </a:pPr>
+            <a:r>
+              <a:rPr lang="en-US" sz="900" b="1" kern="0" spc="300" dirty="0">
                 <a:solidFill>
                   <a:schemeClr val="bg1"/>
                 </a:solidFill>
@@ -3297,6 +3751,36 @@
           </a:p>
         </p:txBody>
       </p:sp>
+      <p:pic>
+        <p:nvPicPr>
+          <p:cNvPr id="8" name="Picture 7">
+            <a:extLst>
+              <a:ext uri="{FF2B5EF4-FFF2-40B4-BE49-F238E27FC236}">
+                <a16:creationId xmlns:a16="http://schemas.microsoft.com/office/drawing/2014/main" id="{DB2A09CA-CB82-25DD-4D33-7B17A26386DA}"/>
+              </a:ext>
+            </a:extLst>
+          </p:cNvPr>
+          <p:cNvPicPr>
+            <a:picLocks noChangeAspect="1"/>
+          </p:cNvPicPr>
+          <p:nvPr/>
+        </p:nvPicPr>
+        <p:blipFill>
+          <a:blip r:embed="rId3"/>
+          <a:stretch>
+            <a:fillRect/>
+          </a:stretch>
+        </p:blipFill>
+        <p:spPr>
+          <a:xfrm>
+            <a:off x="3285509" y="1626046"/>
+            <a:ext cx="5407270" cy="2262710"/>
+          </a:xfrm>
+          <a:prstGeom prst="rect">
+            <a:avLst/>
+          </a:prstGeom>
+        </p:spPr>
+      </p:pic>
     </p:spTree>
   </p:cSld>
   <p:clrMapOvr>
@@ -3325,14 +3809,16 @@
       <p:sp>
         <p:nvSpPr>
           <p:cNvPr id="2" name="Text 1"/>
-          <p:cNvSpPr/>
+          <p:cNvSpPr>
+            <a:spLocks noGrp="1"/>
+          </p:cNvSpPr>
           <p:nvPr>
-            <p:ph idx="102" type="title" hasCustomPrompt="1"/>
+            <p:ph type="title" idx="102" hasCustomPrompt="1"/>
           </p:nvPr>
         </p:nvSpPr>
         <p:spPr>
           <a:xfrm>
-            <a:off x="512064" y="658368"/>
+            <a:off x="509321" y="635508"/>
             <a:ext cx="11167567" cy="658368"/>
           </a:xfrm>
           <a:prstGeom prst="rect">
@@ -3345,7 +3831,7 @@
           <a:bodyPr wrap="square" lIns="0" tIns="0" rIns="0" bIns="0" rtlCol="0" anchor="b"/>
           <a:lstStyle/>
           <a:p>
-            <a:pPr algn="l" indent="0" marL="0">
+            <a:pPr marL="0" indent="0" algn="l">
               <a:buNone/>
             </a:pPr>
             <a:r>
@@ -3363,9 +3849,11 @@
       <p:sp>
         <p:nvSpPr>
           <p:cNvPr id="3" name="Text 1"/>
-          <p:cNvSpPr/>
+          <p:cNvSpPr>
+            <a:spLocks noGrp="1"/>
+          </p:cNvSpPr>
           <p:nvPr>
-            <p:ph idx="103" type="body" hasCustomPrompt="1"/>
+            <p:ph type="body" idx="103" hasCustomPrompt="1"/>
           </p:nvPr>
         </p:nvSpPr>
         <p:spPr>
@@ -3383,7 +3871,7 @@
           <a:bodyPr wrap="square" lIns="0" tIns="0" rIns="0" bIns="0" rtlCol="0" anchor="t"/>
           <a:lstStyle/>
           <a:p>
-            <a:pPr algn="l" indent="0" marL="0">
+            <a:pPr marL="0" indent="0" algn="l">
               <a:buNone/>
             </a:pPr>
             <a:r>
@@ -3417,6 +3905,13 @@
           </a:solidFill>
           <a:ln/>
         </p:spPr>
+        <p:txBody>
+          <a:bodyPr/>
+          <a:lstStyle/>
+          <a:p>
+            <a:endParaRPr lang="en-IN"/>
+          </a:p>
+        </p:txBody>
       </p:sp>
       <p:sp>
         <p:nvSpPr>
@@ -3439,7 +3934,7 @@
           <a:bodyPr wrap="square" lIns="0" tIns="0" rIns="0" bIns="0" rtlCol="0" anchor="ctr"/>
           <a:lstStyle/>
           <a:p>
-            <a:pPr indent="0" marL="0">
+            <a:pPr marL="0" indent="0">
               <a:buNone/>
             </a:pPr>
             <a:r>
@@ -3475,7 +3970,7 @@
           <a:bodyPr wrap="square" lIns="0" tIns="0" rIns="0" bIns="0" rtlCol="0" anchor="t"/>
           <a:lstStyle/>
           <a:p>
-            <a:pPr indent="0" marL="0">
+            <a:pPr marL="0" indent="0">
               <a:buNone/>
             </a:pPr>
             <a:r>
@@ -3489,7 +3984,7 @@
             <a:endParaRPr lang="en-US" sz="1400" dirty="0"/>
           </a:p>
           <a:p>
-            <a:pPr indent="0" marL="0">
+            <a:pPr marL="0" indent="0">
               <a:buNone/>
             </a:pPr>
             <a:r>
@@ -3523,6 +4018,13 @@
           </a:solidFill>
           <a:ln/>
         </p:spPr>
+        <p:txBody>
+          <a:bodyPr/>
+          <a:lstStyle/>
+          <a:p>
+            <a:endParaRPr lang="en-IN"/>
+          </a:p>
+        </p:txBody>
       </p:sp>
       <p:sp>
         <p:nvSpPr>
@@ -3545,7 +4047,7 @@
           <a:bodyPr wrap="square" lIns="0" tIns="0" rIns="0" bIns="0" rtlCol="0" anchor="ctr"/>
           <a:lstStyle/>
           <a:p>
-            <a:pPr indent="0" marL="0">
+            <a:pPr marL="0" indent="0">
               <a:buNone/>
             </a:pPr>
             <a:r>
@@ -3581,7 +4083,7 @@
           <a:bodyPr wrap="square" lIns="0" tIns="0" rIns="0" bIns="0" rtlCol="0" anchor="t"/>
           <a:lstStyle/>
           <a:p>
-            <a:pPr indent="0" marL="0">
+            <a:pPr marL="0" indent="0">
               <a:buNone/>
             </a:pPr>
             <a:r>
@@ -3595,7 +4097,7 @@
             <a:endParaRPr lang="en-US" sz="1400" dirty="0"/>
           </a:p>
           <a:p>
-            <a:pPr indent="0" marL="0">
+            <a:pPr marL="0" indent="0">
               <a:buNone/>
             </a:pPr>
             <a:r>
@@ -3629,6 +4131,13 @@
           </a:solidFill>
           <a:ln/>
         </p:spPr>
+        <p:txBody>
+          <a:bodyPr/>
+          <a:lstStyle/>
+          <a:p>
+            <a:endParaRPr lang="en-IN"/>
+          </a:p>
+        </p:txBody>
       </p:sp>
       <p:sp>
         <p:nvSpPr>
@@ -3651,7 +4160,7 @@
           <a:bodyPr wrap="square" lIns="0" tIns="0" rIns="0" bIns="0" rtlCol="0" anchor="ctr"/>
           <a:lstStyle/>
           <a:p>
-            <a:pPr indent="0" marL="0">
+            <a:pPr marL="0" indent="0">
               <a:buNone/>
             </a:pPr>
             <a:r>
@@ -3687,7 +4196,7 @@
           <a:bodyPr wrap="square" lIns="0" tIns="0" rIns="0" bIns="0" rtlCol="0" anchor="t"/>
           <a:lstStyle/>
           <a:p>
-            <a:pPr indent="0" marL="0">
+            <a:pPr marL="0" indent="0">
               <a:buNone/>
             </a:pPr>
             <a:r>
@@ -3701,7 +4210,7 @@
             <a:endParaRPr lang="en-US" sz="1400" dirty="0"/>
           </a:p>
           <a:p>
-            <a:pPr indent="0" marL="0">
+            <a:pPr marL="0" indent="0">
               <a:buNone/>
             </a:pPr>
             <a:r>
@@ -3735,17 +4244,24 @@
           </a:solidFill>
           <a:ln/>
         </p:spPr>
+        <p:txBody>
+          <a:bodyPr/>
+          <a:lstStyle/>
+          <a:p>
+            <a:endParaRPr lang="en-IN"/>
+          </a:p>
+        </p:txBody>
       </p:sp>
       <p:pic>
         <p:nvPicPr>
-          <p:cNvPr id="14" name="Product screenshot" descr="Illustrative ShieldForge dashboard view showing the org security posture overview">    </p:cNvPr>
+          <p:cNvPr id="14" name="Product screenshot" descr="Illustrative ShieldForge dashboard view showing the org security posture overview"/>
           <p:cNvPicPr>
             <a:picLocks noChangeAspect="1"/>
           </p:cNvPicPr>
           <p:nvPr/>
         </p:nvPicPr>
         <p:blipFill>
-          <a:blip r:embed="rId1"/>
+          <a:blip r:embed="rId3"/>
           <a:stretch>
             <a:fillRect/>
           </a:stretch>
@@ -3781,7 +4297,7 @@
           <a:bodyPr wrap="square" lIns="0" tIns="0" rIns="0" bIns="0" rtlCol="0" anchor="t"/>
           <a:lstStyle/>
           <a:p>
-            <a:pPr indent="0" marL="0">
+            <a:pPr marL="0" indent="0">
               <a:buNone/>
             </a:pPr>
             <a:r>
@@ -3795,7 +4311,7 @@
             <a:endParaRPr lang="en-US" sz="1700" dirty="0"/>
           </a:p>
           <a:p>
-            <a:pPr indent="0" marL="0">
+            <a:pPr marL="0" indent="0">
               <a:buNone/>
             </a:pPr>
             <a:r>
@@ -3831,7 +4347,7 @@
           <a:bodyPr wrap="square" lIns="0" tIns="0" rIns="0" bIns="0" rtlCol="0" anchor="t"/>
           <a:lstStyle/>
           <a:p>
-            <a:pPr indent="0" marL="0">
+            <a:pPr marL="0" indent="0">
               <a:buNone/>
             </a:pPr>
             <a:r>
@@ -3845,7 +4361,7 @@
             <a:endParaRPr lang="en-US" sz="1400" dirty="0"/>
           </a:p>
           <a:p>
-            <a:pPr indent="0" marL="0">
+            <a:pPr marL="0" indent="0">
               <a:buNone/>
             </a:pPr>
             <a:r>
@@ -3857,51 +4373,6 @@
               <a:t>Customer business data stays in Salesforce</a:t>
             </a:r>
             <a:endParaRPr lang="en-US" sz="1400" dirty="0"/>
-          </a:p>
-        </p:txBody>
-      </p:sp>
-      <p:sp>
-        <p:nvSpPr>
-          <p:cNvPr id="25" name="Slide Number Placeholder 0"/>
-          <p:cNvSpPr>
-            <a:spLocks noGrp="1"/>
-          </p:cNvSpPr>
-          <p:nvPr>
-            <p:ph type="sldNum" sz="quarter" idx="4294967295"/>
-          </p:nvPr>
-        </p:nvSpPr>
-        <p:spPr>
-          <a:xfrm>
-            <a:off x="11219688" y="6345936"/>
-            <a:ext cx="457200" cy="219456"/>
-          </a:xfrm>
-          <a:prstGeom prst="rect">
-            <a:avLst/>
-          </a:prstGeom>
-          <a:extLst>
-            <a:ext uri="{C572A759-6A51-4108-AA02-DFA0A04FC94B}">
-              <ma14:wrappingTextBoxFlag xmlns:ma14="http://schemas.microsoft.com/office/mac/drawingml/2011/main" val="0"/>
-            </a:ext>
-          </a:extLst>
-        </p:spPr>
-        <p:txBody>
-          <a:bodyPr/>
-          <a:lstStyle>
-            <a:lvl1pPr>
-              <a:defRPr sz="900">
-                <a:solidFill>
-                  <a:srgbClr val="000000"/>
-                </a:solidFill>
-              </a:defRPr>
-            </a:lvl1pPr>
-          </a:lstStyle>
-          <a:p>
-            <a:pPr algn="r"/>
-            <a:fld id="{F7021451-1387-4CA6-816F-3879F97B5CBC}" type="slidenum">
-              <a:rPr b="0" lang="en-US"/>
-              <a:t>2</a:t>
-            </a:fld>
-            <a:endParaRPr lang="en-US"/>
           </a:p>
         </p:txBody>
       </p:sp>
@@ -3933,9 +4404,11 @@
       <p:sp>
         <p:nvSpPr>
           <p:cNvPr id="2" name="Text 1"/>
-          <p:cNvSpPr/>
+          <p:cNvSpPr>
+            <a:spLocks noGrp="1"/>
+          </p:cNvSpPr>
           <p:nvPr>
-            <p:ph idx="102" type="title" hasCustomPrompt="1"/>
+            <p:ph type="title" idx="102" hasCustomPrompt="1"/>
           </p:nvPr>
         </p:nvSpPr>
         <p:spPr>
@@ -3953,7 +4426,7 @@
           <a:bodyPr wrap="square" lIns="0" tIns="0" rIns="0" bIns="0" rtlCol="0" anchor="b"/>
           <a:lstStyle/>
           <a:p>
-            <a:pPr algn="l" indent="0" marL="0">
+            <a:pPr marL="0" indent="0" algn="l">
               <a:buNone/>
             </a:pPr>
             <a:r>
@@ -3971,9 +4444,11 @@
       <p:sp>
         <p:nvSpPr>
           <p:cNvPr id="3" name="Text 1"/>
-          <p:cNvSpPr/>
+          <p:cNvSpPr>
+            <a:spLocks noGrp="1"/>
+          </p:cNvSpPr>
           <p:nvPr>
-            <p:ph idx="103" type="body" hasCustomPrompt="1"/>
+            <p:ph type="body" idx="103" hasCustomPrompt="1"/>
           </p:nvPr>
         </p:nvSpPr>
         <p:spPr>
@@ -3991,7 +4466,7 @@
           <a:bodyPr wrap="square" lIns="0" tIns="0" rIns="0" bIns="0" rtlCol="0" anchor="t"/>
           <a:lstStyle/>
           <a:p>
-            <a:pPr algn="l" indent="0" marL="0">
+            <a:pPr marL="0" indent="0" algn="l">
               <a:buNone/>
             </a:pPr>
             <a:r>
@@ -4027,11 +4502,11 @@
           <a:bodyPr wrap="square" lIns="0" tIns="0" rIns="0" bIns="0" rtlCol="0" anchor="ctr"/>
           <a:lstStyle/>
           <a:p>
-            <a:pPr indent="0" marL="0">
-              <a:buNone/>
-            </a:pPr>
-            <a:r>
-              <a:rPr lang="en-US" sz="1400" spc="400" kern="0" dirty="0">
+            <a:pPr marL="0" indent="0">
+              <a:buNone/>
+            </a:pPr>
+            <a:r>
+              <a:rPr lang="en-US" sz="1400" kern="0" spc="400" dirty="0">
                 <a:solidFill>
                   <a:schemeClr val="accent1"/>
                 </a:solidFill>
@@ -4069,6 +4544,13 @@
             <a:prstDash val="solid"/>
           </a:ln>
         </p:spPr>
+        <p:txBody>
+          <a:bodyPr/>
+          <a:lstStyle/>
+          <a:p>
+            <a:endParaRPr lang="en-IN"/>
+          </a:p>
+        </p:txBody>
       </p:sp>
       <p:sp>
         <p:nvSpPr>
@@ -4091,7 +4573,7 @@
           <a:bodyPr wrap="square" lIns="0" tIns="0" rIns="0" bIns="0" rtlCol="0" anchor="ctr"/>
           <a:lstStyle/>
           <a:p>
-            <a:pPr indent="0" marL="0">
+            <a:pPr marL="0" indent="0">
               <a:buNone/>
             </a:pPr>
             <a:r>
@@ -4130,7 +4612,7 @@
           <a:bodyPr wrap="square" lIns="0" tIns="0" rIns="0" bIns="0" rtlCol="0" anchor="ctr"/>
           <a:lstStyle/>
           <a:p>
-            <a:pPr indent="0" marL="0">
+            <a:pPr marL="0" indent="0">
               <a:buNone/>
             </a:pPr>
             <a:r>
@@ -4169,7 +4651,7 @@
           <a:bodyPr wrap="square" lIns="0" tIns="0" rIns="0" bIns="0" rtlCol="0" anchor="ctr"/>
           <a:lstStyle/>
           <a:p>
-            <a:pPr indent="0" marL="0">
+            <a:pPr marL="0" indent="0">
               <a:buNone/>
             </a:pPr>
             <a:r>
@@ -4208,7 +4690,7 @@
           <a:bodyPr wrap="square" lIns="0" tIns="0" rIns="0" bIns="0" rtlCol="0" anchor="ctr"/>
           <a:lstStyle/>
           <a:p>
-            <a:pPr indent="0" marL="0">
+            <a:pPr marL="0" indent="0">
               <a:buNone/>
             </a:pPr>
             <a:r>
@@ -4245,6 +4727,13 @@
           </a:solidFill>
           <a:ln/>
         </p:spPr>
+        <p:txBody>
+          <a:bodyPr/>
+          <a:lstStyle/>
+          <a:p>
+            <a:endParaRPr lang="en-IN"/>
+          </a:p>
+        </p:txBody>
       </p:sp>
       <p:sp>
         <p:nvSpPr>
@@ -4270,7 +4759,7 @@
           <a:bodyPr wrap="square" lIns="0" tIns="0" rIns="0" bIns="0" rtlCol="0" anchor="ctr"/>
           <a:lstStyle/>
           <a:p>
-            <a:pPr algn="ctr" indent="0" marL="0">
+            <a:pPr marL="0" indent="0" algn="ctr">
               <a:buNone/>
             </a:pPr>
             <a:r>
@@ -4309,7 +4798,7 @@
           <a:bodyPr wrap="square" lIns="0" tIns="0" rIns="0" bIns="0" rtlCol="0" anchor="ctr"/>
           <a:lstStyle/>
           <a:p>
-            <a:pPr indent="0" marL="0">
+            <a:pPr marL="0" indent="0">
               <a:buNone/>
             </a:pPr>
             <a:r>
@@ -4345,7 +4834,7 @@
           <a:bodyPr wrap="square" lIns="0" tIns="0" rIns="0" bIns="0" rtlCol="0" anchor="t"/>
           <a:lstStyle/>
           <a:p>
-            <a:pPr indent="0" marL="0">
+            <a:pPr marL="0" indent="0">
               <a:buNone/>
             </a:pPr>
             <a:r>
@@ -4359,7 +4848,7 @@
             <a:endParaRPr lang="en-US" sz="1400" dirty="0"/>
           </a:p>
           <a:p>
-            <a:pPr indent="0" marL="0">
+            <a:pPr marL="0" indent="0">
               <a:buNone/>
             </a:pPr>
             <a:r>
@@ -4393,6 +4882,13 @@
           </a:solidFill>
           <a:ln/>
         </p:spPr>
+        <p:txBody>
+          <a:bodyPr/>
+          <a:lstStyle/>
+          <a:p>
+            <a:endParaRPr lang="en-IN"/>
+          </a:p>
+        </p:txBody>
       </p:sp>
       <p:sp>
         <p:nvSpPr>
@@ -4418,7 +4914,7 @@
           <a:bodyPr wrap="square" lIns="0" tIns="0" rIns="0" bIns="0" rtlCol="0" anchor="ctr"/>
           <a:lstStyle/>
           <a:p>
-            <a:pPr algn="ctr" indent="0" marL="0">
+            <a:pPr marL="0" indent="0" algn="ctr">
               <a:buNone/>
             </a:pPr>
             <a:r>
@@ -4457,7 +4953,7 @@
           <a:bodyPr wrap="square" lIns="0" tIns="0" rIns="0" bIns="0" rtlCol="0" anchor="ctr"/>
           <a:lstStyle/>
           <a:p>
-            <a:pPr indent="0" marL="0">
+            <a:pPr marL="0" indent="0">
               <a:buNone/>
             </a:pPr>
             <a:r>
@@ -4493,7 +4989,7 @@
           <a:bodyPr wrap="square" lIns="0" tIns="0" rIns="0" bIns="0" rtlCol="0" anchor="t"/>
           <a:lstStyle/>
           <a:p>
-            <a:pPr indent="0" marL="0">
+            <a:pPr marL="0" indent="0">
               <a:buNone/>
             </a:pPr>
             <a:r>
@@ -4507,7 +5003,7 @@
             <a:endParaRPr lang="en-US" sz="1400" dirty="0"/>
           </a:p>
           <a:p>
-            <a:pPr indent="0" marL="0">
+            <a:pPr marL="0" indent="0">
               <a:buNone/>
             </a:pPr>
             <a:r>
@@ -4541,6 +5037,13 @@
           </a:solidFill>
           <a:ln/>
         </p:spPr>
+        <p:txBody>
+          <a:bodyPr/>
+          <a:lstStyle/>
+          <a:p>
+            <a:endParaRPr lang="en-IN"/>
+          </a:p>
+        </p:txBody>
       </p:sp>
       <p:sp>
         <p:nvSpPr>
@@ -4566,7 +5069,7 @@
           <a:bodyPr wrap="square" lIns="0" tIns="0" rIns="0" bIns="0" rtlCol="0" anchor="ctr"/>
           <a:lstStyle/>
           <a:p>
-            <a:pPr algn="ctr" indent="0" marL="0">
+            <a:pPr marL="0" indent="0" algn="ctr">
               <a:buNone/>
             </a:pPr>
             <a:r>
@@ -4605,7 +5108,7 @@
           <a:bodyPr wrap="square" lIns="0" tIns="0" rIns="0" bIns="0" rtlCol="0" anchor="ctr"/>
           <a:lstStyle/>
           <a:p>
-            <a:pPr indent="0" marL="0">
+            <a:pPr marL="0" indent="0">
               <a:buNone/>
             </a:pPr>
             <a:r>
@@ -4641,7 +5144,7 @@
           <a:bodyPr wrap="square" lIns="0" tIns="0" rIns="0" bIns="0" rtlCol="0" anchor="t"/>
           <a:lstStyle/>
           <a:p>
-            <a:pPr indent="0" marL="0">
+            <a:pPr marL="0" indent="0">
               <a:buNone/>
             </a:pPr>
             <a:r>
@@ -4655,7 +5158,7 @@
             <a:endParaRPr lang="en-US" sz="1400" dirty="0"/>
           </a:p>
           <a:p>
-            <a:pPr indent="0" marL="0">
+            <a:pPr marL="0" indent="0">
               <a:buNone/>
             </a:pPr>
             <a:r>
@@ -4689,6 +5192,13 @@
           </a:solidFill>
           <a:ln/>
         </p:spPr>
+        <p:txBody>
+          <a:bodyPr/>
+          <a:lstStyle/>
+          <a:p>
+            <a:endParaRPr lang="en-IN"/>
+          </a:p>
+        </p:txBody>
       </p:sp>
       <p:sp>
         <p:nvSpPr>
@@ -4714,7 +5224,7 @@
           <a:bodyPr wrap="square" lIns="0" tIns="0" rIns="0" bIns="0" rtlCol="0" anchor="ctr"/>
           <a:lstStyle/>
           <a:p>
-            <a:pPr algn="ctr" indent="0" marL="0">
+            <a:pPr marL="0" indent="0" algn="ctr">
               <a:buNone/>
             </a:pPr>
             <a:r>
@@ -4753,7 +5263,7 @@
           <a:bodyPr wrap="square" lIns="0" tIns="0" rIns="0" bIns="0" rtlCol="0" anchor="ctr"/>
           <a:lstStyle/>
           <a:p>
-            <a:pPr indent="0" marL="0">
+            <a:pPr marL="0" indent="0">
               <a:buNone/>
             </a:pPr>
             <a:r>
@@ -4789,7 +5299,7 @@
           <a:bodyPr wrap="square" lIns="0" tIns="0" rIns="0" bIns="0" rtlCol="0" anchor="t"/>
           <a:lstStyle/>
           <a:p>
-            <a:pPr indent="0" marL="0">
+            <a:pPr marL="0" indent="0">
               <a:buNone/>
             </a:pPr>
             <a:r>
@@ -4803,7 +5313,7 @@
             <a:endParaRPr lang="en-US" sz="1400" dirty="0"/>
           </a:p>
           <a:p>
-            <a:pPr indent="0" marL="0">
+            <a:pPr marL="0" indent="0">
               <a:buNone/>
             </a:pPr>
             <a:r>
@@ -4815,51 +5325,6 @@
               <a:t>Supporting CSV detail</a:t>
             </a:r>
             <a:endParaRPr lang="en-US" sz="1400" dirty="0"/>
-          </a:p>
-        </p:txBody>
-      </p:sp>
-      <p:sp>
-        <p:nvSpPr>
-          <p:cNvPr id="25" name="Slide Number Placeholder 0"/>
-          <p:cNvSpPr>
-            <a:spLocks noGrp="1"/>
-          </p:cNvSpPr>
-          <p:nvPr>
-            <p:ph type="sldNum" sz="quarter" idx="4294967295"/>
-          </p:nvPr>
-        </p:nvSpPr>
-        <p:spPr>
-          <a:xfrm>
-            <a:off x="11219688" y="6345936"/>
-            <a:ext cx="457200" cy="219456"/>
-          </a:xfrm>
-          <a:prstGeom prst="rect">
-            <a:avLst/>
-          </a:prstGeom>
-          <a:extLst>
-            <a:ext uri="{C572A759-6A51-4108-AA02-DFA0A04FC94B}">
-              <ma14:wrappingTextBoxFlag xmlns:ma14="http://schemas.microsoft.com/office/mac/drawingml/2011/main" val="0"/>
-            </a:ext>
-          </a:extLst>
-        </p:spPr>
-        <p:txBody>
-          <a:bodyPr/>
-          <a:lstStyle>
-            <a:lvl1pPr>
-              <a:defRPr sz="900">
-                <a:solidFill>
-                  <a:srgbClr val="FFFFFF"/>
-                </a:solidFill>
-              </a:defRPr>
-            </a:lvl1pPr>
-          </a:lstStyle>
-          <a:p>
-            <a:pPr algn="r"/>
-            <a:fld id="{F7021451-1387-4CA6-816F-3879F97B5CBC}" type="slidenum">
-              <a:rPr b="0" lang="en-US"/>
-              <a:t>3</a:t>
-            </a:fld>
-            <a:endParaRPr lang="en-US"/>
           </a:p>
         </p:txBody>
       </p:sp>
@@ -4891,9 +5356,11 @@
       <p:sp>
         <p:nvSpPr>
           <p:cNvPr id="2" name="Text 1"/>
-          <p:cNvSpPr/>
+          <p:cNvSpPr>
+            <a:spLocks noGrp="1"/>
+          </p:cNvSpPr>
           <p:nvPr>
-            <p:ph idx="102" type="title" hasCustomPrompt="1"/>
+            <p:ph type="title" idx="102" hasCustomPrompt="1"/>
           </p:nvPr>
         </p:nvSpPr>
         <p:spPr>
@@ -4911,7 +5378,7 @@
           <a:bodyPr wrap="square" lIns="0" tIns="0" rIns="0" bIns="0" rtlCol="0" anchor="b"/>
           <a:lstStyle/>
           <a:p>
-            <a:pPr algn="l" indent="0" marL="0">
+            <a:pPr marL="0" indent="0" algn="l">
               <a:buNone/>
             </a:pPr>
             <a:r>
@@ -4929,9 +5396,11 @@
       <p:sp>
         <p:nvSpPr>
           <p:cNvPr id="3" name="Text 1"/>
-          <p:cNvSpPr/>
+          <p:cNvSpPr>
+            <a:spLocks noGrp="1"/>
+          </p:cNvSpPr>
           <p:nvPr>
-            <p:ph idx="103" type="body" hasCustomPrompt="1"/>
+            <p:ph type="body" idx="103" hasCustomPrompt="1"/>
           </p:nvPr>
         </p:nvSpPr>
         <p:spPr>
@@ -4949,7 +5418,7 @@
           <a:bodyPr wrap="square" lIns="0" tIns="0" rIns="0" bIns="0" rtlCol="0" anchor="t"/>
           <a:lstStyle/>
           <a:p>
-            <a:pPr algn="l" indent="0" marL="0">
+            <a:pPr marL="0" indent="0" algn="l">
               <a:buNone/>
             </a:pPr>
             <a:r>
@@ -4980,16 +5449,34 @@
         </p:nvGraphicFramePr>
         <p:xfrm>
           <a:off x="512064" y="1920240"/>
-          <a:ext cx="11167567" cy="914400"/>
+          <a:ext cx="11164824" cy="3675888"/>
         </p:xfrm>
         <a:graphic>
           <a:graphicData uri="http://schemas.openxmlformats.org/drawingml/2006/table">
             <a:tbl>
               <a:tblPr/>
               <a:tblGrid>
-                <a:gridCol w="3017520"/>
-                <a:gridCol w="3749040"/>
-                <a:gridCol w="4398264"/>
+                <a:gridCol w="3017520">
+                  <a:extLst>
+                    <a:ext uri="{9D8B030D-6E8A-4147-A177-3AD203B41FA5}">
+                      <a16:colId xmlns:a16="http://schemas.microsoft.com/office/drawing/2014/main" val="20000"/>
+                    </a:ext>
+                  </a:extLst>
+                </a:gridCol>
+                <a:gridCol w="3749040">
+                  <a:extLst>
+                    <a:ext uri="{9D8B030D-6E8A-4147-A177-3AD203B41FA5}">
+                      <a16:colId xmlns:a16="http://schemas.microsoft.com/office/drawing/2014/main" val="20001"/>
+                    </a:ext>
+                  </a:extLst>
+                </a:gridCol>
+                <a:gridCol w="4398264">
+                  <a:extLst>
+                    <a:ext uri="{9D8B030D-6E8A-4147-A177-3AD203B41FA5}">
+                      <a16:colId xmlns:a16="http://schemas.microsoft.com/office/drawing/2014/main" val="20002"/>
+                    </a:ext>
+                  </a:extLst>
+                </a:gridCol>
               </a:tblGrid>
               <a:tr h="384048">
                 <a:tc>
@@ -4997,7 +5484,7 @@
                     <a:bodyPr/>
                     <a:lstStyle/>
                     <a:p>
-                      <a:pPr indent="0" marL="0">
+                      <a:pPr marL="0" indent="0">
                         <a:buNone/>
                       </a:pPr>
                       <a:r>
@@ -5011,7 +5498,7 @@
                       <a:endParaRPr lang="en-US" sz="1300" dirty="0"/>
                     </a:p>
                   </a:txBody>
-                  <a:tcPr marL="91440" marR="91440" marT="36576" marB="73152" anchor="b">
+                  <a:tcPr marT="36576" marB="73152" anchor="b">
                     <a:lnL w="0" cap="flat" cmpd="sng" algn="ctr">
                       <a:noFill/>
                     </a:lnL>
@@ -5037,7 +5524,7 @@
                     <a:bodyPr/>
                     <a:lstStyle/>
                     <a:p>
-                      <a:pPr indent="0" marL="0">
+                      <a:pPr marL="0" indent="0">
                         <a:buNone/>
                       </a:pPr>
                       <a:r>
@@ -5051,7 +5538,7 @@
                       <a:endParaRPr lang="en-US" sz="1300" dirty="0"/>
                     </a:p>
                   </a:txBody>
-                  <a:tcPr marL="91440" marR="91440" marT="36576" marB="73152" anchor="b">
+                  <a:tcPr marT="36576" marB="73152" anchor="b">
                     <a:lnL w="0" cap="flat" cmpd="sng" algn="ctr">
                       <a:noFill/>
                     </a:lnL>
@@ -5077,7 +5564,7 @@
                     <a:bodyPr/>
                     <a:lstStyle/>
                     <a:p>
-                      <a:pPr indent="0" marL="0">
+                      <a:pPr marL="0" indent="0">
                         <a:buNone/>
                       </a:pPr>
                       <a:r>
@@ -5091,7 +5578,7 @@
                       <a:endParaRPr lang="en-US" sz="1300" dirty="0"/>
                     </a:p>
                   </a:txBody>
-                  <a:tcPr marL="91440" marR="91440" marT="36576" marB="73152" anchor="b">
+                  <a:tcPr marT="36576" marB="73152" anchor="b">
                     <a:lnL w="0" cap="flat" cmpd="sng" algn="ctr">
                       <a:noFill/>
                     </a:lnL>
@@ -5112,6 +5599,11 @@
                     </a:lnB>
                   </a:tcPr>
                 </a:tc>
+                <a:extLst>
+                  <a:ext uri="{0D108BD9-81ED-4DB2-BD59-A6C34878D82A}">
+                    <a16:rowId xmlns:a16="http://schemas.microsoft.com/office/drawing/2014/main" val="10000"/>
+                  </a:ext>
+                </a:extLst>
               </a:tr>
               <a:tr h="658368">
                 <a:tc>
@@ -5119,7 +5611,7 @@
                     <a:bodyPr/>
                     <a:lstStyle/>
                     <a:p>
-                      <a:pPr indent="0" marL="0">
+                      <a:pPr marL="0" indent="0">
                         <a:buNone/>
                       </a:pPr>
                       <a:r>
@@ -5133,11 +5625,11 @@
                       <a:endParaRPr lang="en-US" sz="1300" dirty="0"/>
                     </a:p>
                     <a:p>
-                      <a:pPr indent="0" marL="0">
+                      <a:pPr marL="0" indent="0">
                         <a:buNone/>
                       </a:pPr>
                       <a:r>
-                        <a:rPr lang="en-US" sz="1000" spc="100" kern="0" dirty="0">
+                        <a:rPr lang="en-US" sz="1000" kern="0" spc="100" dirty="0">
                           <a:solidFill>
                             <a:srgbClr val="4D4D4D"/>
                           </a:solidFill>
@@ -5147,15 +5639,21 @@
                       <a:endParaRPr lang="en-US" sz="1300" dirty="0"/>
                     </a:p>
                   </a:txBody>
-                  <a:tcPr marL="91440" marR="91440" marT="45720" marB="45720" anchor="ctr">
+                  <a:tcPr anchor="ctr">
                     <a:lnL w="0" cap="flat" cmpd="sng" algn="ctr">
                       <a:noFill/>
                     </a:lnL>
                     <a:lnR w="0" cap="flat" cmpd="sng" algn="ctr">
                       <a:noFill/>
                     </a:lnR>
-                    <a:lnT w="0" cap="flat" cmpd="sng" algn="ctr">
-                      <a:noFill/>
+                    <a:lnT w="22225" cap="flat" cmpd="sng" algn="ctr">
+                      <a:solidFill>
+                        <a:srgbClr val="000000"/>
+                      </a:solidFill>
+                      <a:prstDash val="solid"/>
+                      <a:round/>
+                      <a:headEnd type="none" w="med" len="med"/>
+                      <a:tailEnd type="none" w="med" len="med"/>
                     </a:lnT>
                     <a:lnB w="12700" cap="flat" cmpd="sng" algn="ctr">
                       <a:solidFill>
@@ -5173,7 +5671,7 @@
                     <a:bodyPr/>
                     <a:lstStyle/>
                     <a:p>
-                      <a:pPr indent="0" marL="0">
+                      <a:pPr marL="0" indent="0">
                         <a:buNone/>
                       </a:pPr>
                       <a:r>
@@ -5187,15 +5685,21 @@
                       <a:endParaRPr lang="en-US" sz="1300" dirty="0"/>
                     </a:p>
                   </a:txBody>
-                  <a:tcPr marL="91440" marR="91440" marT="45720" marB="45720" anchor="ctr">
+                  <a:tcPr anchor="ctr">
                     <a:lnL w="0" cap="flat" cmpd="sng" algn="ctr">
                       <a:noFill/>
                     </a:lnL>
                     <a:lnR w="0" cap="flat" cmpd="sng" algn="ctr">
                       <a:noFill/>
                     </a:lnR>
-                    <a:lnT w="0" cap="flat" cmpd="sng" algn="ctr">
-                      <a:noFill/>
+                    <a:lnT w="22225" cap="flat" cmpd="sng" algn="ctr">
+                      <a:solidFill>
+                        <a:srgbClr val="000000"/>
+                      </a:solidFill>
+                      <a:prstDash val="solid"/>
+                      <a:round/>
+                      <a:headEnd type="none" w="med" len="med"/>
+                      <a:tailEnd type="none" w="med" len="med"/>
                     </a:lnT>
                     <a:lnB w="12700" cap="flat" cmpd="sng" algn="ctr">
                       <a:solidFill>
@@ -5213,7 +5717,7 @@
                     <a:bodyPr/>
                     <a:lstStyle/>
                     <a:p>
-                      <a:pPr indent="0" marL="0">
+                      <a:pPr marL="0" indent="0">
                         <a:buNone/>
                       </a:pPr>
                       <a:r>
@@ -5227,7 +5731,7 @@
                       <a:endParaRPr lang="en-US" sz="1300" dirty="0"/>
                     </a:p>
                     <a:p>
-                      <a:pPr indent="0" marL="0">
+                      <a:pPr marL="0" indent="0">
                         <a:buNone/>
                       </a:pPr>
                       <a:r>
@@ -5241,15 +5745,21 @@
                       <a:endParaRPr lang="en-US" sz="1300" dirty="0"/>
                     </a:p>
                   </a:txBody>
-                  <a:tcPr marL="91440" marR="91440" marT="45720" marB="45720" anchor="ctr">
+                  <a:tcPr anchor="ctr">
                     <a:lnL w="0" cap="flat" cmpd="sng" algn="ctr">
                       <a:noFill/>
                     </a:lnL>
                     <a:lnR w="0" cap="flat" cmpd="sng" algn="ctr">
                       <a:noFill/>
                     </a:lnR>
-                    <a:lnT w="0" cap="flat" cmpd="sng" algn="ctr">
-                      <a:noFill/>
+                    <a:lnT w="22225" cap="flat" cmpd="sng" algn="ctr">
+                      <a:solidFill>
+                        <a:srgbClr val="000000"/>
+                      </a:solidFill>
+                      <a:prstDash val="solid"/>
+                      <a:round/>
+                      <a:headEnd type="none" w="med" len="med"/>
+                      <a:tailEnd type="none" w="med" len="med"/>
                     </a:lnT>
                     <a:lnB w="12700" cap="flat" cmpd="sng" algn="ctr">
                       <a:solidFill>
@@ -5262,6 +5772,11 @@
                     </a:lnB>
                   </a:tcPr>
                 </a:tc>
+                <a:extLst>
+                  <a:ext uri="{0D108BD9-81ED-4DB2-BD59-A6C34878D82A}">
+                    <a16:rowId xmlns:a16="http://schemas.microsoft.com/office/drawing/2014/main" val="10001"/>
+                  </a:ext>
+                </a:extLst>
               </a:tr>
               <a:tr h="658368">
                 <a:tc>
@@ -5269,7 +5784,7 @@
                     <a:bodyPr/>
                     <a:lstStyle/>
                     <a:p>
-                      <a:pPr indent="0" marL="0">
+                      <a:pPr marL="0" indent="0">
                         <a:buNone/>
                       </a:pPr>
                       <a:r>
@@ -5283,11 +5798,11 @@
                       <a:endParaRPr lang="en-US" sz="1300" dirty="0"/>
                     </a:p>
                     <a:p>
-                      <a:pPr indent="0" marL="0">
+                      <a:pPr marL="0" indent="0">
                         <a:buNone/>
                       </a:pPr>
                       <a:r>
-                        <a:rPr lang="en-US" sz="1000" spc="100" kern="0" dirty="0">
+                        <a:rPr lang="en-US" sz="1000" kern="0" spc="100" dirty="0">
                           <a:solidFill>
                             <a:srgbClr val="4D4D4D"/>
                           </a:solidFill>
@@ -5297,15 +5812,21 @@
                       <a:endParaRPr lang="en-US" sz="1300" dirty="0"/>
                     </a:p>
                   </a:txBody>
-                  <a:tcPr marL="91440" marR="91440" marT="45720" marB="45720" anchor="ctr">
+                  <a:tcPr anchor="ctr">
                     <a:lnL w="0" cap="flat" cmpd="sng" algn="ctr">
                       <a:noFill/>
                     </a:lnL>
                     <a:lnR w="0" cap="flat" cmpd="sng" algn="ctr">
                       <a:noFill/>
                     </a:lnR>
-                    <a:lnT w="0" cap="flat" cmpd="sng" algn="ctr">
-                      <a:noFill/>
+                    <a:lnT w="12700" cap="flat" cmpd="sng" algn="ctr">
+                      <a:solidFill>
+                        <a:srgbClr val="7F7F7F"/>
+                      </a:solidFill>
+                      <a:prstDash val="sysDot"/>
+                      <a:round/>
+                      <a:headEnd type="none" w="med" len="med"/>
+                      <a:tailEnd type="none" w="med" len="med"/>
                     </a:lnT>
                     <a:lnB w="12700" cap="flat" cmpd="sng" algn="ctr">
                       <a:solidFill>
@@ -5323,7 +5844,7 @@
                     <a:bodyPr/>
                     <a:lstStyle/>
                     <a:p>
-                      <a:pPr indent="0" marL="0">
+                      <a:pPr marL="0" indent="0">
                         <a:buNone/>
                       </a:pPr>
                       <a:r>
@@ -5337,15 +5858,21 @@
                       <a:endParaRPr lang="en-US" sz="1300" dirty="0"/>
                     </a:p>
                   </a:txBody>
-                  <a:tcPr marL="91440" marR="91440" marT="45720" marB="45720" anchor="ctr">
+                  <a:tcPr anchor="ctr">
                     <a:lnL w="0" cap="flat" cmpd="sng" algn="ctr">
                       <a:noFill/>
                     </a:lnL>
                     <a:lnR w="0" cap="flat" cmpd="sng" algn="ctr">
                       <a:noFill/>
                     </a:lnR>
-                    <a:lnT w="0" cap="flat" cmpd="sng" algn="ctr">
-                      <a:noFill/>
+                    <a:lnT w="12700" cap="flat" cmpd="sng" algn="ctr">
+                      <a:solidFill>
+                        <a:srgbClr val="7F7F7F"/>
+                      </a:solidFill>
+                      <a:prstDash val="sysDot"/>
+                      <a:round/>
+                      <a:headEnd type="none" w="med" len="med"/>
+                      <a:tailEnd type="none" w="med" len="med"/>
                     </a:lnT>
                     <a:lnB w="12700" cap="flat" cmpd="sng" algn="ctr">
                       <a:solidFill>
@@ -5363,7 +5890,7 @@
                     <a:bodyPr/>
                     <a:lstStyle/>
                     <a:p>
-                      <a:pPr indent="0" marL="0">
+                      <a:pPr marL="0" indent="0">
                         <a:buNone/>
                       </a:pPr>
                       <a:r>
@@ -5377,7 +5904,7 @@
                       <a:endParaRPr lang="en-US" sz="1300" dirty="0"/>
                     </a:p>
                     <a:p>
-                      <a:pPr indent="0" marL="0">
+                      <a:pPr marL="0" indent="0">
                         <a:buNone/>
                       </a:pPr>
                       <a:r>
@@ -5391,15 +5918,21 @@
                       <a:endParaRPr lang="en-US" sz="1300" dirty="0"/>
                     </a:p>
                   </a:txBody>
-                  <a:tcPr marL="91440" marR="91440" marT="45720" marB="45720" anchor="ctr">
+                  <a:tcPr anchor="ctr">
                     <a:lnL w="0" cap="flat" cmpd="sng" algn="ctr">
                       <a:noFill/>
                     </a:lnL>
                     <a:lnR w="0" cap="flat" cmpd="sng" algn="ctr">
                       <a:noFill/>
                     </a:lnR>
-                    <a:lnT w="0" cap="flat" cmpd="sng" algn="ctr">
-                      <a:noFill/>
+                    <a:lnT w="12700" cap="flat" cmpd="sng" algn="ctr">
+                      <a:solidFill>
+                        <a:srgbClr val="7F7F7F"/>
+                      </a:solidFill>
+                      <a:prstDash val="sysDot"/>
+                      <a:round/>
+                      <a:headEnd type="none" w="med" len="med"/>
+                      <a:tailEnd type="none" w="med" len="med"/>
                     </a:lnT>
                     <a:lnB w="12700" cap="flat" cmpd="sng" algn="ctr">
                       <a:solidFill>
@@ -5412,6 +5945,11 @@
                     </a:lnB>
                   </a:tcPr>
                 </a:tc>
+                <a:extLst>
+                  <a:ext uri="{0D108BD9-81ED-4DB2-BD59-A6C34878D82A}">
+                    <a16:rowId xmlns:a16="http://schemas.microsoft.com/office/drawing/2014/main" val="10002"/>
+                  </a:ext>
+                </a:extLst>
               </a:tr>
               <a:tr h="658368">
                 <a:tc>
@@ -5419,7 +5957,7 @@
                     <a:bodyPr/>
                     <a:lstStyle/>
                     <a:p>
-                      <a:pPr indent="0" marL="0">
+                      <a:pPr marL="0" indent="0">
                         <a:buNone/>
                       </a:pPr>
                       <a:r>
@@ -5433,11 +5971,11 @@
                       <a:endParaRPr lang="en-US" sz="1300" dirty="0"/>
                     </a:p>
                     <a:p>
-                      <a:pPr indent="0" marL="0">
+                      <a:pPr marL="0" indent="0">
                         <a:buNone/>
                       </a:pPr>
                       <a:r>
-                        <a:rPr lang="en-US" sz="1000" spc="100" kern="0" dirty="0">
+                        <a:rPr lang="en-US" sz="1000" kern="0" spc="100" dirty="0">
                           <a:solidFill>
                             <a:srgbClr val="4D4D4D"/>
                           </a:solidFill>
@@ -5447,15 +5985,21 @@
                       <a:endParaRPr lang="en-US" sz="1300" dirty="0"/>
                     </a:p>
                   </a:txBody>
-                  <a:tcPr marL="91440" marR="91440" marT="45720" marB="45720" anchor="ctr">
+                  <a:tcPr anchor="ctr">
                     <a:lnL w="0" cap="flat" cmpd="sng" algn="ctr">
                       <a:noFill/>
                     </a:lnL>
                     <a:lnR w="0" cap="flat" cmpd="sng" algn="ctr">
                       <a:noFill/>
                     </a:lnR>
-                    <a:lnT w="0" cap="flat" cmpd="sng" algn="ctr">
-                      <a:noFill/>
+                    <a:lnT w="12700" cap="flat" cmpd="sng" algn="ctr">
+                      <a:solidFill>
+                        <a:srgbClr val="7F7F7F"/>
+                      </a:solidFill>
+                      <a:prstDash val="sysDot"/>
+                      <a:round/>
+                      <a:headEnd type="none" w="med" len="med"/>
+                      <a:tailEnd type="none" w="med" len="med"/>
                     </a:lnT>
                     <a:lnB w="12700" cap="flat" cmpd="sng" algn="ctr">
                       <a:solidFill>
@@ -5473,7 +6017,7 @@
                     <a:bodyPr/>
                     <a:lstStyle/>
                     <a:p>
-                      <a:pPr indent="0" marL="0">
+                      <a:pPr marL="0" indent="0">
                         <a:buNone/>
                       </a:pPr>
                       <a:r>
@@ -5487,15 +6031,21 @@
                       <a:endParaRPr lang="en-US" sz="1300" dirty="0"/>
                     </a:p>
                   </a:txBody>
-                  <a:tcPr marL="91440" marR="91440" marT="45720" marB="45720" anchor="ctr">
+                  <a:tcPr anchor="ctr">
                     <a:lnL w="0" cap="flat" cmpd="sng" algn="ctr">
                       <a:noFill/>
                     </a:lnL>
                     <a:lnR w="0" cap="flat" cmpd="sng" algn="ctr">
                       <a:noFill/>
                     </a:lnR>
-                    <a:lnT w="0" cap="flat" cmpd="sng" algn="ctr">
-                      <a:noFill/>
+                    <a:lnT w="12700" cap="flat" cmpd="sng" algn="ctr">
+                      <a:solidFill>
+                        <a:srgbClr val="7F7F7F"/>
+                      </a:solidFill>
+                      <a:prstDash val="sysDot"/>
+                      <a:round/>
+                      <a:headEnd type="none" w="med" len="med"/>
+                      <a:tailEnd type="none" w="med" len="med"/>
                     </a:lnT>
                     <a:lnB w="12700" cap="flat" cmpd="sng" algn="ctr">
                       <a:solidFill>
@@ -5513,7 +6063,7 @@
                     <a:bodyPr/>
                     <a:lstStyle/>
                     <a:p>
-                      <a:pPr indent="0" marL="0">
+                      <a:pPr marL="0" indent="0">
                         <a:buNone/>
                       </a:pPr>
                       <a:r>
@@ -5527,7 +6077,7 @@
                       <a:endParaRPr lang="en-US" sz="1300" dirty="0"/>
                     </a:p>
                     <a:p>
-                      <a:pPr indent="0" marL="0">
+                      <a:pPr marL="0" indent="0">
                         <a:buNone/>
                       </a:pPr>
                       <a:r>
@@ -5541,15 +6091,21 @@
                       <a:endParaRPr lang="en-US" sz="1300" dirty="0"/>
                     </a:p>
                   </a:txBody>
-                  <a:tcPr marL="91440" marR="91440" marT="45720" marB="45720" anchor="ctr">
+                  <a:tcPr anchor="ctr">
                     <a:lnL w="0" cap="flat" cmpd="sng" algn="ctr">
                       <a:noFill/>
                     </a:lnL>
                     <a:lnR w="0" cap="flat" cmpd="sng" algn="ctr">
                       <a:noFill/>
                     </a:lnR>
-                    <a:lnT w="0" cap="flat" cmpd="sng" algn="ctr">
-                      <a:noFill/>
+                    <a:lnT w="12700" cap="flat" cmpd="sng" algn="ctr">
+                      <a:solidFill>
+                        <a:srgbClr val="7F7F7F"/>
+                      </a:solidFill>
+                      <a:prstDash val="sysDot"/>
+                      <a:round/>
+                      <a:headEnd type="none" w="med" len="med"/>
+                      <a:tailEnd type="none" w="med" len="med"/>
                     </a:lnT>
                     <a:lnB w="12700" cap="flat" cmpd="sng" algn="ctr">
                       <a:solidFill>
@@ -5562,6 +6118,11 @@
                     </a:lnB>
                   </a:tcPr>
                 </a:tc>
+                <a:extLst>
+                  <a:ext uri="{0D108BD9-81ED-4DB2-BD59-A6C34878D82A}">
+                    <a16:rowId xmlns:a16="http://schemas.microsoft.com/office/drawing/2014/main" val="10003"/>
+                  </a:ext>
+                </a:extLst>
               </a:tr>
               <a:tr h="658368">
                 <a:tc>
@@ -5569,7 +6130,7 @@
                     <a:bodyPr/>
                     <a:lstStyle/>
                     <a:p>
-                      <a:pPr indent="0" marL="0">
+                      <a:pPr marL="0" indent="0">
                         <a:buNone/>
                       </a:pPr>
                       <a:r>
@@ -5583,11 +6144,11 @@
                       <a:endParaRPr lang="en-US" sz="1300" dirty="0"/>
                     </a:p>
                     <a:p>
-                      <a:pPr indent="0" marL="0">
+                      <a:pPr marL="0" indent="0">
                         <a:buNone/>
                       </a:pPr>
                       <a:r>
-                        <a:rPr lang="en-US" sz="1000" spc="100" kern="0" dirty="0">
+                        <a:rPr lang="en-US" sz="1000" kern="0" spc="100" dirty="0">
                           <a:solidFill>
                             <a:srgbClr val="4D4D4D"/>
                           </a:solidFill>
@@ -5597,15 +6158,21 @@
                       <a:endParaRPr lang="en-US" sz="1300" dirty="0"/>
                     </a:p>
                   </a:txBody>
-                  <a:tcPr marL="91440" marR="91440" marT="45720" marB="45720" anchor="ctr">
+                  <a:tcPr anchor="ctr">
                     <a:lnL w="0" cap="flat" cmpd="sng" algn="ctr">
                       <a:noFill/>
                     </a:lnL>
                     <a:lnR w="0" cap="flat" cmpd="sng" algn="ctr">
                       <a:noFill/>
                     </a:lnR>
-                    <a:lnT w="0" cap="flat" cmpd="sng" algn="ctr">
-                      <a:noFill/>
+                    <a:lnT w="12700" cap="flat" cmpd="sng" algn="ctr">
+                      <a:solidFill>
+                        <a:srgbClr val="7F7F7F"/>
+                      </a:solidFill>
+                      <a:prstDash val="sysDot"/>
+                      <a:round/>
+                      <a:headEnd type="none" w="med" len="med"/>
+                      <a:tailEnd type="none" w="med" len="med"/>
                     </a:lnT>
                     <a:lnB w="12700" cap="flat" cmpd="sng" algn="ctr">
                       <a:solidFill>
@@ -5623,7 +6190,7 @@
                     <a:bodyPr/>
                     <a:lstStyle/>
                     <a:p>
-                      <a:pPr indent="0" marL="0">
+                      <a:pPr marL="0" indent="0">
                         <a:buNone/>
                       </a:pPr>
                       <a:r>
@@ -5637,15 +6204,21 @@
                       <a:endParaRPr lang="en-US" sz="1300" dirty="0"/>
                     </a:p>
                   </a:txBody>
-                  <a:tcPr marL="91440" marR="91440" marT="45720" marB="45720" anchor="ctr">
+                  <a:tcPr anchor="ctr">
                     <a:lnL w="0" cap="flat" cmpd="sng" algn="ctr">
                       <a:noFill/>
                     </a:lnL>
                     <a:lnR w="0" cap="flat" cmpd="sng" algn="ctr">
                       <a:noFill/>
                     </a:lnR>
-                    <a:lnT w="0" cap="flat" cmpd="sng" algn="ctr">
-                      <a:noFill/>
+                    <a:lnT w="12700" cap="flat" cmpd="sng" algn="ctr">
+                      <a:solidFill>
+                        <a:srgbClr val="7F7F7F"/>
+                      </a:solidFill>
+                      <a:prstDash val="sysDot"/>
+                      <a:round/>
+                      <a:headEnd type="none" w="med" len="med"/>
+                      <a:tailEnd type="none" w="med" len="med"/>
                     </a:lnT>
                     <a:lnB w="12700" cap="flat" cmpd="sng" algn="ctr">
                       <a:solidFill>
@@ -5663,7 +6236,7 @@
                     <a:bodyPr/>
                     <a:lstStyle/>
                     <a:p>
-                      <a:pPr indent="0" marL="0">
+                      <a:pPr marL="0" indent="0">
                         <a:buNone/>
                       </a:pPr>
                       <a:r>
@@ -5677,7 +6250,7 @@
                       <a:endParaRPr lang="en-US" sz="1300" dirty="0"/>
                     </a:p>
                     <a:p>
-                      <a:pPr indent="0" marL="0">
+                      <a:pPr marL="0" indent="0">
                         <a:buNone/>
                       </a:pPr>
                       <a:r>
@@ -5691,15 +6264,21 @@
                       <a:endParaRPr lang="en-US" sz="1300" dirty="0"/>
                     </a:p>
                   </a:txBody>
-                  <a:tcPr marL="91440" marR="91440" marT="45720" marB="45720" anchor="ctr">
+                  <a:tcPr anchor="ctr">
                     <a:lnL w="0" cap="flat" cmpd="sng" algn="ctr">
                       <a:noFill/>
                     </a:lnL>
                     <a:lnR w="0" cap="flat" cmpd="sng" algn="ctr">
                       <a:noFill/>
                     </a:lnR>
-                    <a:lnT w="0" cap="flat" cmpd="sng" algn="ctr">
-                      <a:noFill/>
+                    <a:lnT w="12700" cap="flat" cmpd="sng" algn="ctr">
+                      <a:solidFill>
+                        <a:srgbClr val="7F7F7F"/>
+                      </a:solidFill>
+                      <a:prstDash val="sysDot"/>
+                      <a:round/>
+                      <a:headEnd type="none" w="med" len="med"/>
+                      <a:tailEnd type="none" w="med" len="med"/>
                     </a:lnT>
                     <a:lnB w="12700" cap="flat" cmpd="sng" algn="ctr">
                       <a:solidFill>
@@ -5712,6 +6291,11 @@
                     </a:lnB>
                   </a:tcPr>
                 </a:tc>
+                <a:extLst>
+                  <a:ext uri="{0D108BD9-81ED-4DB2-BD59-A6C34878D82A}">
+                    <a16:rowId xmlns:a16="http://schemas.microsoft.com/office/drawing/2014/main" val="10004"/>
+                  </a:ext>
+                </a:extLst>
               </a:tr>
               <a:tr h="658368">
                 <a:tc>
@@ -5719,7 +6303,7 @@
                     <a:bodyPr/>
                     <a:lstStyle/>
                     <a:p>
-                      <a:pPr indent="0" marL="0">
+                      <a:pPr marL="0" indent="0">
                         <a:buNone/>
                       </a:pPr>
                       <a:r>
@@ -5733,11 +6317,11 @@
                       <a:endParaRPr lang="en-US" sz="1300" dirty="0"/>
                     </a:p>
                     <a:p>
-                      <a:pPr indent="0" marL="0">
+                      <a:pPr marL="0" indent="0">
                         <a:buNone/>
                       </a:pPr>
                       <a:r>
-                        <a:rPr lang="en-US" sz="1000" spc="100" kern="0" dirty="0">
+                        <a:rPr lang="en-US" sz="1000" kern="0" spc="100" dirty="0">
                           <a:solidFill>
                             <a:srgbClr val="4D4D4D"/>
                           </a:solidFill>
@@ -5747,15 +6331,21 @@
                       <a:endParaRPr lang="en-US" sz="1300" dirty="0"/>
                     </a:p>
                   </a:txBody>
-                  <a:tcPr marL="91440" marR="91440" marT="45720" marB="45720" anchor="ctr">
+                  <a:tcPr anchor="ctr">
                     <a:lnL w="0" cap="flat" cmpd="sng" algn="ctr">
                       <a:noFill/>
                     </a:lnL>
                     <a:lnR w="0" cap="flat" cmpd="sng" algn="ctr">
                       <a:noFill/>
                     </a:lnR>
-                    <a:lnT w="0" cap="flat" cmpd="sng" algn="ctr">
-                      <a:noFill/>
+                    <a:lnT w="12700" cap="flat" cmpd="sng" algn="ctr">
+                      <a:solidFill>
+                        <a:srgbClr val="7F7F7F"/>
+                      </a:solidFill>
+                      <a:prstDash val="sysDot"/>
+                      <a:round/>
+                      <a:headEnd type="none" w="med" len="med"/>
+                      <a:tailEnd type="none" w="med" len="med"/>
                     </a:lnT>
                     <a:lnB w="12700" cap="flat" cmpd="sng" algn="ctr">
                       <a:solidFill>
@@ -5773,7 +6363,7 @@
                     <a:bodyPr/>
                     <a:lstStyle/>
                     <a:p>
-                      <a:pPr indent="0" marL="0">
+                      <a:pPr marL="0" indent="0">
                         <a:buNone/>
                       </a:pPr>
                       <a:r>
@@ -5787,15 +6377,21 @@
                       <a:endParaRPr lang="en-US" sz="1300" dirty="0"/>
                     </a:p>
                   </a:txBody>
-                  <a:tcPr marL="91440" marR="91440" marT="45720" marB="45720" anchor="ctr">
+                  <a:tcPr anchor="ctr">
                     <a:lnL w="0" cap="flat" cmpd="sng" algn="ctr">
                       <a:noFill/>
                     </a:lnL>
                     <a:lnR w="0" cap="flat" cmpd="sng" algn="ctr">
                       <a:noFill/>
                     </a:lnR>
-                    <a:lnT w="0" cap="flat" cmpd="sng" algn="ctr">
-                      <a:noFill/>
+                    <a:lnT w="12700" cap="flat" cmpd="sng" algn="ctr">
+                      <a:solidFill>
+                        <a:srgbClr val="7F7F7F"/>
+                      </a:solidFill>
+                      <a:prstDash val="sysDot"/>
+                      <a:round/>
+                      <a:headEnd type="none" w="med" len="med"/>
+                      <a:tailEnd type="none" w="med" len="med"/>
                     </a:lnT>
                     <a:lnB w="12700" cap="flat" cmpd="sng" algn="ctr">
                       <a:solidFill>
@@ -5813,7 +6409,7 @@
                     <a:bodyPr/>
                     <a:lstStyle/>
                     <a:p>
-                      <a:pPr indent="0" marL="0">
+                      <a:pPr marL="0" indent="0">
                         <a:buNone/>
                       </a:pPr>
                       <a:r>
@@ -5827,7 +6423,7 @@
                       <a:endParaRPr lang="en-US" sz="1300" dirty="0"/>
                     </a:p>
                     <a:p>
-                      <a:pPr indent="0" marL="0">
+                      <a:pPr marL="0" indent="0">
                         <a:buNone/>
                       </a:pPr>
                       <a:r>
@@ -5841,15 +6437,21 @@
                       <a:endParaRPr lang="en-US" sz="1300" dirty="0"/>
                     </a:p>
                   </a:txBody>
-                  <a:tcPr marL="91440" marR="91440" marT="45720" marB="45720" anchor="ctr">
+                  <a:tcPr anchor="ctr">
                     <a:lnL w="0" cap="flat" cmpd="sng" algn="ctr">
                       <a:noFill/>
                     </a:lnL>
                     <a:lnR w="0" cap="flat" cmpd="sng" algn="ctr">
                       <a:noFill/>
                     </a:lnR>
-                    <a:lnT w="0" cap="flat" cmpd="sng" algn="ctr">
-                      <a:noFill/>
+                    <a:lnT w="12700" cap="flat" cmpd="sng" algn="ctr">
+                      <a:solidFill>
+                        <a:srgbClr val="7F7F7F"/>
+                      </a:solidFill>
+                      <a:prstDash val="sysDot"/>
+                      <a:round/>
+                      <a:headEnd type="none" w="med" len="med"/>
+                      <a:tailEnd type="none" w="med" len="med"/>
                     </a:lnT>
                     <a:lnB w="12700" cap="flat" cmpd="sng" algn="ctr">
                       <a:solidFill>
@@ -5862,6 +6464,11 @@
                     </a:lnB>
                   </a:tcPr>
                 </a:tc>
+                <a:extLst>
+                  <a:ext uri="{0D108BD9-81ED-4DB2-BD59-A6C34878D82A}">
+                    <a16:rowId xmlns:a16="http://schemas.microsoft.com/office/drawing/2014/main" val="10005"/>
+                  </a:ext>
+                </a:extLst>
               </a:tr>
             </a:tbl>
           </a:graphicData>
@@ -5869,7 +6476,7 @@
       </p:graphicFrame>
       <p:sp>
         <p:nvSpPr>
-          <p:cNvPr id="5" name="Legend dot 1"/>
+          <p:cNvPr id="4" name="Legend dot 1"/>
           <p:cNvSpPr/>
           <p:nvPr/>
         </p:nvSpPr>
@@ -5886,6 +6493,13 @@
           </a:solidFill>
           <a:ln/>
         </p:spPr>
+        <p:txBody>
+          <a:bodyPr/>
+          <a:lstStyle/>
+          <a:p>
+            <a:endParaRPr lang="en-IN"/>
+          </a:p>
+        </p:txBody>
       </p:sp>
       <p:sp>
         <p:nvSpPr>
@@ -5908,11 +6522,11 @@
           <a:bodyPr wrap="square" lIns="0" tIns="0" rIns="0" bIns="0" rtlCol="0" anchor="ctr"/>
           <a:lstStyle/>
           <a:p>
-            <a:pPr indent="0" marL="0">
-              <a:buNone/>
-            </a:pPr>
-            <a:r>
-              <a:rPr lang="en-US" sz="1000" b="1" spc="200" kern="0" dirty="0">
+            <a:pPr marL="0" indent="0">
+              <a:buNone/>
+            </a:pPr>
+            <a:r>
+              <a:rPr lang="en-US" sz="1000" b="1" kern="0" spc="200" dirty="0">
                 <a:solidFill>
                   <a:schemeClr val="tx1"/>
                 </a:solidFill>
@@ -5942,6 +6556,13 @@
           </a:solidFill>
           <a:ln/>
         </p:spPr>
+        <p:txBody>
+          <a:bodyPr/>
+          <a:lstStyle/>
+          <a:p>
+            <a:endParaRPr lang="en-IN"/>
+          </a:p>
+        </p:txBody>
       </p:sp>
       <p:sp>
         <p:nvSpPr>
@@ -5964,11 +6585,11 @@
           <a:bodyPr wrap="square" lIns="0" tIns="0" rIns="0" bIns="0" rtlCol="0" anchor="ctr"/>
           <a:lstStyle/>
           <a:p>
-            <a:pPr indent="0" marL="0">
-              <a:buNone/>
-            </a:pPr>
-            <a:r>
-              <a:rPr lang="en-US" sz="1000" b="1" spc="200" kern="0" dirty="0">
+            <a:pPr marL="0" indent="0">
+              <a:buNone/>
+            </a:pPr>
+            <a:r>
+              <a:rPr lang="en-US" sz="1000" b="1" kern="0" spc="200" dirty="0">
                 <a:solidFill>
                   <a:schemeClr val="tx1"/>
                 </a:solidFill>
@@ -5998,6 +6619,13 @@
           </a:solidFill>
           <a:ln/>
         </p:spPr>
+        <p:txBody>
+          <a:bodyPr/>
+          <a:lstStyle/>
+          <a:p>
+            <a:endParaRPr lang="en-IN"/>
+          </a:p>
+        </p:txBody>
       </p:sp>
       <p:sp>
         <p:nvSpPr>
@@ -6020,11 +6648,11 @@
           <a:bodyPr wrap="square" lIns="0" tIns="0" rIns="0" bIns="0" rtlCol="0" anchor="ctr"/>
           <a:lstStyle/>
           <a:p>
-            <a:pPr indent="0" marL="0">
-              <a:buNone/>
-            </a:pPr>
-            <a:r>
-              <a:rPr lang="en-US" sz="1000" b="1" spc="200" kern="0" dirty="0">
+            <a:pPr marL="0" indent="0">
+              <a:buNone/>
+            </a:pPr>
+            <a:r>
+              <a:rPr lang="en-US" sz="1000" b="1" kern="0" spc="200" dirty="0">
                 <a:solidFill>
                   <a:schemeClr val="tx1"/>
                 </a:solidFill>
@@ -6054,6 +6682,13 @@
           </a:solidFill>
           <a:ln/>
         </p:spPr>
+        <p:txBody>
+          <a:bodyPr/>
+          <a:lstStyle/>
+          <a:p>
+            <a:endParaRPr lang="en-IN"/>
+          </a:p>
+        </p:txBody>
       </p:sp>
       <p:sp>
         <p:nvSpPr>
@@ -6076,11 +6711,11 @@
           <a:bodyPr wrap="square" lIns="0" tIns="0" rIns="0" bIns="0" rtlCol="0" anchor="ctr"/>
           <a:lstStyle/>
           <a:p>
-            <a:pPr indent="0" marL="0">
-              <a:buNone/>
-            </a:pPr>
-            <a:r>
-              <a:rPr lang="en-US" sz="1000" b="1" spc="200" kern="0" dirty="0">
+            <a:pPr marL="0" indent="0">
+              <a:buNone/>
+            </a:pPr>
+            <a:r>
+              <a:rPr lang="en-US" sz="1000" b="1" kern="0" spc="200" dirty="0">
                 <a:solidFill>
                   <a:schemeClr val="tx1"/>
                 </a:solidFill>
@@ -6088,51 +6723,6 @@
               <a:t>NOT ASSESSED</a:t>
             </a:r>
             <a:endParaRPr lang="en-US" sz="1000" dirty="0"/>
-          </a:p>
-        </p:txBody>
-      </p:sp>
-      <p:sp>
-        <p:nvSpPr>
-          <p:cNvPr id="25" name="Slide Number Placeholder 0"/>
-          <p:cNvSpPr>
-            <a:spLocks noGrp="1"/>
-          </p:cNvSpPr>
-          <p:nvPr>
-            <p:ph type="sldNum" sz="quarter" idx="4294967295"/>
-          </p:nvPr>
-        </p:nvSpPr>
-        <p:spPr>
-          <a:xfrm>
-            <a:off x="11219688" y="6345936"/>
-            <a:ext cx="457200" cy="219456"/>
-          </a:xfrm>
-          <a:prstGeom prst="rect">
-            <a:avLst/>
-          </a:prstGeom>
-          <a:extLst>
-            <a:ext uri="{C572A759-6A51-4108-AA02-DFA0A04FC94B}">
-              <ma14:wrappingTextBoxFlag xmlns:ma14="http://schemas.microsoft.com/office/mac/drawingml/2011/main" val="0"/>
-            </a:ext>
-          </a:extLst>
-        </p:spPr>
-        <p:txBody>
-          <a:bodyPr/>
-          <a:lstStyle>
-            <a:lvl1pPr>
-              <a:defRPr sz="900">
-                <a:solidFill>
-                  <a:srgbClr val="000000"/>
-                </a:solidFill>
-              </a:defRPr>
-            </a:lvl1pPr>
-          </a:lstStyle>
-          <a:p>
-            <a:pPr algn="r"/>
-            <a:fld id="{F7021451-1387-4CA6-816F-3879F97B5CBC}" type="slidenum">
-              <a:rPr b="0" lang="en-US"/>
-              <a:t>4</a:t>
-            </a:fld>
-            <a:endParaRPr lang="en-US"/>
           </a:p>
         </p:txBody>
       </p:sp>
@@ -6164,9 +6754,11 @@
       <p:sp>
         <p:nvSpPr>
           <p:cNvPr id="2" name="Text 1"/>
-          <p:cNvSpPr/>
+          <p:cNvSpPr>
+            <a:spLocks noGrp="1"/>
+          </p:cNvSpPr>
           <p:nvPr>
-            <p:ph idx="102" type="title" hasCustomPrompt="1"/>
+            <p:ph type="title" idx="102" hasCustomPrompt="1"/>
           </p:nvPr>
         </p:nvSpPr>
         <p:spPr>
@@ -6184,7 +6776,7 @@
           <a:bodyPr wrap="square" lIns="0" tIns="0" rIns="0" bIns="0" rtlCol="0" anchor="b"/>
           <a:lstStyle/>
           <a:p>
-            <a:pPr algn="l" indent="0" marL="0">
+            <a:pPr marL="0" indent="0" algn="l">
               <a:buNone/>
             </a:pPr>
             <a:r>
@@ -6202,9 +6794,11 @@
       <p:sp>
         <p:nvSpPr>
           <p:cNvPr id="3" name="Text 1"/>
-          <p:cNvSpPr/>
+          <p:cNvSpPr>
+            <a:spLocks noGrp="1"/>
+          </p:cNvSpPr>
           <p:nvPr>
-            <p:ph idx="103" type="body" hasCustomPrompt="1"/>
+            <p:ph type="body" idx="103" hasCustomPrompt="1"/>
           </p:nvPr>
         </p:nvSpPr>
         <p:spPr>
@@ -6222,7 +6816,7 @@
           <a:bodyPr wrap="square" lIns="0" tIns="0" rIns="0" bIns="0" rtlCol="0" anchor="t"/>
           <a:lstStyle/>
           <a:p>
-            <a:pPr algn="l" indent="0" marL="0">
+            <a:pPr marL="0" indent="0" algn="l">
               <a:buNone/>
             </a:pPr>
             <a:r>
@@ -6256,6 +6850,13 @@
           </a:solidFill>
           <a:ln/>
         </p:spPr>
+        <p:txBody>
+          <a:bodyPr/>
+          <a:lstStyle/>
+          <a:p>
+            <a:endParaRPr lang="en-IN"/>
+          </a:p>
+        </p:txBody>
       </p:sp>
       <p:sp>
         <p:nvSpPr>
@@ -6278,7 +6879,7 @@
           <a:bodyPr wrap="square" lIns="0" tIns="0" rIns="0" bIns="0" rtlCol="0" anchor="ctr"/>
           <a:lstStyle/>
           <a:p>
-            <a:pPr indent="0" marL="0">
+            <a:pPr marL="0" indent="0">
               <a:buNone/>
             </a:pPr>
             <a:r>
@@ -6314,7 +6915,7 @@
           <a:bodyPr wrap="square" lIns="0" tIns="0" rIns="0" bIns="0" rtlCol="0" anchor="t"/>
           <a:lstStyle/>
           <a:p>
-            <a:pPr indent="0" marL="0">
+            <a:pPr marL="0" indent="0">
               <a:buNone/>
             </a:pPr>
             <a:r>
@@ -6328,7 +6929,7 @@
             <a:endParaRPr lang="en-US" sz="1400" dirty="0"/>
           </a:p>
           <a:p>
-            <a:pPr indent="0" marL="0">
+            <a:pPr marL="0" indent="0">
               <a:buNone/>
             </a:pPr>
             <a:r>
@@ -6342,7 +6943,7 @@
             <a:endParaRPr lang="en-US" sz="1400" dirty="0"/>
           </a:p>
           <a:p>
-            <a:pPr indent="0" marL="0">
+            <a:pPr marL="0" indent="0">
               <a:buNone/>
             </a:pPr>
             <a:r>
@@ -6376,6 +6977,13 @@
           </a:solidFill>
           <a:ln/>
         </p:spPr>
+        <p:txBody>
+          <a:bodyPr/>
+          <a:lstStyle/>
+          <a:p>
+            <a:endParaRPr lang="en-IN"/>
+          </a:p>
+        </p:txBody>
       </p:sp>
       <p:sp>
         <p:nvSpPr>
@@ -6398,7 +7006,7 @@
           <a:bodyPr wrap="square" lIns="0" tIns="0" rIns="0" bIns="0" rtlCol="0" anchor="ctr"/>
           <a:lstStyle/>
           <a:p>
-            <a:pPr indent="0" marL="0">
+            <a:pPr marL="0" indent="0">
               <a:buNone/>
             </a:pPr>
             <a:r>
@@ -6434,7 +7042,7 @@
           <a:bodyPr wrap="square" lIns="0" tIns="0" rIns="0" bIns="0" rtlCol="0" anchor="t"/>
           <a:lstStyle/>
           <a:p>
-            <a:pPr indent="0" marL="0">
+            <a:pPr marL="0" indent="0">
               <a:buNone/>
             </a:pPr>
             <a:r>
@@ -6448,7 +7056,7 @@
             <a:endParaRPr lang="en-US" sz="1400" dirty="0"/>
           </a:p>
           <a:p>
-            <a:pPr indent="0" marL="0">
+            <a:pPr marL="0" indent="0">
               <a:buNone/>
             </a:pPr>
             <a:r>
@@ -6462,7 +7070,7 @@
             <a:endParaRPr lang="en-US" sz="1400" dirty="0"/>
           </a:p>
           <a:p>
-            <a:pPr indent="0" marL="0">
+            <a:pPr marL="0" indent="0">
               <a:buNone/>
             </a:pPr>
             <a:r>
@@ -6496,6 +7104,13 @@
           </a:solidFill>
           <a:ln/>
         </p:spPr>
+        <p:txBody>
+          <a:bodyPr/>
+          <a:lstStyle/>
+          <a:p>
+            <a:endParaRPr lang="en-IN"/>
+          </a:p>
+        </p:txBody>
       </p:sp>
       <p:sp>
         <p:nvSpPr>
@@ -6518,7 +7133,7 @@
           <a:bodyPr wrap="square" lIns="0" tIns="0" rIns="0" bIns="0" rtlCol="0" anchor="ctr"/>
           <a:lstStyle/>
           <a:p>
-            <a:pPr indent="0" marL="0">
+            <a:pPr marL="0" indent="0">
               <a:buNone/>
             </a:pPr>
             <a:r>
@@ -6554,7 +7169,7 @@
           <a:bodyPr wrap="square" lIns="0" tIns="0" rIns="0" bIns="0" rtlCol="0" anchor="t"/>
           <a:lstStyle/>
           <a:p>
-            <a:pPr indent="0" marL="0">
+            <a:pPr marL="0" indent="0">
               <a:buNone/>
             </a:pPr>
             <a:r>
@@ -6568,7 +7183,7 @@
             <a:endParaRPr lang="en-US" sz="1400" dirty="0"/>
           </a:p>
           <a:p>
-            <a:pPr indent="0" marL="0">
+            <a:pPr marL="0" indent="0">
               <a:buNone/>
             </a:pPr>
             <a:r>
@@ -6582,7 +7197,7 @@
             <a:endParaRPr lang="en-US" sz="1400" dirty="0"/>
           </a:p>
           <a:p>
-            <a:pPr indent="0" marL="0">
+            <a:pPr marL="0" indent="0">
               <a:buNone/>
             </a:pPr>
             <a:r>
@@ -6616,6 +7231,13 @@
           </a:solidFill>
           <a:ln/>
         </p:spPr>
+        <p:txBody>
+          <a:bodyPr/>
+          <a:lstStyle/>
+          <a:p>
+            <a:endParaRPr lang="en-IN"/>
+          </a:p>
+        </p:txBody>
       </p:sp>
       <p:sp>
         <p:nvSpPr>
@@ -6638,7 +7260,7 @@
           <a:bodyPr wrap="square" lIns="0" tIns="0" rIns="0" bIns="0" rtlCol="0" anchor="ctr"/>
           <a:lstStyle/>
           <a:p>
-            <a:pPr indent="0" marL="0">
+            <a:pPr marL="0" indent="0">
               <a:buNone/>
             </a:pPr>
             <a:r>
@@ -6674,7 +7296,7 @@
           <a:bodyPr wrap="square" lIns="0" tIns="0" rIns="0" bIns="0" rtlCol="0" anchor="t"/>
           <a:lstStyle/>
           <a:p>
-            <a:pPr indent="0" marL="0">
+            <a:pPr marL="0" indent="0">
               <a:buNone/>
             </a:pPr>
             <a:r>
@@ -6688,7 +7310,7 @@
             <a:endParaRPr lang="en-US" sz="1400" dirty="0"/>
           </a:p>
           <a:p>
-            <a:pPr indent="0" marL="0">
+            <a:pPr marL="0" indent="0">
               <a:buNone/>
             </a:pPr>
             <a:r>
@@ -6702,7 +7324,7 @@
             <a:endParaRPr lang="en-US" sz="1400" dirty="0"/>
           </a:p>
           <a:p>
-            <a:pPr indent="0" marL="0">
+            <a:pPr marL="0" indent="0">
               <a:buNone/>
             </a:pPr>
             <a:r>
@@ -6738,6 +7360,13 @@
           </a:solidFill>
           <a:ln/>
         </p:spPr>
+        <p:txBody>
+          <a:bodyPr/>
+          <a:lstStyle/>
+          <a:p>
+            <a:endParaRPr lang="en-IN"/>
+          </a:p>
+        </p:txBody>
       </p:sp>
       <p:sp>
         <p:nvSpPr>
@@ -6769,6 +7398,13 @@
             <a:prstDash val="solid"/>
           </a:ln>
         </p:spPr>
+        <p:txBody>
+          <a:bodyPr/>
+          <a:lstStyle/>
+          <a:p>
+            <a:endParaRPr lang="en-IN"/>
+          </a:p>
+        </p:txBody>
       </p:sp>
       <p:sp>
         <p:nvSpPr>
@@ -6791,7 +7427,7 @@
           <a:bodyPr wrap="square" lIns="0" tIns="0" rIns="0" bIns="0" rtlCol="0" anchor="ctr"/>
           <a:lstStyle/>
           <a:p>
-            <a:pPr indent="0" marL="0">
+            <a:pPr marL="0" indent="0">
               <a:buNone/>
             </a:pPr>
             <a:r>
@@ -6827,7 +7463,7 @@
           <a:bodyPr wrap="square" lIns="0" tIns="0" rIns="0" bIns="0" rtlCol="0" anchor="t"/>
           <a:lstStyle/>
           <a:p>
-            <a:pPr indent="0" marL="0">
+            <a:pPr marL="0" indent="0">
               <a:buNone/>
             </a:pPr>
             <a:r>
@@ -6841,7 +7477,7 @@
             <a:endParaRPr lang="en-US" sz="1400" dirty="0"/>
           </a:p>
           <a:p>
-            <a:pPr indent="0" marL="0">
+            <a:pPr marL="0" indent="0">
               <a:buNone/>
             </a:pPr>
             <a:r>
@@ -6882,7 +7518,7 @@
           <a:bodyPr wrap="square" lIns="0" tIns="0" rIns="0" bIns="0" rtlCol="0" anchor="ctr"/>
           <a:lstStyle/>
           <a:p>
-            <a:pPr algn="ctr" indent="0" marL="0">
+            <a:pPr marL="0" indent="0" algn="ctr">
               <a:buNone/>
             </a:pPr>
             <a:r>
@@ -6923,7 +7559,7 @@
           <a:bodyPr wrap="square" lIns="0" tIns="0" rIns="0" bIns="0" rtlCol="0" anchor="ctr"/>
           <a:lstStyle/>
           <a:p>
-            <a:pPr algn="ctr" indent="0" marL="0">
+            <a:pPr marL="0" indent="0" algn="ctr">
               <a:buNone/>
             </a:pPr>
             <a:r>
@@ -6964,7 +7600,7 @@
           <a:bodyPr wrap="square" lIns="0" tIns="0" rIns="0" bIns="0" rtlCol="0" anchor="ctr"/>
           <a:lstStyle/>
           <a:p>
-            <a:pPr algn="ctr" indent="0" marL="0">
+            <a:pPr marL="0" indent="0" algn="ctr">
               <a:buNone/>
             </a:pPr>
             <a:r>
@@ -7005,7 +7641,7 @@
           <a:bodyPr wrap="square" lIns="0" tIns="0" rIns="0" bIns="0" rtlCol="0" anchor="ctr"/>
           <a:lstStyle/>
           <a:p>
-            <a:pPr algn="ctr" indent="0" marL="0">
+            <a:pPr marL="0" indent="0" algn="ctr">
               <a:buNone/>
             </a:pPr>
             <a:r>
@@ -7046,7 +7682,7 @@
           <a:bodyPr wrap="square" lIns="0" tIns="0" rIns="0" bIns="0" rtlCol="0" anchor="ctr"/>
           <a:lstStyle/>
           <a:p>
-            <a:pPr algn="ctr" indent="0" marL="0">
+            <a:pPr marL="0" indent="0" algn="ctr">
               <a:buNone/>
             </a:pPr>
             <a:r>
@@ -7058,51 +7694,6 @@
               <a:t>NIST 800-53</a:t>
             </a:r>
             <a:endParaRPr lang="en-US" sz="1200" dirty="0"/>
-          </a:p>
-        </p:txBody>
-      </p:sp>
-      <p:sp>
-        <p:nvSpPr>
-          <p:cNvPr id="25" name="Slide Number Placeholder 0"/>
-          <p:cNvSpPr>
-            <a:spLocks noGrp="1"/>
-          </p:cNvSpPr>
-          <p:nvPr>
-            <p:ph type="sldNum" sz="quarter" idx="4294967295"/>
-          </p:nvPr>
-        </p:nvSpPr>
-        <p:spPr>
-          <a:xfrm>
-            <a:off x="11219688" y="6345936"/>
-            <a:ext cx="457200" cy="219456"/>
-          </a:xfrm>
-          <a:prstGeom prst="rect">
-            <a:avLst/>
-          </a:prstGeom>
-          <a:extLst>
-            <a:ext uri="{C572A759-6A51-4108-AA02-DFA0A04FC94B}">
-              <ma14:wrappingTextBoxFlag xmlns:ma14="http://schemas.microsoft.com/office/mac/drawingml/2011/main" val="0"/>
-            </a:ext>
-          </a:extLst>
-        </p:spPr>
-        <p:txBody>
-          <a:bodyPr/>
-          <a:lstStyle>
-            <a:lvl1pPr>
-              <a:defRPr sz="900">
-                <a:solidFill>
-                  <a:srgbClr val="FFFFFF"/>
-                </a:solidFill>
-              </a:defRPr>
-            </a:lvl1pPr>
-          </a:lstStyle>
-          <a:p>
-            <a:pPr algn="r"/>
-            <a:fld id="{F7021451-1387-4CA6-816F-3879F97B5CBC}" type="slidenum">
-              <a:rPr b="0" lang="en-US"/>
-              <a:t>5</a:t>
-            </a:fld>
-            <a:endParaRPr lang="en-US"/>
           </a:p>
         </p:txBody>
       </p:sp>
@@ -7134,9 +7725,11 @@
       <p:sp>
         <p:nvSpPr>
           <p:cNvPr id="2" name="Text 1"/>
-          <p:cNvSpPr/>
+          <p:cNvSpPr>
+            <a:spLocks noGrp="1"/>
+          </p:cNvSpPr>
           <p:nvPr>
-            <p:ph idx="102" type="title" hasCustomPrompt="1"/>
+            <p:ph type="title" idx="102" hasCustomPrompt="1"/>
           </p:nvPr>
         </p:nvSpPr>
         <p:spPr>
@@ -7154,7 +7747,7 @@
           <a:bodyPr wrap="square" lIns="0" tIns="0" rIns="0" bIns="0" rtlCol="0" anchor="b"/>
           <a:lstStyle/>
           <a:p>
-            <a:pPr algn="l" indent="0" marL="0">
+            <a:pPr marL="0" indent="0" algn="l">
               <a:buNone/>
             </a:pPr>
             <a:r>
@@ -7172,9 +7765,11 @@
       <p:sp>
         <p:nvSpPr>
           <p:cNvPr id="3" name="Text 1"/>
-          <p:cNvSpPr/>
+          <p:cNvSpPr>
+            <a:spLocks noGrp="1"/>
+          </p:cNvSpPr>
           <p:nvPr>
-            <p:ph idx="103" type="body" hasCustomPrompt="1"/>
+            <p:ph type="body" idx="103" hasCustomPrompt="1"/>
           </p:nvPr>
         </p:nvSpPr>
         <p:spPr>
@@ -7192,7 +7787,7 @@
           <a:bodyPr wrap="square" lIns="0" tIns="0" rIns="0" bIns="0" rtlCol="0" anchor="t"/>
           <a:lstStyle/>
           <a:p>
-            <a:pPr algn="l" indent="0" marL="0">
+            <a:pPr marL="0" indent="0" algn="l">
               <a:buNone/>
             </a:pPr>
             <a:r>
@@ -7228,11 +7823,11 @@
           <a:bodyPr wrap="square" lIns="0" tIns="0" rIns="0" bIns="0" rtlCol="0" anchor="ctr"/>
           <a:lstStyle/>
           <a:p>
-            <a:pPr indent="0" marL="0">
-              <a:buNone/>
-            </a:pPr>
-            <a:r>
-              <a:rPr lang="en-US" sz="1400" spc="400" kern="0" dirty="0">
+            <a:pPr marL="0" indent="0">
+              <a:buNone/>
+            </a:pPr>
+            <a:r>
+              <a:rPr lang="en-US" sz="1400" kern="0" spc="400" dirty="0">
                 <a:solidFill>
                   <a:schemeClr val="tx1"/>
                 </a:solidFill>
@@ -7270,7 +7865,7 @@
           <a:bodyPr wrap="square" lIns="0" tIns="0" rIns="0" bIns="0" rtlCol="0" anchor="ctr"/>
           <a:lstStyle/>
           <a:p>
-            <a:pPr algn="ctr" indent="0" marL="0">
+            <a:pPr marL="0" indent="0" algn="ctr">
               <a:buNone/>
             </a:pPr>
             <a:r>
@@ -7309,7 +7904,7 @@
           <a:bodyPr wrap="square" lIns="0" tIns="0" rIns="0" bIns="0" rtlCol="0" anchor="ctr"/>
           <a:lstStyle/>
           <a:p>
-            <a:pPr indent="0" marL="0">
+            <a:pPr marL="0" indent="0">
               <a:buNone/>
             </a:pPr>
             <a:r>
@@ -7348,7 +7943,7 @@
           <a:bodyPr wrap="square" lIns="0" tIns="0" rIns="0" bIns="0" rtlCol="0" anchor="ctr"/>
           <a:lstStyle/>
           <a:p>
-            <a:pPr algn="ctr" indent="0" marL="0">
+            <a:pPr marL="0" indent="0" algn="ctr">
               <a:buNone/>
             </a:pPr>
             <a:r>
@@ -7387,7 +7982,7 @@
           <a:bodyPr wrap="square" lIns="0" tIns="0" rIns="0" bIns="0" rtlCol="0" anchor="ctr"/>
           <a:lstStyle/>
           <a:p>
-            <a:pPr indent="0" marL="0">
+            <a:pPr marL="0" indent="0">
               <a:buNone/>
             </a:pPr>
             <a:r>
@@ -7426,7 +8021,7 @@
           <a:bodyPr wrap="square" lIns="0" tIns="0" rIns="0" bIns="0" rtlCol="0" anchor="ctr"/>
           <a:lstStyle/>
           <a:p>
-            <a:pPr algn="ctr" indent="0" marL="0">
+            <a:pPr marL="0" indent="0" algn="ctr">
               <a:buNone/>
             </a:pPr>
             <a:r>
@@ -7465,7 +8060,7 @@
           <a:bodyPr wrap="square" lIns="0" tIns="0" rIns="0" bIns="0" rtlCol="0" anchor="ctr"/>
           <a:lstStyle/>
           <a:p>
-            <a:pPr indent="0" marL="0">
+            <a:pPr marL="0" indent="0">
               <a:buNone/>
             </a:pPr>
             <a:r>
@@ -7504,7 +8099,7 @@
           <a:bodyPr wrap="square" lIns="0" tIns="0" rIns="0" bIns="0" rtlCol="0" anchor="ctr"/>
           <a:lstStyle/>
           <a:p>
-            <a:pPr algn="ctr" indent="0" marL="0">
+            <a:pPr marL="0" indent="0" algn="ctr">
               <a:buNone/>
             </a:pPr>
             <a:r>
@@ -7543,7 +8138,7 @@
           <a:bodyPr wrap="square" lIns="0" tIns="0" rIns="0" bIns="0" rtlCol="0" anchor="ctr"/>
           <a:lstStyle/>
           <a:p>
-            <a:pPr indent="0" marL="0">
+            <a:pPr marL="0" indent="0">
               <a:buNone/>
             </a:pPr>
             <a:r>
@@ -7560,7 +8155,7 @@
       </p:sp>
       <p:graphicFrame>
         <p:nvGraphicFramePr>
-          <p:cNvPr id="7" name="Sample results table"/>
+          <p:cNvPr id="13" name="Sample results table"/>
           <p:cNvGraphicFramePr>
             <a:graphicFrameLocks noGrp="1"/>
           </p:cNvGraphicFramePr>
@@ -7574,15 +8169,27 @@
         </p:nvGraphicFramePr>
         <p:xfrm>
           <a:off x="5989320" y="1938528"/>
-          <a:ext cx="5687568" cy="914400"/>
+          <a:ext cx="5687568" cy="1993392"/>
         </p:xfrm>
         <a:graphic>
           <a:graphicData uri="http://schemas.openxmlformats.org/drawingml/2006/table">
             <a:tbl>
               <a:tblPr/>
               <a:tblGrid>
-                <a:gridCol w="3108960"/>
-                <a:gridCol w="2578608"/>
+                <a:gridCol w="3108960">
+                  <a:extLst>
+                    <a:ext uri="{9D8B030D-6E8A-4147-A177-3AD203B41FA5}">
+                      <a16:colId xmlns:a16="http://schemas.microsoft.com/office/drawing/2014/main" val="20000"/>
+                    </a:ext>
+                  </a:extLst>
+                </a:gridCol>
+                <a:gridCol w="2578608">
+                  <a:extLst>
+                    <a:ext uri="{9D8B030D-6E8A-4147-A177-3AD203B41FA5}">
+                      <a16:colId xmlns:a16="http://schemas.microsoft.com/office/drawing/2014/main" val="20001"/>
+                    </a:ext>
+                  </a:extLst>
+                </a:gridCol>
               </a:tblGrid>
               <a:tr h="347472">
                 <a:tc>
@@ -7590,7 +8197,7 @@
                     <a:bodyPr/>
                     <a:lstStyle/>
                     <a:p>
-                      <a:pPr indent="0" marL="0">
+                      <a:pPr marL="0" indent="0">
                         <a:buNone/>
                       </a:pPr>
                       <a:r>
@@ -7604,7 +8211,7 @@
                       <a:endParaRPr lang="en-US" sz="1300" dirty="0"/>
                     </a:p>
                   </a:txBody>
-                  <a:tcPr marL="91440" marR="91440" marT="36576" marB="73152" anchor="b">
+                  <a:tcPr marT="36576" marB="73152" anchor="b">
                     <a:lnL w="0" cap="flat" cmpd="sng" algn="ctr">
                       <a:noFill/>
                     </a:lnL>
@@ -7630,7 +8237,7 @@
                     <a:bodyPr/>
                     <a:lstStyle/>
                     <a:p>
-                      <a:pPr indent="0" marL="0">
+                      <a:pPr marL="0" indent="0">
                         <a:buNone/>
                       </a:pPr>
                       <a:r>
@@ -7644,7 +8251,7 @@
                       <a:endParaRPr lang="en-US" sz="1300" dirty="0"/>
                     </a:p>
                   </a:txBody>
-                  <a:tcPr marL="91440" marR="91440" marT="36576" marB="73152" anchor="b">
+                  <a:tcPr marT="36576" marB="73152" anchor="b">
                     <a:lnL w="0" cap="flat" cmpd="sng" algn="ctr">
                       <a:noFill/>
                     </a:lnL>
@@ -7665,6 +8272,11 @@
                     </a:lnB>
                   </a:tcPr>
                 </a:tc>
+                <a:extLst>
+                  <a:ext uri="{0D108BD9-81ED-4DB2-BD59-A6C34878D82A}">
+                    <a16:rowId xmlns:a16="http://schemas.microsoft.com/office/drawing/2014/main" val="10000"/>
+                  </a:ext>
+                </a:extLst>
               </a:tr>
               <a:tr h="329184">
                 <a:tc>
@@ -7672,7 +8284,7 @@
                     <a:bodyPr/>
                     <a:lstStyle/>
                     <a:p>
-                      <a:pPr indent="0" marL="0">
+                      <a:pPr marL="0" indent="0">
                         <a:buNone/>
                       </a:pPr>
                       <a:r>
@@ -7686,15 +8298,21 @@
                       <a:endParaRPr lang="en-US" sz="1200" dirty="0"/>
                     </a:p>
                   </a:txBody>
-                  <a:tcPr marL="91440" marR="91440" marT="45720" marB="45720" anchor="ctr">
+                  <a:tcPr anchor="ctr">
                     <a:lnL w="0" cap="flat" cmpd="sng" algn="ctr">
                       <a:noFill/>
                     </a:lnL>
                     <a:lnR w="0" cap="flat" cmpd="sng" algn="ctr">
                       <a:noFill/>
                     </a:lnR>
-                    <a:lnT w="0" cap="flat" cmpd="sng" algn="ctr">
-                      <a:noFill/>
+                    <a:lnT w="22225" cap="flat" cmpd="sng" algn="ctr">
+                      <a:solidFill>
+                        <a:srgbClr val="000000"/>
+                      </a:solidFill>
+                      <a:prstDash val="solid"/>
+                      <a:round/>
+                      <a:headEnd type="none" w="med" len="med"/>
+                      <a:tailEnd type="none" w="med" len="med"/>
                     </a:lnT>
                     <a:lnB w="12700" cap="flat" cmpd="sng" algn="ctr">
                       <a:solidFill>
@@ -7712,7 +8330,7 @@
                     <a:bodyPr/>
                     <a:lstStyle/>
                     <a:p>
-                      <a:pPr indent="0" marL="0">
+                      <a:pPr marL="0" indent="0">
                         <a:buNone/>
                       </a:pPr>
                       <a:r>
@@ -7726,15 +8344,21 @@
                       <a:endParaRPr lang="en-US" sz="1200" dirty="0"/>
                     </a:p>
                   </a:txBody>
-                  <a:tcPr marL="347472" marR="91440" marT="27432" marB="27432" anchor="ctr">
+                  <a:tcPr marL="347472" marT="27432" marB="27432" anchor="ctr">
                     <a:lnL w="0" cap="flat" cmpd="sng" algn="ctr">
                       <a:noFill/>
                     </a:lnL>
                     <a:lnR w="0" cap="flat" cmpd="sng" algn="ctr">
                       <a:noFill/>
                     </a:lnR>
-                    <a:lnT w="0" cap="flat" cmpd="sng" algn="ctr">
-                      <a:noFill/>
+                    <a:lnT w="22225" cap="flat" cmpd="sng" algn="ctr">
+                      <a:solidFill>
+                        <a:srgbClr val="000000"/>
+                      </a:solidFill>
+                      <a:prstDash val="solid"/>
+                      <a:round/>
+                      <a:headEnd type="none" w="med" len="med"/>
+                      <a:tailEnd type="none" w="med" len="med"/>
                     </a:lnT>
                     <a:lnB w="12700" cap="flat" cmpd="sng" algn="ctr">
                       <a:solidFill>
@@ -7747,6 +8371,11 @@
                     </a:lnB>
                   </a:tcPr>
                 </a:tc>
+                <a:extLst>
+                  <a:ext uri="{0D108BD9-81ED-4DB2-BD59-A6C34878D82A}">
+                    <a16:rowId xmlns:a16="http://schemas.microsoft.com/office/drawing/2014/main" val="10001"/>
+                  </a:ext>
+                </a:extLst>
               </a:tr>
               <a:tr h="329184">
                 <a:tc>
@@ -7754,7 +8383,7 @@
                     <a:bodyPr/>
                     <a:lstStyle/>
                     <a:p>
-                      <a:pPr indent="0" marL="0">
+                      <a:pPr marL="0" indent="0">
                         <a:buNone/>
                       </a:pPr>
                       <a:r>
@@ -7768,15 +8397,21 @@
                       <a:endParaRPr lang="en-US" sz="1200" dirty="0"/>
                     </a:p>
                   </a:txBody>
-                  <a:tcPr marL="91440" marR="91440" marT="45720" marB="45720" anchor="ctr">
+                  <a:tcPr anchor="ctr">
                     <a:lnL w="0" cap="flat" cmpd="sng" algn="ctr">
                       <a:noFill/>
                     </a:lnL>
                     <a:lnR w="0" cap="flat" cmpd="sng" algn="ctr">
                       <a:noFill/>
                     </a:lnR>
-                    <a:lnT w="0" cap="flat" cmpd="sng" algn="ctr">
-                      <a:noFill/>
+                    <a:lnT w="12700" cap="flat" cmpd="sng" algn="ctr">
+                      <a:solidFill>
+                        <a:srgbClr val="7F7F7F"/>
+                      </a:solidFill>
+                      <a:prstDash val="sysDot"/>
+                      <a:round/>
+                      <a:headEnd type="none" w="med" len="med"/>
+                      <a:tailEnd type="none" w="med" len="med"/>
                     </a:lnT>
                     <a:lnB w="12700" cap="flat" cmpd="sng" algn="ctr">
                       <a:solidFill>
@@ -7794,7 +8429,7 @@
                     <a:bodyPr/>
                     <a:lstStyle/>
                     <a:p>
-                      <a:pPr indent="0" marL="0">
+                      <a:pPr marL="0" indent="0">
                         <a:buNone/>
                       </a:pPr>
                       <a:r>
@@ -7808,15 +8443,21 @@
                       <a:endParaRPr lang="en-US" sz="1200" dirty="0"/>
                     </a:p>
                   </a:txBody>
-                  <a:tcPr marL="347472" marR="91440" marT="27432" marB="27432" anchor="ctr">
+                  <a:tcPr marL="347472" marT="27432" marB="27432" anchor="ctr">
                     <a:lnL w="0" cap="flat" cmpd="sng" algn="ctr">
                       <a:noFill/>
                     </a:lnL>
                     <a:lnR w="0" cap="flat" cmpd="sng" algn="ctr">
                       <a:noFill/>
                     </a:lnR>
-                    <a:lnT w="0" cap="flat" cmpd="sng" algn="ctr">
-                      <a:noFill/>
+                    <a:lnT w="12700" cap="flat" cmpd="sng" algn="ctr">
+                      <a:solidFill>
+                        <a:srgbClr val="7F7F7F"/>
+                      </a:solidFill>
+                      <a:prstDash val="sysDot"/>
+                      <a:round/>
+                      <a:headEnd type="none" w="med" len="med"/>
+                      <a:tailEnd type="none" w="med" len="med"/>
                     </a:lnT>
                     <a:lnB w="12700" cap="flat" cmpd="sng" algn="ctr">
                       <a:solidFill>
@@ -7829,6 +8470,11 @@
                     </a:lnB>
                   </a:tcPr>
                 </a:tc>
+                <a:extLst>
+                  <a:ext uri="{0D108BD9-81ED-4DB2-BD59-A6C34878D82A}">
+                    <a16:rowId xmlns:a16="http://schemas.microsoft.com/office/drawing/2014/main" val="10002"/>
+                  </a:ext>
+                </a:extLst>
               </a:tr>
               <a:tr h="329184">
                 <a:tc>
@@ -7836,7 +8482,7 @@
                     <a:bodyPr/>
                     <a:lstStyle/>
                     <a:p>
-                      <a:pPr indent="0" marL="0">
+                      <a:pPr marL="0" indent="0">
                         <a:buNone/>
                       </a:pPr>
                       <a:r>
@@ -7850,15 +8496,21 @@
                       <a:endParaRPr lang="en-US" sz="1200" dirty="0"/>
                     </a:p>
                   </a:txBody>
-                  <a:tcPr marL="91440" marR="91440" marT="45720" marB="45720" anchor="ctr">
+                  <a:tcPr anchor="ctr">
                     <a:lnL w="0" cap="flat" cmpd="sng" algn="ctr">
                       <a:noFill/>
                     </a:lnL>
                     <a:lnR w="0" cap="flat" cmpd="sng" algn="ctr">
                       <a:noFill/>
                     </a:lnR>
-                    <a:lnT w="0" cap="flat" cmpd="sng" algn="ctr">
-                      <a:noFill/>
+                    <a:lnT w="12700" cap="flat" cmpd="sng" algn="ctr">
+                      <a:solidFill>
+                        <a:srgbClr val="7F7F7F"/>
+                      </a:solidFill>
+                      <a:prstDash val="sysDot"/>
+                      <a:round/>
+                      <a:headEnd type="none" w="med" len="med"/>
+                      <a:tailEnd type="none" w="med" len="med"/>
                     </a:lnT>
                     <a:lnB w="12700" cap="flat" cmpd="sng" algn="ctr">
                       <a:solidFill>
@@ -7876,7 +8528,7 @@
                     <a:bodyPr/>
                     <a:lstStyle/>
                     <a:p>
-                      <a:pPr indent="0" marL="0">
+                      <a:pPr marL="0" indent="0">
                         <a:buNone/>
                       </a:pPr>
                       <a:r>
@@ -7890,15 +8542,21 @@
                       <a:endParaRPr lang="en-US" sz="1200" dirty="0"/>
                     </a:p>
                   </a:txBody>
-                  <a:tcPr marL="347472" marR="91440" marT="27432" marB="27432" anchor="ctr">
+                  <a:tcPr marL="347472" marT="27432" marB="27432" anchor="ctr">
                     <a:lnL w="0" cap="flat" cmpd="sng" algn="ctr">
                       <a:noFill/>
                     </a:lnL>
                     <a:lnR w="0" cap="flat" cmpd="sng" algn="ctr">
                       <a:noFill/>
                     </a:lnR>
-                    <a:lnT w="0" cap="flat" cmpd="sng" algn="ctr">
-                      <a:noFill/>
+                    <a:lnT w="12700" cap="flat" cmpd="sng" algn="ctr">
+                      <a:solidFill>
+                        <a:srgbClr val="7F7F7F"/>
+                      </a:solidFill>
+                      <a:prstDash val="sysDot"/>
+                      <a:round/>
+                      <a:headEnd type="none" w="med" len="med"/>
+                      <a:tailEnd type="none" w="med" len="med"/>
                     </a:lnT>
                     <a:lnB w="12700" cap="flat" cmpd="sng" algn="ctr">
                       <a:solidFill>
@@ -7911,6 +8569,11 @@
                     </a:lnB>
                   </a:tcPr>
                 </a:tc>
+                <a:extLst>
+                  <a:ext uri="{0D108BD9-81ED-4DB2-BD59-A6C34878D82A}">
+                    <a16:rowId xmlns:a16="http://schemas.microsoft.com/office/drawing/2014/main" val="10003"/>
+                  </a:ext>
+                </a:extLst>
               </a:tr>
               <a:tr h="329184">
                 <a:tc>
@@ -7918,7 +8581,7 @@
                     <a:bodyPr/>
                     <a:lstStyle/>
                     <a:p>
-                      <a:pPr indent="0" marL="0">
+                      <a:pPr marL="0" indent="0">
                         <a:buNone/>
                       </a:pPr>
                       <a:r>
@@ -7932,15 +8595,21 @@
                       <a:endParaRPr lang="en-US" sz="1200" dirty="0"/>
                     </a:p>
                   </a:txBody>
-                  <a:tcPr marL="91440" marR="91440" marT="45720" marB="45720" anchor="ctr">
+                  <a:tcPr anchor="ctr">
                     <a:lnL w="0" cap="flat" cmpd="sng" algn="ctr">
                       <a:noFill/>
                     </a:lnL>
                     <a:lnR w="0" cap="flat" cmpd="sng" algn="ctr">
                       <a:noFill/>
                     </a:lnR>
-                    <a:lnT w="0" cap="flat" cmpd="sng" algn="ctr">
-                      <a:noFill/>
+                    <a:lnT w="12700" cap="flat" cmpd="sng" algn="ctr">
+                      <a:solidFill>
+                        <a:srgbClr val="7F7F7F"/>
+                      </a:solidFill>
+                      <a:prstDash val="sysDot"/>
+                      <a:round/>
+                      <a:headEnd type="none" w="med" len="med"/>
+                      <a:tailEnd type="none" w="med" len="med"/>
                     </a:lnT>
                     <a:lnB w="12700" cap="flat" cmpd="sng" algn="ctr">
                       <a:solidFill>
@@ -7958,7 +8627,7 @@
                     <a:bodyPr/>
                     <a:lstStyle/>
                     <a:p>
-                      <a:pPr indent="0" marL="0">
+                      <a:pPr marL="0" indent="0">
                         <a:buNone/>
                       </a:pPr>
                       <a:r>
@@ -7972,15 +8641,21 @@
                       <a:endParaRPr lang="en-US" sz="1200" dirty="0"/>
                     </a:p>
                   </a:txBody>
-                  <a:tcPr marL="347472" marR="91440" marT="27432" marB="27432" anchor="ctr">
+                  <a:tcPr marL="347472" marT="27432" marB="27432" anchor="ctr">
                     <a:lnL w="0" cap="flat" cmpd="sng" algn="ctr">
                       <a:noFill/>
                     </a:lnL>
                     <a:lnR w="0" cap="flat" cmpd="sng" algn="ctr">
                       <a:noFill/>
                     </a:lnR>
-                    <a:lnT w="0" cap="flat" cmpd="sng" algn="ctr">
-                      <a:noFill/>
+                    <a:lnT w="12700" cap="flat" cmpd="sng" algn="ctr">
+                      <a:solidFill>
+                        <a:srgbClr val="7F7F7F"/>
+                      </a:solidFill>
+                      <a:prstDash val="sysDot"/>
+                      <a:round/>
+                      <a:headEnd type="none" w="med" len="med"/>
+                      <a:tailEnd type="none" w="med" len="med"/>
                     </a:lnT>
                     <a:lnB w="12700" cap="flat" cmpd="sng" algn="ctr">
                       <a:solidFill>
@@ -7993,6 +8668,11 @@
                     </a:lnB>
                   </a:tcPr>
                 </a:tc>
+                <a:extLst>
+                  <a:ext uri="{0D108BD9-81ED-4DB2-BD59-A6C34878D82A}">
+                    <a16:rowId xmlns:a16="http://schemas.microsoft.com/office/drawing/2014/main" val="10004"/>
+                  </a:ext>
+                </a:extLst>
               </a:tr>
               <a:tr h="329184">
                 <a:tc>
@@ -8000,7 +8680,7 @@
                     <a:bodyPr/>
                     <a:lstStyle/>
                     <a:p>
-                      <a:pPr indent="0" marL="0">
+                      <a:pPr marL="0" indent="0">
                         <a:buNone/>
                       </a:pPr>
                       <a:r>
@@ -8014,15 +8694,21 @@
                       <a:endParaRPr lang="en-US" sz="1200" dirty="0"/>
                     </a:p>
                   </a:txBody>
-                  <a:tcPr marL="91440" marR="91440" marT="45720" marB="45720" anchor="ctr">
+                  <a:tcPr anchor="ctr">
                     <a:lnL w="0" cap="flat" cmpd="sng" algn="ctr">
                       <a:noFill/>
                     </a:lnL>
                     <a:lnR w="0" cap="flat" cmpd="sng" algn="ctr">
                       <a:noFill/>
                     </a:lnR>
-                    <a:lnT w="0" cap="flat" cmpd="sng" algn="ctr">
-                      <a:noFill/>
+                    <a:lnT w="12700" cap="flat" cmpd="sng" algn="ctr">
+                      <a:solidFill>
+                        <a:srgbClr val="7F7F7F"/>
+                      </a:solidFill>
+                      <a:prstDash val="sysDot"/>
+                      <a:round/>
+                      <a:headEnd type="none" w="med" len="med"/>
+                      <a:tailEnd type="none" w="med" len="med"/>
                     </a:lnT>
                     <a:lnB w="12700" cap="flat" cmpd="sng" algn="ctr">
                       <a:solidFill>
@@ -8040,7 +8726,7 @@
                     <a:bodyPr/>
                     <a:lstStyle/>
                     <a:p>
-                      <a:pPr indent="0" marL="0">
+                      <a:pPr marL="0" indent="0">
                         <a:buNone/>
                       </a:pPr>
                       <a:r>
@@ -8054,15 +8740,21 @@
                       <a:endParaRPr lang="en-US" sz="1200" dirty="0"/>
                     </a:p>
                   </a:txBody>
-                  <a:tcPr marL="347472" marR="91440" marT="27432" marB="27432" anchor="ctr">
+                  <a:tcPr marL="347472" marT="27432" marB="27432" anchor="ctr">
                     <a:lnL w="0" cap="flat" cmpd="sng" algn="ctr">
                       <a:noFill/>
                     </a:lnL>
                     <a:lnR w="0" cap="flat" cmpd="sng" algn="ctr">
                       <a:noFill/>
                     </a:lnR>
-                    <a:lnT w="0" cap="flat" cmpd="sng" algn="ctr">
-                      <a:noFill/>
+                    <a:lnT w="12700" cap="flat" cmpd="sng" algn="ctr">
+                      <a:solidFill>
+                        <a:srgbClr val="7F7F7F"/>
+                      </a:solidFill>
+                      <a:prstDash val="sysDot"/>
+                      <a:round/>
+                      <a:headEnd type="none" w="med" len="med"/>
+                      <a:tailEnd type="none" w="med" len="med"/>
                     </a:lnT>
                     <a:lnB w="12700" cap="flat" cmpd="sng" algn="ctr">
                       <a:solidFill>
@@ -8075,6 +8767,11 @@
                     </a:lnB>
                   </a:tcPr>
                 </a:tc>
+                <a:extLst>
+                  <a:ext uri="{0D108BD9-81ED-4DB2-BD59-A6C34878D82A}">
+                    <a16:rowId xmlns:a16="http://schemas.microsoft.com/office/drawing/2014/main" val="10005"/>
+                  </a:ext>
+                </a:extLst>
               </a:tr>
             </a:tbl>
           </a:graphicData>
@@ -8099,6 +8796,13 @@
           </a:solidFill>
           <a:ln/>
         </p:spPr>
+        <p:txBody>
+          <a:bodyPr/>
+          <a:lstStyle/>
+          <a:p>
+            <a:endParaRPr lang="en-IN"/>
+          </a:p>
+        </p:txBody>
       </p:sp>
       <p:sp>
         <p:nvSpPr>
@@ -8119,6 +8823,13 @@
           </a:solidFill>
           <a:ln/>
         </p:spPr>
+        <p:txBody>
+          <a:bodyPr/>
+          <a:lstStyle/>
+          <a:p>
+            <a:endParaRPr lang="en-IN"/>
+          </a:p>
+        </p:txBody>
       </p:sp>
       <p:sp>
         <p:nvSpPr>
@@ -8139,6 +8850,13 @@
           </a:solidFill>
           <a:ln/>
         </p:spPr>
+        <p:txBody>
+          <a:bodyPr/>
+          <a:lstStyle/>
+          <a:p>
+            <a:endParaRPr lang="en-IN"/>
+          </a:p>
+        </p:txBody>
       </p:sp>
       <p:sp>
         <p:nvSpPr>
@@ -8159,6 +8877,13 @@
           </a:solidFill>
           <a:ln/>
         </p:spPr>
+        <p:txBody>
+          <a:bodyPr/>
+          <a:lstStyle/>
+          <a:p>
+            <a:endParaRPr lang="en-IN"/>
+          </a:p>
+        </p:txBody>
       </p:sp>
       <p:sp>
         <p:nvSpPr>
@@ -8179,17 +8904,24 @@
           </a:solidFill>
           <a:ln/>
         </p:spPr>
+        <p:txBody>
+          <a:bodyPr/>
+          <a:lstStyle/>
+          <a:p>
+            <a:endParaRPr lang="en-IN"/>
+          </a:p>
+        </p:txBody>
       </p:sp>
       <p:pic>
         <p:nvPicPr>
-          <p:cNvPr id="19" name="Attestation excerpt" descr="Attestation and sign-off excerpt from page 17 of the sample report">    </p:cNvPr>
+          <p:cNvPr id="19" name="Attestation excerpt" descr="Attestation and sign-off excerpt from page 17 of the sample report"/>
           <p:cNvPicPr>
             <a:picLocks noChangeAspect="1"/>
           </p:cNvPicPr>
           <p:nvPr/>
         </p:nvPicPr>
         <p:blipFill>
-          <a:blip r:embed="rId1"/>
+          <a:blip r:embed="rId3"/>
           <a:stretch>
             <a:fillRect/>
           </a:stretch>
@@ -8225,6 +8957,13 @@
             <a:prstDash val="solid"/>
           </a:ln>
         </p:spPr>
+        <p:txBody>
+          <a:bodyPr/>
+          <a:lstStyle/>
+          <a:p>
+            <a:endParaRPr lang="en-IN"/>
+          </a:p>
+        </p:txBody>
       </p:sp>
       <p:sp>
         <p:nvSpPr>
@@ -8247,11 +8986,11 @@
           <a:bodyPr wrap="square" lIns="0" tIns="0" rIns="0" bIns="0" rtlCol="0" anchor="ctr"/>
           <a:lstStyle/>
           <a:p>
-            <a:pPr indent="0" marL="0">
-              <a:buNone/>
-            </a:pPr>
-            <a:r>
-              <a:rPr lang="en-US" sz="900" i="1" spc="100" kern="0" dirty="0">
+            <a:pPr marL="0" indent="0">
+              <a:buNone/>
+            </a:pPr>
+            <a:r>
+              <a:rPr lang="en-US" sz="900" i="1" kern="0" spc="100" dirty="0">
                 <a:solidFill>
                   <a:srgbClr val="4D4D4D"/>
                 </a:solidFill>
@@ -8259,51 +8998,6 @@
               <a:t>EXCERPT FROM PAGE 17. INTERNAL EVIDENCE FOR REVIEW, NOT AN INDEPENDENT AUDIT OPINION.</a:t>
             </a:r>
             <a:endParaRPr lang="en-US" sz="900" dirty="0"/>
-          </a:p>
-        </p:txBody>
-      </p:sp>
-      <p:sp>
-        <p:nvSpPr>
-          <p:cNvPr id="25" name="Slide Number Placeholder 0"/>
-          <p:cNvSpPr>
-            <a:spLocks noGrp="1"/>
-          </p:cNvSpPr>
-          <p:nvPr>
-            <p:ph type="sldNum" sz="quarter" idx="4294967295"/>
-          </p:nvPr>
-        </p:nvSpPr>
-        <p:spPr>
-          <a:xfrm>
-            <a:off x="11219688" y="6345936"/>
-            <a:ext cx="457200" cy="219456"/>
-          </a:xfrm>
-          <a:prstGeom prst="rect">
-            <a:avLst/>
-          </a:prstGeom>
-          <a:extLst>
-            <a:ext uri="{C572A759-6A51-4108-AA02-DFA0A04FC94B}">
-              <ma14:wrappingTextBoxFlag xmlns:ma14="http://schemas.microsoft.com/office/mac/drawingml/2011/main" val="0"/>
-            </a:ext>
-          </a:extLst>
-        </p:spPr>
-        <p:txBody>
-          <a:bodyPr/>
-          <a:lstStyle>
-            <a:lvl1pPr>
-              <a:defRPr sz="900">
-                <a:solidFill>
-                  <a:srgbClr val="000000"/>
-                </a:solidFill>
-              </a:defRPr>
-            </a:lvl1pPr>
-          </a:lstStyle>
-          <a:p>
-            <a:pPr algn="r"/>
-            <a:fld id="{F7021451-1387-4CA6-816F-3879F97B5CBC}" type="slidenum">
-              <a:rPr b="0" lang="en-US"/>
-              <a:t>6</a:t>
-            </a:fld>
-            <a:endParaRPr lang="en-US"/>
           </a:p>
         </p:txBody>
       </p:sp>
@@ -8335,9 +9029,11 @@
       <p:sp>
         <p:nvSpPr>
           <p:cNvPr id="2" name="Text 1"/>
-          <p:cNvSpPr/>
+          <p:cNvSpPr>
+            <a:spLocks noGrp="1"/>
+          </p:cNvSpPr>
           <p:nvPr>
-            <p:ph idx="102" type="title" hasCustomPrompt="1"/>
+            <p:ph type="title" idx="102" hasCustomPrompt="1"/>
           </p:nvPr>
         </p:nvSpPr>
         <p:spPr>
@@ -8355,7 +9051,7 @@
           <a:bodyPr wrap="square" lIns="0" tIns="0" rIns="0" bIns="0" rtlCol="0" anchor="b"/>
           <a:lstStyle/>
           <a:p>
-            <a:pPr algn="l" indent="0" marL="0">
+            <a:pPr marL="0" indent="0" algn="l">
               <a:buNone/>
             </a:pPr>
             <a:r>
@@ -8373,9 +9069,11 @@
       <p:sp>
         <p:nvSpPr>
           <p:cNvPr id="3" name="Text 1"/>
-          <p:cNvSpPr/>
+          <p:cNvSpPr>
+            <a:spLocks noGrp="1"/>
+          </p:cNvSpPr>
           <p:nvPr>
-            <p:ph idx="103" type="body" hasCustomPrompt="1"/>
+            <p:ph type="body" idx="103" hasCustomPrompt="1"/>
           </p:nvPr>
         </p:nvSpPr>
         <p:spPr>
@@ -8393,7 +9091,7 @@
           <a:bodyPr wrap="square" lIns="0" tIns="0" rIns="0" bIns="0" rtlCol="0" anchor="t"/>
           <a:lstStyle/>
           <a:p>
-            <a:pPr algn="l" indent="0" marL="0">
+            <a:pPr marL="0" indent="0" algn="l">
               <a:buNone/>
             </a:pPr>
             <a:r>
@@ -8424,16 +9122,34 @@
         </p:nvGraphicFramePr>
         <p:xfrm>
           <a:off x="512064" y="1874520"/>
-          <a:ext cx="11167567" cy="914400"/>
+          <a:ext cx="11164824" cy="3401568"/>
         </p:xfrm>
         <a:graphic>
           <a:graphicData uri="http://schemas.openxmlformats.org/drawingml/2006/table">
             <a:tbl>
               <a:tblPr/>
               <a:tblGrid>
-                <a:gridCol w="2743200"/>
-                <a:gridCol w="4206240"/>
-                <a:gridCol w="4215384"/>
+                <a:gridCol w="2743200">
+                  <a:extLst>
+                    <a:ext uri="{9D8B030D-6E8A-4147-A177-3AD203B41FA5}">
+                      <a16:colId xmlns:a16="http://schemas.microsoft.com/office/drawing/2014/main" val="20000"/>
+                    </a:ext>
+                  </a:extLst>
+                </a:gridCol>
+                <a:gridCol w="4206240">
+                  <a:extLst>
+                    <a:ext uri="{9D8B030D-6E8A-4147-A177-3AD203B41FA5}">
+                      <a16:colId xmlns:a16="http://schemas.microsoft.com/office/drawing/2014/main" val="20001"/>
+                    </a:ext>
+                  </a:extLst>
+                </a:gridCol>
+                <a:gridCol w="4215384">
+                  <a:extLst>
+                    <a:ext uri="{9D8B030D-6E8A-4147-A177-3AD203B41FA5}">
+                      <a16:colId xmlns:a16="http://schemas.microsoft.com/office/drawing/2014/main" val="20002"/>
+                    </a:ext>
+                  </a:extLst>
+                </a:gridCol>
               </a:tblGrid>
               <a:tr h="384048">
                 <a:tc>
@@ -8441,7 +9157,7 @@
                     <a:bodyPr/>
                     <a:lstStyle/>
                     <a:p>
-                      <a:pPr indent="0" marL="0">
+                      <a:pPr marL="0" indent="0">
                         <a:buNone/>
                       </a:pPr>
                       <a:r>
@@ -8455,7 +9171,7 @@
                       <a:endParaRPr lang="en-US" sz="1300" dirty="0"/>
                     </a:p>
                   </a:txBody>
-                  <a:tcPr marL="91440" marR="91440" marT="36576" marB="73152" anchor="b">
+                  <a:tcPr marT="36576" marB="73152" anchor="b">
                     <a:lnL w="0" cap="flat" cmpd="sng" algn="ctr">
                       <a:noFill/>
                     </a:lnL>
@@ -8481,7 +9197,7 @@
                     <a:bodyPr/>
                     <a:lstStyle/>
                     <a:p>
-                      <a:pPr indent="0" marL="0">
+                      <a:pPr marL="0" indent="0">
                         <a:buNone/>
                       </a:pPr>
                       <a:r>
@@ -8495,7 +9211,7 @@
                       <a:endParaRPr lang="en-US" sz="1300" dirty="0"/>
                     </a:p>
                   </a:txBody>
-                  <a:tcPr marL="91440" marR="91440" marT="36576" marB="73152" anchor="b">
+                  <a:tcPr marT="36576" marB="73152" anchor="b">
                     <a:lnL w="0" cap="flat" cmpd="sng" algn="ctr">
                       <a:noFill/>
                     </a:lnL>
@@ -8521,7 +9237,7 @@
                     <a:bodyPr/>
                     <a:lstStyle/>
                     <a:p>
-                      <a:pPr indent="0" marL="0">
+                      <a:pPr marL="0" indent="0">
                         <a:buNone/>
                       </a:pPr>
                       <a:r>
@@ -8535,7 +9251,7 @@
                       <a:endParaRPr lang="en-US" sz="1300" dirty="0"/>
                     </a:p>
                   </a:txBody>
-                  <a:tcPr marL="91440" marR="91440" marT="36576" marB="73152" anchor="b">
+                  <a:tcPr marT="36576" marB="73152" anchor="b">
                     <a:lnL w="0" cap="flat" cmpd="sng" algn="ctr">
                       <a:noFill/>
                     </a:lnL>
@@ -8556,6 +9272,11 @@
                     </a:lnB>
                   </a:tcPr>
                 </a:tc>
+                <a:extLst>
+                  <a:ext uri="{0D108BD9-81ED-4DB2-BD59-A6C34878D82A}">
+                    <a16:rowId xmlns:a16="http://schemas.microsoft.com/office/drawing/2014/main" val="10000"/>
+                  </a:ext>
+                </a:extLst>
               </a:tr>
               <a:tr h="603504">
                 <a:tc>
@@ -8563,7 +9284,7 @@
                     <a:bodyPr/>
                     <a:lstStyle/>
                     <a:p>
-                      <a:pPr indent="0" marL="0">
+                      <a:pPr marL="0" indent="0">
                         <a:buNone/>
                       </a:pPr>
                       <a:r>
@@ -8577,15 +9298,21 @@
                       <a:endParaRPr lang="en-US" sz="1300" dirty="0"/>
                     </a:p>
                   </a:txBody>
-                  <a:tcPr marL="91440" marR="91440" marT="45720" marB="45720" anchor="ctr">
+                  <a:tcPr anchor="ctr">
                     <a:lnL w="0" cap="flat" cmpd="sng" algn="ctr">
                       <a:noFill/>
                     </a:lnL>
                     <a:lnR w="0" cap="flat" cmpd="sng" algn="ctr">
                       <a:noFill/>
                     </a:lnR>
-                    <a:lnT w="0" cap="flat" cmpd="sng" algn="ctr">
-                      <a:noFill/>
+                    <a:lnT w="22225" cap="flat" cmpd="sng" algn="ctr">
+                      <a:solidFill>
+                        <a:srgbClr val="FFFFFF"/>
+                      </a:solidFill>
+                      <a:prstDash val="solid"/>
+                      <a:round/>
+                      <a:headEnd type="none" w="med" len="med"/>
+                      <a:tailEnd type="none" w="med" len="med"/>
                     </a:lnT>
                     <a:lnB w="12700" cap="flat" cmpd="sng" algn="ctr">
                       <a:solidFill>
@@ -8606,7 +9333,7 @@
                     <a:bodyPr/>
                     <a:lstStyle/>
                     <a:p>
-                      <a:pPr indent="0" marL="0">
+                      <a:pPr marL="0" indent="0">
                         <a:buNone/>
                       </a:pPr>
                       <a:r>
@@ -8620,7 +9347,7 @@
                       <a:endParaRPr lang="en-US" sz="1300" dirty="0"/>
                     </a:p>
                     <a:p>
-                      <a:pPr indent="0" marL="0">
+                      <a:pPr marL="0" indent="0">
                         <a:buNone/>
                       </a:pPr>
                       <a:r>
@@ -8634,15 +9361,21 @@
                       <a:endParaRPr lang="en-US" sz="1300" dirty="0"/>
                     </a:p>
                   </a:txBody>
-                  <a:tcPr marL="91440" marR="91440" marT="45720" marB="45720" anchor="ctr">
+                  <a:tcPr anchor="ctr">
                     <a:lnL w="0" cap="flat" cmpd="sng" algn="ctr">
                       <a:noFill/>
                     </a:lnL>
                     <a:lnR w="0" cap="flat" cmpd="sng" algn="ctr">
                       <a:noFill/>
                     </a:lnR>
-                    <a:lnT w="0" cap="flat" cmpd="sng" algn="ctr">
-                      <a:noFill/>
+                    <a:lnT w="22225" cap="flat" cmpd="sng" algn="ctr">
+                      <a:solidFill>
+                        <a:srgbClr val="FFFFFF"/>
+                      </a:solidFill>
+                      <a:prstDash val="solid"/>
+                      <a:round/>
+                      <a:headEnd type="none" w="med" len="med"/>
+                      <a:tailEnd type="none" w="med" len="med"/>
                     </a:lnT>
                     <a:lnB w="12700" cap="flat" cmpd="sng" algn="ctr">
                       <a:solidFill>
@@ -8663,7 +9396,7 @@
                     <a:bodyPr/>
                     <a:lstStyle/>
                     <a:p>
-                      <a:pPr indent="0" marL="0">
+                      <a:pPr marL="0" indent="0">
                         <a:buNone/>
                       </a:pPr>
                       <a:r>
@@ -8677,7 +9410,7 @@
                       <a:endParaRPr lang="en-US" sz="1300" dirty="0"/>
                     </a:p>
                     <a:p>
-                      <a:pPr indent="0" marL="0">
+                      <a:pPr marL="0" indent="0">
                         <a:buNone/>
                       </a:pPr>
                       <a:r>
@@ -8691,15 +9424,21 @@
                       <a:endParaRPr lang="en-US" sz="1300" dirty="0"/>
                     </a:p>
                   </a:txBody>
-                  <a:tcPr marL="91440" marR="91440" marT="45720" marB="45720" anchor="ctr">
+                  <a:tcPr anchor="ctr">
                     <a:lnL w="0" cap="flat" cmpd="sng" algn="ctr">
                       <a:noFill/>
                     </a:lnL>
                     <a:lnR w="0" cap="flat" cmpd="sng" algn="ctr">
                       <a:noFill/>
                     </a:lnR>
-                    <a:lnT w="0" cap="flat" cmpd="sng" algn="ctr">
-                      <a:noFill/>
+                    <a:lnT w="22225" cap="flat" cmpd="sng" algn="ctr">
+                      <a:solidFill>
+                        <a:srgbClr val="FFFFFF"/>
+                      </a:solidFill>
+                      <a:prstDash val="solid"/>
+                      <a:round/>
+                      <a:headEnd type="none" w="med" len="med"/>
+                      <a:tailEnd type="none" w="med" len="med"/>
                     </a:lnT>
                     <a:lnB w="12700" cap="flat" cmpd="sng" algn="ctr">
                       <a:solidFill>
@@ -8715,6 +9454,11 @@
                     </a:solidFill>
                   </a:tcPr>
                 </a:tc>
+                <a:extLst>
+                  <a:ext uri="{0D108BD9-81ED-4DB2-BD59-A6C34878D82A}">
+                    <a16:rowId xmlns:a16="http://schemas.microsoft.com/office/drawing/2014/main" val="10001"/>
+                  </a:ext>
+                </a:extLst>
               </a:tr>
               <a:tr h="603504">
                 <a:tc>
@@ -8722,7 +9466,7 @@
                     <a:bodyPr/>
                     <a:lstStyle/>
                     <a:p>
-                      <a:pPr indent="0" marL="0">
+                      <a:pPr marL="0" indent="0">
                         <a:buNone/>
                       </a:pPr>
                       <a:r>
@@ -8736,15 +9480,21 @@
                       <a:endParaRPr lang="en-US" sz="1300" dirty="0"/>
                     </a:p>
                   </a:txBody>
-                  <a:tcPr marL="91440" marR="91440" marT="45720" marB="45720" anchor="ctr">
+                  <a:tcPr anchor="ctr">
                     <a:lnL w="0" cap="flat" cmpd="sng" algn="ctr">
                       <a:noFill/>
                     </a:lnL>
                     <a:lnR w="0" cap="flat" cmpd="sng" algn="ctr">
                       <a:noFill/>
                     </a:lnR>
-                    <a:lnT w="0" cap="flat" cmpd="sng" algn="ctr">
-                      <a:noFill/>
+                    <a:lnT w="12700" cap="flat" cmpd="sng" algn="ctr">
+                      <a:solidFill>
+                        <a:srgbClr val="8C8C8C"/>
+                      </a:solidFill>
+                      <a:prstDash val="sysDot"/>
+                      <a:round/>
+                      <a:headEnd type="none" w="med" len="med"/>
+                      <a:tailEnd type="none" w="med" len="med"/>
                     </a:lnT>
                     <a:lnB w="12700" cap="flat" cmpd="sng" algn="ctr">
                       <a:solidFill>
@@ -8762,7 +9512,7 @@
                     <a:bodyPr/>
                     <a:lstStyle/>
                     <a:p>
-                      <a:pPr indent="0" marL="0">
+                      <a:pPr marL="0" indent="0">
                         <a:buNone/>
                       </a:pPr>
                       <a:r>
@@ -8776,7 +9526,7 @@
                       <a:endParaRPr lang="en-US" sz="1300" dirty="0"/>
                     </a:p>
                     <a:p>
-                      <a:pPr indent="0" marL="0">
+                      <a:pPr marL="0" indent="0">
                         <a:buNone/>
                       </a:pPr>
                       <a:r>
@@ -8790,15 +9540,21 @@
                       <a:endParaRPr lang="en-US" sz="1300" dirty="0"/>
                     </a:p>
                   </a:txBody>
-                  <a:tcPr marL="91440" marR="91440" marT="45720" marB="45720" anchor="ctr">
+                  <a:tcPr anchor="ctr">
                     <a:lnL w="0" cap="flat" cmpd="sng" algn="ctr">
                       <a:noFill/>
                     </a:lnL>
                     <a:lnR w="0" cap="flat" cmpd="sng" algn="ctr">
                       <a:noFill/>
                     </a:lnR>
-                    <a:lnT w="0" cap="flat" cmpd="sng" algn="ctr">
-                      <a:noFill/>
+                    <a:lnT w="12700" cap="flat" cmpd="sng" algn="ctr">
+                      <a:solidFill>
+                        <a:srgbClr val="8C8C8C"/>
+                      </a:solidFill>
+                      <a:prstDash val="sysDot"/>
+                      <a:round/>
+                      <a:headEnd type="none" w="med" len="med"/>
+                      <a:tailEnd type="none" w="med" len="med"/>
                     </a:lnT>
                     <a:lnB w="12700" cap="flat" cmpd="sng" algn="ctr">
                       <a:solidFill>
@@ -8816,7 +9572,7 @@
                     <a:bodyPr/>
                     <a:lstStyle/>
                     <a:p>
-                      <a:pPr indent="0" marL="0">
+                      <a:pPr marL="0" indent="0">
                         <a:buNone/>
                       </a:pPr>
                       <a:r>
@@ -8830,7 +9586,7 @@
                       <a:endParaRPr lang="en-US" sz="1300" dirty="0"/>
                     </a:p>
                     <a:p>
-                      <a:pPr indent="0" marL="0">
+                      <a:pPr marL="0" indent="0">
                         <a:buNone/>
                       </a:pPr>
                       <a:r>
@@ -8844,15 +9600,21 @@
                       <a:endParaRPr lang="en-US" sz="1300" dirty="0"/>
                     </a:p>
                   </a:txBody>
-                  <a:tcPr marL="91440" marR="91440" marT="45720" marB="45720" anchor="ctr">
+                  <a:tcPr anchor="ctr">
                     <a:lnL w="0" cap="flat" cmpd="sng" algn="ctr">
                       <a:noFill/>
                     </a:lnL>
                     <a:lnR w="0" cap="flat" cmpd="sng" algn="ctr">
                       <a:noFill/>
                     </a:lnR>
-                    <a:lnT w="0" cap="flat" cmpd="sng" algn="ctr">
-                      <a:noFill/>
+                    <a:lnT w="12700" cap="flat" cmpd="sng" algn="ctr">
+                      <a:solidFill>
+                        <a:srgbClr val="8C8C8C"/>
+                      </a:solidFill>
+                      <a:prstDash val="sysDot"/>
+                      <a:round/>
+                      <a:headEnd type="none" w="med" len="med"/>
+                      <a:tailEnd type="none" w="med" len="med"/>
                     </a:lnT>
                     <a:lnB w="12700" cap="flat" cmpd="sng" algn="ctr">
                       <a:solidFill>
@@ -8865,6 +9627,11 @@
                     </a:lnB>
                   </a:tcPr>
                 </a:tc>
+                <a:extLst>
+                  <a:ext uri="{0D108BD9-81ED-4DB2-BD59-A6C34878D82A}">
+                    <a16:rowId xmlns:a16="http://schemas.microsoft.com/office/drawing/2014/main" val="10002"/>
+                  </a:ext>
+                </a:extLst>
               </a:tr>
               <a:tr h="603504">
                 <a:tc>
@@ -8872,7 +9639,7 @@
                     <a:bodyPr/>
                     <a:lstStyle/>
                     <a:p>
-                      <a:pPr indent="0" marL="0">
+                      <a:pPr marL="0" indent="0">
                         <a:buNone/>
                       </a:pPr>
                       <a:r>
@@ -8886,15 +9653,21 @@
                       <a:endParaRPr lang="en-US" sz="1300" dirty="0"/>
                     </a:p>
                   </a:txBody>
-                  <a:tcPr marL="91440" marR="91440" marT="45720" marB="45720" anchor="ctr">
+                  <a:tcPr anchor="ctr">
                     <a:lnL w="0" cap="flat" cmpd="sng" algn="ctr">
                       <a:noFill/>
                     </a:lnL>
                     <a:lnR w="0" cap="flat" cmpd="sng" algn="ctr">
                       <a:noFill/>
                     </a:lnR>
-                    <a:lnT w="0" cap="flat" cmpd="sng" algn="ctr">
-                      <a:noFill/>
+                    <a:lnT w="12700" cap="flat" cmpd="sng" algn="ctr">
+                      <a:solidFill>
+                        <a:srgbClr val="8C8C8C"/>
+                      </a:solidFill>
+                      <a:prstDash val="sysDot"/>
+                      <a:round/>
+                      <a:headEnd type="none" w="med" len="med"/>
+                      <a:tailEnd type="none" w="med" len="med"/>
                     </a:lnT>
                     <a:lnB w="12700" cap="flat" cmpd="sng" algn="ctr">
                       <a:solidFill>
@@ -8915,7 +9688,7 @@
                     <a:bodyPr/>
                     <a:lstStyle/>
                     <a:p>
-                      <a:pPr indent="0" marL="0">
+                      <a:pPr marL="0" indent="0">
                         <a:buNone/>
                       </a:pPr>
                       <a:r>
@@ -8929,7 +9702,7 @@
                       <a:endParaRPr lang="en-US" sz="1300" dirty="0"/>
                     </a:p>
                     <a:p>
-                      <a:pPr indent="0" marL="0">
+                      <a:pPr marL="0" indent="0">
                         <a:buNone/>
                       </a:pPr>
                       <a:r>
@@ -8943,15 +9716,21 @@
                       <a:endParaRPr lang="en-US" sz="1300" dirty="0"/>
                     </a:p>
                   </a:txBody>
-                  <a:tcPr marL="91440" marR="91440" marT="45720" marB="45720" anchor="ctr">
+                  <a:tcPr anchor="ctr">
                     <a:lnL w="0" cap="flat" cmpd="sng" algn="ctr">
                       <a:noFill/>
                     </a:lnL>
                     <a:lnR w="0" cap="flat" cmpd="sng" algn="ctr">
                       <a:noFill/>
                     </a:lnR>
-                    <a:lnT w="0" cap="flat" cmpd="sng" algn="ctr">
-                      <a:noFill/>
+                    <a:lnT w="12700" cap="flat" cmpd="sng" algn="ctr">
+                      <a:solidFill>
+                        <a:srgbClr val="8C8C8C"/>
+                      </a:solidFill>
+                      <a:prstDash val="sysDot"/>
+                      <a:round/>
+                      <a:headEnd type="none" w="med" len="med"/>
+                      <a:tailEnd type="none" w="med" len="med"/>
                     </a:lnT>
                     <a:lnB w="12700" cap="flat" cmpd="sng" algn="ctr">
                       <a:solidFill>
@@ -8972,7 +9751,7 @@
                     <a:bodyPr/>
                     <a:lstStyle/>
                     <a:p>
-                      <a:pPr indent="0" marL="0">
+                      <a:pPr marL="0" indent="0">
                         <a:buNone/>
                       </a:pPr>
                       <a:r>
@@ -8986,7 +9765,7 @@
                       <a:endParaRPr lang="en-US" sz="1300" dirty="0"/>
                     </a:p>
                     <a:p>
-                      <a:pPr indent="0" marL="0">
+                      <a:pPr marL="0" indent="0">
                         <a:buNone/>
                       </a:pPr>
                       <a:r>
@@ -9000,15 +9779,21 @@
                       <a:endParaRPr lang="en-US" sz="1300" dirty="0"/>
                     </a:p>
                   </a:txBody>
-                  <a:tcPr marL="91440" marR="91440" marT="45720" marB="45720" anchor="ctr">
+                  <a:tcPr anchor="ctr">
                     <a:lnL w="0" cap="flat" cmpd="sng" algn="ctr">
                       <a:noFill/>
                     </a:lnL>
                     <a:lnR w="0" cap="flat" cmpd="sng" algn="ctr">
                       <a:noFill/>
                     </a:lnR>
-                    <a:lnT w="0" cap="flat" cmpd="sng" algn="ctr">
-                      <a:noFill/>
+                    <a:lnT w="12700" cap="flat" cmpd="sng" algn="ctr">
+                      <a:solidFill>
+                        <a:srgbClr val="8C8C8C"/>
+                      </a:solidFill>
+                      <a:prstDash val="sysDot"/>
+                      <a:round/>
+                      <a:headEnd type="none" w="med" len="med"/>
+                      <a:tailEnd type="none" w="med" len="med"/>
                     </a:lnT>
                     <a:lnB w="12700" cap="flat" cmpd="sng" algn="ctr">
                       <a:solidFill>
@@ -9024,6 +9809,11 @@
                     </a:solidFill>
                   </a:tcPr>
                 </a:tc>
+                <a:extLst>
+                  <a:ext uri="{0D108BD9-81ED-4DB2-BD59-A6C34878D82A}">
+                    <a16:rowId xmlns:a16="http://schemas.microsoft.com/office/drawing/2014/main" val="10003"/>
+                  </a:ext>
+                </a:extLst>
               </a:tr>
               <a:tr h="603504">
                 <a:tc>
@@ -9031,7 +9821,7 @@
                     <a:bodyPr/>
                     <a:lstStyle/>
                     <a:p>
-                      <a:pPr indent="0" marL="0">
+                      <a:pPr marL="0" indent="0">
                         <a:buNone/>
                       </a:pPr>
                       <a:r>
@@ -9045,15 +9835,21 @@
                       <a:endParaRPr lang="en-US" sz="1300" dirty="0"/>
                     </a:p>
                   </a:txBody>
-                  <a:tcPr marL="91440" marR="91440" marT="45720" marB="45720" anchor="ctr">
+                  <a:tcPr anchor="ctr">
                     <a:lnL w="0" cap="flat" cmpd="sng" algn="ctr">
                       <a:noFill/>
                     </a:lnL>
                     <a:lnR w="0" cap="flat" cmpd="sng" algn="ctr">
                       <a:noFill/>
                     </a:lnR>
-                    <a:lnT w="0" cap="flat" cmpd="sng" algn="ctr">
-                      <a:noFill/>
+                    <a:lnT w="12700" cap="flat" cmpd="sng" algn="ctr">
+                      <a:solidFill>
+                        <a:srgbClr val="8C8C8C"/>
+                      </a:solidFill>
+                      <a:prstDash val="sysDot"/>
+                      <a:round/>
+                      <a:headEnd type="none" w="med" len="med"/>
+                      <a:tailEnd type="none" w="med" len="med"/>
                     </a:lnT>
                     <a:lnB w="12700" cap="flat" cmpd="sng" algn="ctr">
                       <a:solidFill>
@@ -9071,7 +9867,7 @@
                     <a:bodyPr/>
                     <a:lstStyle/>
                     <a:p>
-                      <a:pPr indent="0" marL="0">
+                      <a:pPr marL="0" indent="0">
                         <a:buNone/>
                       </a:pPr>
                       <a:r>
@@ -9085,7 +9881,7 @@
                       <a:endParaRPr lang="en-US" sz="1300" dirty="0"/>
                     </a:p>
                     <a:p>
-                      <a:pPr indent="0" marL="0">
+                      <a:pPr marL="0" indent="0">
                         <a:buNone/>
                       </a:pPr>
                       <a:r>
@@ -9099,15 +9895,21 @@
                       <a:endParaRPr lang="en-US" sz="1300" dirty="0"/>
                     </a:p>
                   </a:txBody>
-                  <a:tcPr marL="91440" marR="91440" marT="45720" marB="45720" anchor="ctr">
+                  <a:tcPr anchor="ctr">
                     <a:lnL w="0" cap="flat" cmpd="sng" algn="ctr">
                       <a:noFill/>
                     </a:lnL>
                     <a:lnR w="0" cap="flat" cmpd="sng" algn="ctr">
                       <a:noFill/>
                     </a:lnR>
-                    <a:lnT w="0" cap="flat" cmpd="sng" algn="ctr">
-                      <a:noFill/>
+                    <a:lnT w="12700" cap="flat" cmpd="sng" algn="ctr">
+                      <a:solidFill>
+                        <a:srgbClr val="8C8C8C"/>
+                      </a:solidFill>
+                      <a:prstDash val="sysDot"/>
+                      <a:round/>
+                      <a:headEnd type="none" w="med" len="med"/>
+                      <a:tailEnd type="none" w="med" len="med"/>
                     </a:lnT>
                     <a:lnB w="12700" cap="flat" cmpd="sng" algn="ctr">
                       <a:solidFill>
@@ -9125,7 +9927,7 @@
                     <a:bodyPr/>
                     <a:lstStyle/>
                     <a:p>
-                      <a:pPr indent="0" marL="0">
+                      <a:pPr marL="0" indent="0">
                         <a:buNone/>
                       </a:pPr>
                       <a:r>
@@ -9139,7 +9941,7 @@
                       <a:endParaRPr lang="en-US" sz="1300" dirty="0"/>
                     </a:p>
                     <a:p>
-                      <a:pPr indent="0" marL="0">
+                      <a:pPr marL="0" indent="0">
                         <a:buNone/>
                       </a:pPr>
                       <a:r>
@@ -9153,15 +9955,21 @@
                       <a:endParaRPr lang="en-US" sz="1300" dirty="0"/>
                     </a:p>
                   </a:txBody>
-                  <a:tcPr marL="91440" marR="91440" marT="45720" marB="45720" anchor="ctr">
+                  <a:tcPr anchor="ctr">
                     <a:lnL w="0" cap="flat" cmpd="sng" algn="ctr">
                       <a:noFill/>
                     </a:lnL>
                     <a:lnR w="0" cap="flat" cmpd="sng" algn="ctr">
                       <a:noFill/>
                     </a:lnR>
-                    <a:lnT w="0" cap="flat" cmpd="sng" algn="ctr">
-                      <a:noFill/>
+                    <a:lnT w="12700" cap="flat" cmpd="sng" algn="ctr">
+                      <a:solidFill>
+                        <a:srgbClr val="8C8C8C"/>
+                      </a:solidFill>
+                      <a:prstDash val="sysDot"/>
+                      <a:round/>
+                      <a:headEnd type="none" w="med" len="med"/>
+                      <a:tailEnd type="none" w="med" len="med"/>
                     </a:lnT>
                     <a:lnB w="12700" cap="flat" cmpd="sng" algn="ctr">
                       <a:solidFill>
@@ -9174,6 +9982,11 @@
                     </a:lnB>
                   </a:tcPr>
                 </a:tc>
+                <a:extLst>
+                  <a:ext uri="{0D108BD9-81ED-4DB2-BD59-A6C34878D82A}">
+                    <a16:rowId xmlns:a16="http://schemas.microsoft.com/office/drawing/2014/main" val="10004"/>
+                  </a:ext>
+                </a:extLst>
               </a:tr>
               <a:tr h="603504">
                 <a:tc>
@@ -9181,7 +9994,7 @@
                     <a:bodyPr/>
                     <a:lstStyle/>
                     <a:p>
-                      <a:pPr indent="0" marL="0">
+                      <a:pPr marL="0" indent="0">
                         <a:buNone/>
                       </a:pPr>
                       <a:r>
@@ -9195,15 +10008,21 @@
                       <a:endParaRPr lang="en-US" sz="1300" dirty="0"/>
                     </a:p>
                   </a:txBody>
-                  <a:tcPr marL="91440" marR="91440" marT="45720" marB="45720" anchor="ctr">
+                  <a:tcPr anchor="ctr">
                     <a:lnL w="0" cap="flat" cmpd="sng" algn="ctr">
                       <a:noFill/>
                     </a:lnL>
                     <a:lnR w="0" cap="flat" cmpd="sng" algn="ctr">
                       <a:noFill/>
                     </a:lnR>
-                    <a:lnT w="0" cap="flat" cmpd="sng" algn="ctr">
-                      <a:noFill/>
+                    <a:lnT w="12700" cap="flat" cmpd="sng" algn="ctr">
+                      <a:solidFill>
+                        <a:srgbClr val="8C8C8C"/>
+                      </a:solidFill>
+                      <a:prstDash val="sysDot"/>
+                      <a:round/>
+                      <a:headEnd type="none" w="med" len="med"/>
+                      <a:tailEnd type="none" w="med" len="med"/>
                     </a:lnT>
                     <a:lnB w="12700" cap="flat" cmpd="sng" algn="ctr">
                       <a:solidFill>
@@ -9224,7 +10043,7 @@
                     <a:bodyPr/>
                     <a:lstStyle/>
                     <a:p>
-                      <a:pPr indent="0" marL="0">
+                      <a:pPr marL="0" indent="0">
                         <a:buNone/>
                       </a:pPr>
                       <a:r>
@@ -9238,7 +10057,7 @@
                       <a:endParaRPr lang="en-US" sz="1300" dirty="0"/>
                     </a:p>
                     <a:p>
-                      <a:pPr indent="0" marL="0">
+                      <a:pPr marL="0" indent="0">
                         <a:buNone/>
                       </a:pPr>
                       <a:r>
@@ -9252,15 +10071,21 @@
                       <a:endParaRPr lang="en-US" sz="1300" dirty="0"/>
                     </a:p>
                   </a:txBody>
-                  <a:tcPr marL="91440" marR="91440" marT="45720" marB="45720" anchor="ctr">
+                  <a:tcPr anchor="ctr">
                     <a:lnL w="0" cap="flat" cmpd="sng" algn="ctr">
                       <a:noFill/>
                     </a:lnL>
                     <a:lnR w="0" cap="flat" cmpd="sng" algn="ctr">
                       <a:noFill/>
                     </a:lnR>
-                    <a:lnT w="0" cap="flat" cmpd="sng" algn="ctr">
-                      <a:noFill/>
+                    <a:lnT w="12700" cap="flat" cmpd="sng" algn="ctr">
+                      <a:solidFill>
+                        <a:srgbClr val="8C8C8C"/>
+                      </a:solidFill>
+                      <a:prstDash val="sysDot"/>
+                      <a:round/>
+                      <a:headEnd type="none" w="med" len="med"/>
+                      <a:tailEnd type="none" w="med" len="med"/>
                     </a:lnT>
                     <a:lnB w="12700" cap="flat" cmpd="sng" algn="ctr">
                       <a:solidFill>
@@ -9281,7 +10106,7 @@
                     <a:bodyPr/>
                     <a:lstStyle/>
                     <a:p>
-                      <a:pPr indent="0" marL="0">
+                      <a:pPr marL="0" indent="0">
                         <a:buNone/>
                       </a:pPr>
                       <a:r>
@@ -9295,7 +10120,7 @@
                       <a:endParaRPr lang="en-US" sz="1300" dirty="0"/>
                     </a:p>
                     <a:p>
-                      <a:pPr indent="0" marL="0">
+                      <a:pPr marL="0" indent="0">
                         <a:buNone/>
                       </a:pPr>
                       <a:r>
@@ -9309,15 +10134,21 @@
                       <a:endParaRPr lang="en-US" sz="1300" dirty="0"/>
                     </a:p>
                   </a:txBody>
-                  <a:tcPr marL="91440" marR="91440" marT="45720" marB="45720" anchor="ctr">
+                  <a:tcPr anchor="ctr">
                     <a:lnL w="0" cap="flat" cmpd="sng" algn="ctr">
                       <a:noFill/>
                     </a:lnL>
                     <a:lnR w="0" cap="flat" cmpd="sng" algn="ctr">
                       <a:noFill/>
                     </a:lnR>
-                    <a:lnT w="0" cap="flat" cmpd="sng" algn="ctr">
-                      <a:noFill/>
+                    <a:lnT w="12700" cap="flat" cmpd="sng" algn="ctr">
+                      <a:solidFill>
+                        <a:srgbClr val="8C8C8C"/>
+                      </a:solidFill>
+                      <a:prstDash val="sysDot"/>
+                      <a:round/>
+                      <a:headEnd type="none" w="med" len="med"/>
+                      <a:tailEnd type="none" w="med" len="med"/>
                     </a:lnT>
                     <a:lnB w="12700" cap="flat" cmpd="sng" algn="ctr">
                       <a:solidFill>
@@ -9333,6 +10164,11 @@
                     </a:solidFill>
                   </a:tcPr>
                 </a:tc>
+                <a:extLst>
+                  <a:ext uri="{0D108BD9-81ED-4DB2-BD59-A6C34878D82A}">
+                    <a16:rowId xmlns:a16="http://schemas.microsoft.com/office/drawing/2014/main" val="10005"/>
+                  </a:ext>
+                </a:extLst>
               </a:tr>
             </a:tbl>
           </a:graphicData>
@@ -9359,11 +10195,11 @@
           <a:bodyPr wrap="square" lIns="0" tIns="0" rIns="0" bIns="0" rtlCol="0" anchor="ctr"/>
           <a:lstStyle/>
           <a:p>
-            <a:pPr indent="0" marL="0">
-              <a:buNone/>
-            </a:pPr>
-            <a:r>
-              <a:rPr lang="en-US" sz="1400" spc="400" kern="0" dirty="0">
+            <a:pPr marL="0" indent="0">
+              <a:buNone/>
+            </a:pPr>
+            <a:r>
+              <a:rPr lang="en-US" sz="1400" kern="0" spc="400" dirty="0">
                 <a:solidFill>
                   <a:schemeClr val="bg1"/>
                 </a:solidFill>
@@ -9403,7 +10239,7 @@
           <a:bodyPr wrap="square" lIns="0" tIns="0" rIns="0" bIns="0" rtlCol="0" anchor="ctr"/>
           <a:lstStyle/>
           <a:p>
-            <a:pPr algn="ctr" indent="0" marL="0">
+            <a:pPr marL="0" indent="0" algn="ctr">
               <a:buNone/>
             </a:pPr>
             <a:r>
@@ -9444,7 +10280,7 @@
           <a:bodyPr wrap="square" lIns="0" tIns="0" rIns="0" bIns="0" rtlCol="0" anchor="ctr"/>
           <a:lstStyle/>
           <a:p>
-            <a:pPr algn="ctr" indent="0" marL="0">
+            <a:pPr marL="0" indent="0" algn="ctr">
               <a:buNone/>
             </a:pPr>
             <a:r>
@@ -9461,7 +10297,7 @@
       </p:sp>
       <p:sp>
         <p:nvSpPr>
-          <p:cNvPr id="8" name="Common input 3"/>
+          <p:cNvPr id="4" name="Common input 3"/>
           <p:cNvSpPr/>
           <p:nvPr/>
         </p:nvSpPr>
@@ -9485,7 +10321,7 @@
           <a:bodyPr wrap="square" lIns="0" tIns="0" rIns="0" bIns="0" rtlCol="0" anchor="ctr"/>
           <a:lstStyle/>
           <a:p>
-            <a:pPr algn="ctr" indent="0" marL="0">
+            <a:pPr marL="0" indent="0" algn="ctr">
               <a:buNone/>
             </a:pPr>
             <a:r>
@@ -9526,7 +10362,7 @@
           <a:bodyPr wrap="square" lIns="0" tIns="0" rIns="0" bIns="0" rtlCol="0" anchor="ctr"/>
           <a:lstStyle/>
           <a:p>
-            <a:pPr algn="ctr" indent="0" marL="0">
+            <a:pPr marL="0" indent="0" algn="ctr">
               <a:buNone/>
             </a:pPr>
             <a:r>
@@ -9538,51 +10374,6 @@
               <a:t>Configuration</a:t>
             </a:r>
             <a:endParaRPr lang="en-US" sz="1200" dirty="0"/>
-          </a:p>
-        </p:txBody>
-      </p:sp>
-      <p:sp>
-        <p:nvSpPr>
-          <p:cNvPr id="25" name="Slide Number Placeholder 0"/>
-          <p:cNvSpPr>
-            <a:spLocks noGrp="1"/>
-          </p:cNvSpPr>
-          <p:nvPr>
-            <p:ph type="sldNum" sz="quarter" idx="4294967295"/>
-          </p:nvPr>
-        </p:nvSpPr>
-        <p:spPr>
-          <a:xfrm>
-            <a:off x="11219688" y="6345936"/>
-            <a:ext cx="457200" cy="219456"/>
-          </a:xfrm>
-          <a:prstGeom prst="rect">
-            <a:avLst/>
-          </a:prstGeom>
-          <a:extLst>
-            <a:ext uri="{C572A759-6A51-4108-AA02-DFA0A04FC94B}">
-              <ma14:wrappingTextBoxFlag xmlns:ma14="http://schemas.microsoft.com/office/mac/drawingml/2011/main" val="0"/>
-            </a:ext>
-          </a:extLst>
-        </p:spPr>
-        <p:txBody>
-          <a:bodyPr/>
-          <a:lstStyle>
-            <a:lvl1pPr>
-              <a:defRPr sz="900">
-                <a:solidFill>
-                  <a:srgbClr val="FFFFFF"/>
-                </a:solidFill>
-              </a:defRPr>
-            </a:lvl1pPr>
-          </a:lstStyle>
-          <a:p>
-            <a:pPr algn="r"/>
-            <a:fld id="{F7021451-1387-4CA6-816F-3879F97B5CBC}" type="slidenum">
-              <a:rPr b="0" lang="en-US"/>
-              <a:t>7</a:t>
-            </a:fld>
-            <a:endParaRPr lang="en-US"/>
           </a:p>
         </p:txBody>
       </p:sp>
@@ -9614,9 +10405,11 @@
       <p:sp>
         <p:nvSpPr>
           <p:cNvPr id="2" name="Text 1"/>
-          <p:cNvSpPr/>
+          <p:cNvSpPr>
+            <a:spLocks noGrp="1"/>
+          </p:cNvSpPr>
           <p:nvPr>
-            <p:ph idx="102" type="title" hasCustomPrompt="1"/>
+            <p:ph type="title" idx="102" hasCustomPrompt="1"/>
           </p:nvPr>
         </p:nvSpPr>
         <p:spPr>
@@ -9634,7 +10427,7 @@
           <a:bodyPr wrap="square" lIns="0" tIns="0" rIns="0" bIns="0" rtlCol="0" anchor="b"/>
           <a:lstStyle/>
           <a:p>
-            <a:pPr algn="l" indent="0" marL="0">
+            <a:pPr marL="0" indent="0" algn="l">
               <a:buNone/>
             </a:pPr>
             <a:r>
@@ -9652,9 +10445,11 @@
       <p:sp>
         <p:nvSpPr>
           <p:cNvPr id="3" name="Text 1"/>
-          <p:cNvSpPr/>
+          <p:cNvSpPr>
+            <a:spLocks noGrp="1"/>
+          </p:cNvSpPr>
           <p:nvPr>
-            <p:ph idx="103" type="body" hasCustomPrompt="1"/>
+            <p:ph type="body" idx="103" hasCustomPrompt="1"/>
           </p:nvPr>
         </p:nvSpPr>
         <p:spPr>
@@ -9672,7 +10467,7 @@
           <a:bodyPr wrap="square" lIns="0" tIns="0" rIns="0" bIns="0" rtlCol="0" anchor="t"/>
           <a:lstStyle/>
           <a:p>
-            <a:pPr algn="l" indent="0" marL="0">
+            <a:pPr marL="0" indent="0" algn="l">
               <a:buNone/>
             </a:pPr>
             <a:r>
@@ -9711,7 +10506,7 @@
           <a:bodyPr wrap="square" lIns="0" tIns="0" rIns="0" bIns="0" rtlCol="0" anchor="ctr"/>
           <a:lstStyle/>
           <a:p>
-            <a:pPr algn="ctr" indent="0" marL="0">
+            <a:pPr marL="0" indent="0" algn="ctr">
               <a:buNone/>
             </a:pPr>
             <a:r>
@@ -9752,7 +10547,7 @@
           </a:bodyPr>
           <a:lstStyle/>
           <a:p>
-            <a:pPr indent="0" marL="0">
+            <a:pPr marL="0" indent="0">
               <a:buNone/>
             </a:pPr>
             <a:r>
@@ -9788,7 +10583,7 @@
           <a:bodyPr wrap="square" lIns="0" tIns="0" rIns="0" bIns="0" rtlCol="0" anchor="t"/>
           <a:lstStyle/>
           <a:p>
-            <a:pPr indent="0" marL="0">
+            <a:pPr marL="0" indent="0">
               <a:buNone/>
             </a:pPr>
             <a:r>
@@ -9802,7 +10597,7 @@
             <a:endParaRPr lang="en-US" sz="1400" dirty="0"/>
           </a:p>
           <a:p>
-            <a:pPr indent="0" marL="0">
+            <a:pPr marL="0" indent="0">
               <a:buNone/>
             </a:pPr>
             <a:r>
@@ -9841,7 +10636,7 @@
           <a:bodyPr wrap="square" lIns="0" tIns="0" rIns="0" bIns="0" rtlCol="0" anchor="ctr"/>
           <a:lstStyle/>
           <a:p>
-            <a:pPr algn="ctr" indent="0" marL="0">
+            <a:pPr marL="0" indent="0" algn="ctr">
               <a:buNone/>
             </a:pPr>
             <a:r>
@@ -9882,7 +10677,7 @@
           </a:bodyPr>
           <a:lstStyle/>
           <a:p>
-            <a:pPr indent="0" marL="0">
+            <a:pPr marL="0" indent="0">
               <a:buNone/>
             </a:pPr>
             <a:r>
@@ -9918,7 +10713,7 @@
           <a:bodyPr wrap="square" lIns="0" tIns="0" rIns="0" bIns="0" rtlCol="0" anchor="t"/>
           <a:lstStyle/>
           <a:p>
-            <a:pPr indent="0" marL="0">
+            <a:pPr marL="0" indent="0">
               <a:buNone/>
             </a:pPr>
             <a:r>
@@ -9932,7 +10727,7 @@
             <a:endParaRPr lang="en-US" sz="1400" dirty="0"/>
           </a:p>
           <a:p>
-            <a:pPr indent="0" marL="0">
+            <a:pPr marL="0" indent="0">
               <a:buNone/>
             </a:pPr>
             <a:r>
@@ -9971,7 +10766,7 @@
           <a:bodyPr wrap="square" lIns="0" tIns="0" rIns="0" bIns="0" rtlCol="0" anchor="ctr"/>
           <a:lstStyle/>
           <a:p>
-            <a:pPr algn="ctr" indent="0" marL="0">
+            <a:pPr marL="0" indent="0" algn="ctr">
               <a:buNone/>
             </a:pPr>
             <a:r>
@@ -10012,7 +10807,7 @@
           </a:bodyPr>
           <a:lstStyle/>
           <a:p>
-            <a:pPr indent="0" marL="0">
+            <a:pPr marL="0" indent="0">
               <a:buNone/>
             </a:pPr>
             <a:r>
@@ -10048,7 +10843,7 @@
           <a:bodyPr wrap="square" lIns="0" tIns="0" rIns="0" bIns="0" rtlCol="0" anchor="t"/>
           <a:lstStyle/>
           <a:p>
-            <a:pPr indent="0" marL="0">
+            <a:pPr marL="0" indent="0">
               <a:buNone/>
             </a:pPr>
             <a:r>
@@ -10062,7 +10857,7 @@
             <a:endParaRPr lang="en-US" sz="1400" dirty="0"/>
           </a:p>
           <a:p>
-            <a:pPr indent="0" marL="0">
+            <a:pPr marL="0" indent="0">
               <a:buNone/>
             </a:pPr>
             <a:r>
@@ -10107,6 +10902,13 @@
             <a:prstDash val="solid"/>
           </a:ln>
         </p:spPr>
+        <p:txBody>
+          <a:bodyPr/>
+          <a:lstStyle/>
+          <a:p>
+            <a:endParaRPr lang="en-IN"/>
+          </a:p>
+        </p:txBody>
       </p:sp>
       <p:sp>
         <p:nvSpPr>
@@ -10129,11 +10931,11 @@
           <a:bodyPr wrap="square" lIns="0" tIns="0" rIns="0" bIns="0" rtlCol="0" anchor="ctr"/>
           <a:lstStyle/>
           <a:p>
-            <a:pPr indent="0" marL="0">
-              <a:buNone/>
-            </a:pPr>
-            <a:r>
-              <a:rPr lang="en-US" sz="1400" spc="400" kern="0" dirty="0">
+            <a:pPr marL="0" indent="0">
+              <a:buNone/>
+            </a:pPr>
+            <a:r>
+              <a:rPr lang="en-US" sz="1400" kern="0" spc="400" dirty="0">
                 <a:solidFill>
                   <a:schemeClr val="accent1"/>
                 </a:solidFill>
@@ -10166,6 +10968,13 @@
           </a:solidFill>
           <a:ln/>
         </p:spPr>
+        <p:txBody>
+          <a:bodyPr/>
+          <a:lstStyle/>
+          <a:p>
+            <a:endParaRPr lang="en-IN"/>
+          </a:p>
+        </p:txBody>
       </p:sp>
       <p:sp>
         <p:nvSpPr>
@@ -10188,7 +10997,7 @@
           <a:bodyPr wrap="square" lIns="0" tIns="0" rIns="0" bIns="0" rtlCol="0" anchor="ctr"/>
           <a:lstStyle/>
           <a:p>
-            <a:pPr indent="0" marL="0">
+            <a:pPr marL="0" indent="0">
               <a:buNone/>
             </a:pPr>
             <a:r>
@@ -10222,6 +11031,13 @@
           </a:solidFill>
           <a:ln/>
         </p:spPr>
+        <p:txBody>
+          <a:bodyPr/>
+          <a:lstStyle/>
+          <a:p>
+            <a:endParaRPr lang="en-IN"/>
+          </a:p>
+        </p:txBody>
       </p:sp>
       <p:sp>
         <p:nvSpPr>
@@ -10244,7 +11060,7 @@
           <a:bodyPr wrap="square" lIns="0" tIns="0" rIns="0" bIns="0" rtlCol="0" anchor="ctr"/>
           <a:lstStyle/>
           <a:p>
-            <a:pPr indent="0" marL="0">
+            <a:pPr marL="0" indent="0">
               <a:buNone/>
             </a:pPr>
             <a:r>
@@ -10278,6 +11094,13 @@
           </a:solidFill>
           <a:ln/>
         </p:spPr>
+        <p:txBody>
+          <a:bodyPr/>
+          <a:lstStyle/>
+          <a:p>
+            <a:endParaRPr lang="en-IN"/>
+          </a:p>
+        </p:txBody>
       </p:sp>
       <p:sp>
         <p:nvSpPr>
@@ -10300,7 +11123,7 @@
           <a:bodyPr wrap="square" lIns="0" tIns="0" rIns="0" bIns="0" rtlCol="0" anchor="ctr"/>
           <a:lstStyle/>
           <a:p>
-            <a:pPr indent="0" marL="0">
+            <a:pPr marL="0" indent="0">
               <a:buNone/>
             </a:pPr>
             <a:r>
@@ -10312,51 +11135,6 @@
               <a:t>Can we map one sanitized RCM and sample extract together?</a:t>
             </a:r>
             <a:endParaRPr lang="en-US" sz="1600" dirty="0"/>
-          </a:p>
-        </p:txBody>
-      </p:sp>
-      <p:sp>
-        <p:nvSpPr>
-          <p:cNvPr id="25" name="Slide Number Placeholder 0"/>
-          <p:cNvSpPr>
-            <a:spLocks noGrp="1"/>
-          </p:cNvSpPr>
-          <p:nvPr>
-            <p:ph type="sldNum" sz="quarter" idx="4294967295"/>
-          </p:nvPr>
-        </p:nvSpPr>
-        <p:spPr>
-          <a:xfrm>
-            <a:off x="11219688" y="6345936"/>
-            <a:ext cx="457200" cy="219456"/>
-          </a:xfrm>
-          <a:prstGeom prst="rect">
-            <a:avLst/>
-          </a:prstGeom>
-          <a:extLst>
-            <a:ext uri="{C572A759-6A51-4108-AA02-DFA0A04FC94B}">
-              <ma14:wrappingTextBoxFlag xmlns:ma14="http://schemas.microsoft.com/office/mac/drawingml/2011/main" val="0"/>
-            </a:ext>
-          </a:extLst>
-        </p:spPr>
-        <p:txBody>
-          <a:bodyPr/>
-          <a:lstStyle>
-            <a:lvl1pPr>
-              <a:defRPr sz="900">
-                <a:solidFill>
-                  <a:srgbClr val="FFFFFF"/>
-                </a:solidFill>
-              </a:defRPr>
-            </a:lvl1pPr>
-          </a:lstStyle>
-          <a:p>
-            <a:pPr algn="r"/>
-            <a:fld id="{F7021451-1387-4CA6-816F-3879F97B5CBC}" type="slidenum">
-              <a:rPr b="0" lang="en-US"/>
-              <a:t>8</a:t>
-            </a:fld>
-            <a:endParaRPr lang="en-US"/>
           </a:p>
         </p:txBody>
       </p:sp>
@@ -10388,9 +11166,11 @@
       <p:sp>
         <p:nvSpPr>
           <p:cNvPr id="2" name="Text 0"/>
-          <p:cNvSpPr/>
+          <p:cNvSpPr>
+            <a:spLocks noGrp="1"/>
+          </p:cNvSpPr>
           <p:nvPr>
-            <p:ph idx="102" type="title" hasCustomPrompt="1"/>
+            <p:ph type="title" idx="102" hasCustomPrompt="1"/>
           </p:nvPr>
         </p:nvSpPr>
         <p:spPr>
@@ -10408,11 +11188,11 @@
           <a:bodyPr wrap="square" lIns="0" tIns="0" rIns="0" bIns="0" rtlCol="0" anchor="ctr"/>
           <a:lstStyle/>
           <a:p>
-            <a:pPr algn="ctr" indent="0" marL="0">
-              <a:buNone/>
-            </a:pPr>
-            <a:r>
-              <a:rPr lang="en-US" sz="4000" spc="800" kern="0" dirty="0">
+            <a:pPr marL="0" indent="0" algn="ctr">
+              <a:buNone/>
+            </a:pPr>
+            <a:r>
+              <a:rPr lang="en-US" sz="4000" kern="0" spc="800" dirty="0">
                 <a:solidFill>
                   <a:schemeClr val="bg1"/>
                 </a:solidFill>
@@ -10727,4 +11507,614 @@
     </a:ext>
   </a:extLst>
 </a:theme>
+</file>
+
+<file path=ppt/theme/theme2.xml><?xml version="1.0" encoding="utf-8"?>
+<a:theme xmlns:a="http://schemas.openxmlformats.org/drawingml/2006/main" name="Office Theme">
+  <a:themeElements>
+    <a:clrScheme name="Office">
+      <a:dk1>
+        <a:sysClr val="windowText" lastClr="000000"/>
+      </a:dk1>
+      <a:lt1>
+        <a:sysClr val="window" lastClr="FFFFFF"/>
+      </a:lt1>
+      <a:dk2>
+        <a:srgbClr val="44546A"/>
+      </a:dk2>
+      <a:lt2>
+        <a:srgbClr val="E7E6E6"/>
+      </a:lt2>
+      <a:accent1>
+        <a:srgbClr val="4472C4"/>
+      </a:accent1>
+      <a:accent2>
+        <a:srgbClr val="ED7D31"/>
+      </a:accent2>
+      <a:accent3>
+        <a:srgbClr val="A5A5A5"/>
+      </a:accent3>
+      <a:accent4>
+        <a:srgbClr val="FFC000"/>
+      </a:accent4>
+      <a:accent5>
+        <a:srgbClr val="5B9BD5"/>
+      </a:accent5>
+      <a:accent6>
+        <a:srgbClr val="70AD47"/>
+      </a:accent6>
+      <a:hlink>
+        <a:srgbClr val="0563C1"/>
+      </a:hlink>
+      <a:folHlink>
+        <a:srgbClr val="954F72"/>
+      </a:folHlink>
+    </a:clrScheme>
+    <a:fontScheme name="Office">
+      <a:majorFont>
+        <a:latin typeface="Calibri Light" panose="020F0302020204030204"/>
+        <a:ea typeface=""/>
+        <a:cs typeface=""/>
+        <a:font script="Jpan" typeface="游ゴシック Light"/>
+        <a:font script="Hang" typeface="맑은 고딕"/>
+        <a:font script="Hans" typeface="等线 Light"/>
+        <a:font script="Hant" typeface="新細明體"/>
+        <a:font script="Arab" typeface="Times New Roman"/>
+        <a:font script="Hebr" typeface="Times New Roman"/>
+        <a:font script="Thai" typeface="Angsana New"/>
+        <a:font script="Ethi" typeface="Nyala"/>
+        <a:font script="Beng" typeface="Vrinda"/>
+        <a:font script="Gujr" typeface="Shruti"/>
+        <a:font script="Khmr" typeface="MoolBoran"/>
+        <a:font script="Knda" typeface="Tunga"/>
+        <a:font script="Guru" typeface="Raavi"/>
+        <a:font script="Cans" typeface="Euphemia"/>
+        <a:font script="Cher" typeface="Plantagenet Cherokee"/>
+        <a:font script="Yiii" typeface="Microsoft Yi Baiti"/>
+        <a:font script="Tibt" typeface="Microsoft Himalaya"/>
+        <a:font script="Thaa" typeface="MV Boli"/>
+        <a:font script="Deva" typeface="Mangal"/>
+        <a:font script="Telu" typeface="Gautami"/>
+        <a:font script="Taml" typeface="Latha"/>
+        <a:font script="Syrc" typeface="Estrangelo Edessa"/>
+        <a:font script="Orya" typeface="Kalinga"/>
+        <a:font script="Mlym" typeface="Kartika"/>
+        <a:font script="Laoo" typeface="DokChampa"/>
+        <a:font script="Sinh" typeface="Iskoola Pota"/>
+        <a:font script="Mong" typeface="Mongolian Baiti"/>
+        <a:font script="Viet" typeface="Times New Roman"/>
+        <a:font script="Uigh" typeface="Microsoft Uighur"/>
+        <a:font script="Geor" typeface="Sylfaen"/>
+        <a:font script="Armn" typeface="Arial"/>
+        <a:font script="Bugi" typeface="Leelawadee UI"/>
+        <a:font script="Bopo" typeface="Microsoft JhengHei"/>
+        <a:font script="Java" typeface="Javanese Text"/>
+        <a:font script="Lisu" typeface="Segoe UI"/>
+        <a:font script="Mymr" typeface="Myanmar Text"/>
+        <a:font script="Nkoo" typeface="Ebrima"/>
+        <a:font script="Olck" typeface="Nirmala UI"/>
+        <a:font script="Osma" typeface="Ebrima"/>
+        <a:font script="Phag" typeface="Phagspa"/>
+        <a:font script="Syrn" typeface="Estrangelo Edessa"/>
+        <a:font script="Syrj" typeface="Estrangelo Edessa"/>
+        <a:font script="Syre" typeface="Estrangelo Edessa"/>
+        <a:font script="Sora" typeface="Nirmala UI"/>
+        <a:font script="Tale" typeface="Microsoft Tai Le"/>
+        <a:font script="Talu" typeface="Microsoft New Tai Lue"/>
+        <a:font script="Tfng" typeface="Ebrima"/>
+      </a:majorFont>
+      <a:minorFont>
+        <a:latin typeface="Calibri" panose="020F0502020204030204"/>
+        <a:ea typeface=""/>
+        <a:cs typeface=""/>
+        <a:font script="Jpan" typeface="游ゴシック"/>
+        <a:font script="Hang" typeface="맑은 고딕"/>
+        <a:font script="Hans" typeface="等线"/>
+        <a:font script="Hant" typeface="新細明體"/>
+        <a:font script="Arab" typeface="Arial"/>
+        <a:font script="Hebr" typeface="Arial"/>
+        <a:font script="Thai" typeface="Cordia New"/>
+        <a:font script="Ethi" typeface="Nyala"/>
+        <a:font script="Beng" typeface="Vrinda"/>
+        <a:font script="Gujr" typeface="Shruti"/>
+        <a:font script="Khmr" typeface="DaunPenh"/>
+        <a:font script="Knda" typeface="Tunga"/>
+        <a:font script="Guru" typeface="Raavi"/>
+        <a:font script="Cans" typeface="Euphemia"/>
+        <a:font script="Cher" typeface="Plantagenet Cherokee"/>
+        <a:font script="Yiii" typeface="Microsoft Yi Baiti"/>
+        <a:font script="Tibt" typeface="Microsoft Himalaya"/>
+        <a:font script="Thaa" typeface="MV Boli"/>
+        <a:font script="Deva" typeface="Mangal"/>
+        <a:font script="Telu" typeface="Gautami"/>
+        <a:font script="Taml" typeface="Latha"/>
+        <a:font script="Syrc" typeface="Estrangelo Edessa"/>
+        <a:font script="Orya" typeface="Kalinga"/>
+        <a:font script="Mlym" typeface="Kartika"/>
+        <a:font script="Laoo" typeface="DokChampa"/>
+        <a:font script="Sinh" typeface="Iskoola Pota"/>
+        <a:font script="Mong" typeface="Mongolian Baiti"/>
+        <a:font script="Viet" typeface="Arial"/>
+        <a:font script="Uigh" typeface="Microsoft Uighur"/>
+        <a:font script="Geor" typeface="Sylfaen"/>
+        <a:font script="Armn" typeface="Arial"/>
+        <a:font script="Bugi" typeface="Leelawadee UI"/>
+        <a:font script="Bopo" typeface="Microsoft JhengHei"/>
+        <a:font script="Java" typeface="Javanese Text"/>
+        <a:font script="Lisu" typeface="Segoe UI"/>
+        <a:font script="Mymr" typeface="Myanmar Text"/>
+        <a:font script="Nkoo" typeface="Ebrima"/>
+        <a:font script="Olck" typeface="Nirmala UI"/>
+        <a:font script="Osma" typeface="Ebrima"/>
+        <a:font script="Phag" typeface="Phagspa"/>
+        <a:font script="Syrn" typeface="Estrangelo Edessa"/>
+        <a:font script="Syrj" typeface="Estrangelo Edessa"/>
+        <a:font script="Syre" typeface="Estrangelo Edessa"/>
+        <a:font script="Sora" typeface="Nirmala UI"/>
+        <a:font script="Tale" typeface="Microsoft Tai Le"/>
+        <a:font script="Talu" typeface="Microsoft New Tai Lue"/>
+        <a:font script="Tfng" typeface="Ebrima"/>
+      </a:minorFont>
+    </a:fontScheme>
+    <a:fmtScheme name="Office">
+      <a:fillStyleLst>
+        <a:solidFill>
+          <a:schemeClr val="phClr"/>
+        </a:solidFill>
+        <a:gradFill rotWithShape="1">
+          <a:gsLst>
+            <a:gs pos="0">
+              <a:schemeClr val="phClr">
+                <a:lumMod val="110000"/>
+                <a:satMod val="105000"/>
+                <a:tint val="67000"/>
+              </a:schemeClr>
+            </a:gs>
+            <a:gs pos="50000">
+              <a:schemeClr val="phClr">
+                <a:lumMod val="105000"/>
+                <a:satMod val="103000"/>
+                <a:tint val="73000"/>
+              </a:schemeClr>
+            </a:gs>
+            <a:gs pos="100000">
+              <a:schemeClr val="phClr">
+                <a:lumMod val="105000"/>
+                <a:satMod val="109000"/>
+                <a:tint val="81000"/>
+              </a:schemeClr>
+            </a:gs>
+          </a:gsLst>
+          <a:lin ang="5400000" scaled="0"/>
+        </a:gradFill>
+        <a:gradFill rotWithShape="1">
+          <a:gsLst>
+            <a:gs pos="0">
+              <a:schemeClr val="phClr">
+                <a:satMod val="103000"/>
+                <a:lumMod val="102000"/>
+                <a:tint val="94000"/>
+              </a:schemeClr>
+            </a:gs>
+            <a:gs pos="50000">
+              <a:schemeClr val="phClr">
+                <a:satMod val="110000"/>
+                <a:lumMod val="100000"/>
+                <a:shade val="100000"/>
+              </a:schemeClr>
+            </a:gs>
+            <a:gs pos="100000">
+              <a:schemeClr val="phClr">
+                <a:lumMod val="99000"/>
+                <a:satMod val="120000"/>
+                <a:shade val="78000"/>
+              </a:schemeClr>
+            </a:gs>
+          </a:gsLst>
+          <a:lin ang="5400000" scaled="0"/>
+        </a:gradFill>
+      </a:fillStyleLst>
+      <a:lnStyleLst>
+        <a:ln w="6350" cap="flat" cmpd="sng" algn="ctr">
+          <a:solidFill>
+            <a:schemeClr val="phClr"/>
+          </a:solidFill>
+          <a:prstDash val="solid"/>
+          <a:miter lim="800000"/>
+        </a:ln>
+        <a:ln w="12700" cap="flat" cmpd="sng" algn="ctr">
+          <a:solidFill>
+            <a:schemeClr val="phClr"/>
+          </a:solidFill>
+          <a:prstDash val="solid"/>
+          <a:miter lim="800000"/>
+        </a:ln>
+        <a:ln w="19050" cap="flat" cmpd="sng" algn="ctr">
+          <a:solidFill>
+            <a:schemeClr val="phClr"/>
+          </a:solidFill>
+          <a:prstDash val="solid"/>
+          <a:miter lim="800000"/>
+        </a:ln>
+      </a:lnStyleLst>
+      <a:effectStyleLst>
+        <a:effectStyle>
+          <a:effectLst/>
+        </a:effectStyle>
+        <a:effectStyle>
+          <a:effectLst/>
+        </a:effectStyle>
+        <a:effectStyle>
+          <a:effectLst>
+            <a:outerShdw blurRad="57150" dist="19050" dir="5400000" algn="ctr" rotWithShape="0">
+              <a:srgbClr val="000000">
+                <a:alpha val="63000"/>
+              </a:srgbClr>
+            </a:outerShdw>
+          </a:effectLst>
+        </a:effectStyle>
+      </a:effectStyleLst>
+      <a:bgFillStyleLst>
+        <a:solidFill>
+          <a:schemeClr val="phClr"/>
+        </a:solidFill>
+        <a:solidFill>
+          <a:schemeClr val="phClr">
+            <a:tint val="95000"/>
+            <a:satMod val="170000"/>
+          </a:schemeClr>
+        </a:solidFill>
+        <a:gradFill rotWithShape="1">
+          <a:gsLst>
+            <a:gs pos="0">
+              <a:schemeClr val="phClr">
+                <a:tint val="93000"/>
+                <a:satMod val="150000"/>
+                <a:shade val="98000"/>
+                <a:lumMod val="102000"/>
+              </a:schemeClr>
+            </a:gs>
+            <a:gs pos="50000">
+              <a:schemeClr val="phClr">
+                <a:tint val="98000"/>
+                <a:satMod val="130000"/>
+                <a:shade val="90000"/>
+                <a:lumMod val="103000"/>
+              </a:schemeClr>
+            </a:gs>
+            <a:gs pos="100000">
+              <a:schemeClr val="phClr">
+                <a:shade val="63000"/>
+                <a:satMod val="120000"/>
+              </a:schemeClr>
+            </a:gs>
+          </a:gsLst>
+          <a:lin ang="5400000" scaled="0"/>
+        </a:gradFill>
+      </a:bgFillStyleLst>
+    </a:fmtScheme>
+  </a:themeElements>
+  <a:objectDefaults/>
+  <a:extraClrSchemeLst/>
+  <a:extLst>
+    <a:ext uri="{05A4C25C-085E-4340-85A3-A5531E510DB2}">
+      <thm15:themeFamily xmlns:thm15="http://schemas.microsoft.com/office/thememl/2012/main" name="Office Theme" id="{62F939B6-93AF-4DB8-9C6B-D6C7DFDC589F}" vid="{4A3C46E8-61CC-4603-A589-7422A47A8E4A}"/>
+    </a:ext>
+  </a:extLst>
+</a:theme>
+</file>
+
+<file path=ppt/theme/theme3.xml><?xml version="1.0" encoding="utf-8"?>
+<a:theme xmlns:a="http://schemas.openxmlformats.org/drawingml/2006/main" name="Office Theme">
+  <a:themeElements>
+    <a:clrScheme name="Office">
+      <a:dk1>
+        <a:sysClr val="windowText" lastClr="000000"/>
+      </a:dk1>
+      <a:lt1>
+        <a:sysClr val="window" lastClr="FFFFFF"/>
+      </a:lt1>
+      <a:dk2>
+        <a:srgbClr val="0E2841"/>
+      </a:dk2>
+      <a:lt2>
+        <a:srgbClr val="E8E8E8"/>
+      </a:lt2>
+      <a:accent1>
+        <a:srgbClr val="156082"/>
+      </a:accent1>
+      <a:accent2>
+        <a:srgbClr val="E97132"/>
+      </a:accent2>
+      <a:accent3>
+        <a:srgbClr val="196B24"/>
+      </a:accent3>
+      <a:accent4>
+        <a:srgbClr val="0F9ED5"/>
+      </a:accent4>
+      <a:accent5>
+        <a:srgbClr val="A02B93"/>
+      </a:accent5>
+      <a:accent6>
+        <a:srgbClr val="4EA72E"/>
+      </a:accent6>
+      <a:hlink>
+        <a:srgbClr val="467886"/>
+      </a:hlink>
+      <a:folHlink>
+        <a:srgbClr val="96607D"/>
+      </a:folHlink>
+    </a:clrScheme>
+    <a:fontScheme name="Office">
+      <a:majorFont>
+        <a:latin typeface="Aptos Display" panose="02110004020202020204"/>
+        <a:ea typeface=""/>
+        <a:cs typeface=""/>
+        <a:font script="Jpan" typeface="游ゴシック Light"/>
+        <a:font script="Hang" typeface="맑은 고딕"/>
+        <a:font script="Hans" typeface="等线 Light"/>
+        <a:font script="Hant" typeface="新細明體"/>
+        <a:font script="Arab" typeface="Times New Roman"/>
+        <a:font script="Hebr" typeface="Times New Roman"/>
+        <a:font script="Thai" typeface="Angsana New"/>
+        <a:font script="Ethi" typeface="Nyala"/>
+        <a:font script="Beng" typeface="Vrinda"/>
+        <a:font script="Gujr" typeface="Shruti"/>
+        <a:font script="Khmr" typeface="MoolBoran"/>
+        <a:font script="Knda" typeface="Tunga"/>
+        <a:font script="Guru" typeface="Raavi"/>
+        <a:font script="Cans" typeface="Euphemia"/>
+        <a:font script="Cher" typeface="Plantagenet Cherokee"/>
+        <a:font script="Yiii" typeface="Microsoft Yi Baiti"/>
+        <a:font script="Tibt" typeface="Microsoft Himalaya"/>
+        <a:font script="Thaa" typeface="MV Boli"/>
+        <a:font script="Deva" typeface="Mangal"/>
+        <a:font script="Telu" typeface="Gautami"/>
+        <a:font script="Taml" typeface="Latha"/>
+        <a:font script="Syrc" typeface="Estrangelo Edessa"/>
+        <a:font script="Orya" typeface="Kalinga"/>
+        <a:font script="Mlym" typeface="Kartika"/>
+        <a:font script="Laoo" typeface="DokChampa"/>
+        <a:font script="Sinh" typeface="Iskoola Pota"/>
+        <a:font script="Mong" typeface="Mongolian Baiti"/>
+        <a:font script="Viet" typeface="Times New Roman"/>
+        <a:font script="Uigh" typeface="Microsoft Uighur"/>
+        <a:font script="Geor" typeface="Sylfaen"/>
+        <a:font script="Armn" typeface="Arial"/>
+        <a:font script="Bugi" typeface="Leelawadee UI"/>
+        <a:font script="Bopo" typeface="Microsoft JhengHei"/>
+        <a:font script="Java" typeface="Javanese Text"/>
+        <a:font script="Lisu" typeface="Segoe UI"/>
+        <a:font script="Mymr" typeface="Myanmar Text"/>
+        <a:font script="Nkoo" typeface="Ebrima"/>
+        <a:font script="Olck" typeface="Nirmala UI"/>
+        <a:font script="Osma" typeface="Ebrima"/>
+        <a:font script="Phag" typeface="Phagspa"/>
+        <a:font script="Syrn" typeface="Estrangelo Edessa"/>
+        <a:font script="Syrj" typeface="Estrangelo Edessa"/>
+        <a:font script="Syre" typeface="Estrangelo Edessa"/>
+        <a:font script="Sora" typeface="Nirmala UI"/>
+        <a:font script="Tale" typeface="Microsoft Tai Le"/>
+        <a:font script="Talu" typeface="Microsoft New Tai Lue"/>
+        <a:font script="Tfng" typeface="Ebrima"/>
+      </a:majorFont>
+      <a:minorFont>
+        <a:latin typeface="Aptos" panose="02110004020202020204"/>
+        <a:ea typeface=""/>
+        <a:cs typeface=""/>
+        <a:font script="Jpan" typeface="游ゴシック"/>
+        <a:font script="Hang" typeface="맑은 고딕"/>
+        <a:font script="Hans" typeface="等线"/>
+        <a:font script="Hant" typeface="新細明體"/>
+        <a:font script="Arab" typeface="Arial"/>
+        <a:font script="Hebr" typeface="Arial"/>
+        <a:font script="Thai" typeface="Cordia New"/>
+        <a:font script="Ethi" typeface="Nyala"/>
+        <a:font script="Beng" typeface="Vrinda"/>
+        <a:font script="Gujr" typeface="Shruti"/>
+        <a:font script="Khmr" typeface="DaunPenh"/>
+        <a:font script="Knda" typeface="Tunga"/>
+        <a:font script="Guru" typeface="Raavi"/>
+        <a:font script="Cans" typeface="Euphemia"/>
+        <a:font script="Cher" typeface="Plantagenet Cherokee"/>
+        <a:font script="Yiii" typeface="Microsoft Yi Baiti"/>
+        <a:font script="Tibt" typeface="Microsoft Himalaya"/>
+        <a:font script="Thaa" typeface="MV Boli"/>
+        <a:font script="Deva" typeface="Mangal"/>
+        <a:font script="Telu" typeface="Gautami"/>
+        <a:font script="Taml" typeface="Latha"/>
+        <a:font script="Syrc" typeface="Estrangelo Edessa"/>
+        <a:font script="Orya" typeface="Kalinga"/>
+        <a:font script="Mlym" typeface="Kartika"/>
+        <a:font script="Laoo" typeface="DokChampa"/>
+        <a:font script="Sinh" typeface="Iskoola Pota"/>
+        <a:font script="Mong" typeface="Mongolian Baiti"/>
+        <a:font script="Viet" typeface="Arial"/>
+        <a:font script="Uigh" typeface="Microsoft Uighur"/>
+        <a:font script="Geor" typeface="Sylfaen"/>
+        <a:font script="Armn" typeface="Arial"/>
+        <a:font script="Bugi" typeface="Leelawadee UI"/>
+        <a:font script="Bopo" typeface="Microsoft JhengHei"/>
+        <a:font script="Java" typeface="Javanese Text"/>
+        <a:font script="Lisu" typeface="Segoe UI"/>
+        <a:font script="Mymr" typeface="Myanmar Text"/>
+        <a:font script="Nkoo" typeface="Ebrima"/>
+        <a:font script="Olck" typeface="Nirmala UI"/>
+        <a:font script="Osma" typeface="Ebrima"/>
+        <a:font script="Phag" typeface="Phagspa"/>
+        <a:font script="Syrn" typeface="Estrangelo Edessa"/>
+        <a:font script="Syrj" typeface="Estrangelo Edessa"/>
+        <a:font script="Syre" typeface="Estrangelo Edessa"/>
+        <a:font script="Sora" typeface="Nirmala UI"/>
+        <a:font script="Tale" typeface="Microsoft Tai Le"/>
+        <a:font script="Talu" typeface="Microsoft New Tai Lue"/>
+        <a:font script="Tfng" typeface="Ebrima"/>
+      </a:minorFont>
+    </a:fontScheme>
+    <a:fmtScheme name="Office">
+      <a:fillStyleLst>
+        <a:solidFill>
+          <a:schemeClr val="phClr"/>
+        </a:solidFill>
+        <a:gradFill rotWithShape="1">
+          <a:gsLst>
+            <a:gs pos="0">
+              <a:schemeClr val="phClr">
+                <a:lumMod val="110000"/>
+                <a:satMod val="105000"/>
+                <a:tint val="67000"/>
+              </a:schemeClr>
+            </a:gs>
+            <a:gs pos="50000">
+              <a:schemeClr val="phClr">
+                <a:lumMod val="105000"/>
+                <a:satMod val="103000"/>
+                <a:tint val="73000"/>
+              </a:schemeClr>
+            </a:gs>
+            <a:gs pos="100000">
+              <a:schemeClr val="phClr">
+                <a:lumMod val="105000"/>
+                <a:satMod val="109000"/>
+                <a:tint val="81000"/>
+              </a:schemeClr>
+            </a:gs>
+          </a:gsLst>
+          <a:lin ang="5400000" scaled="0"/>
+        </a:gradFill>
+        <a:gradFill rotWithShape="1">
+          <a:gsLst>
+            <a:gs pos="0">
+              <a:schemeClr val="phClr">
+                <a:satMod val="103000"/>
+                <a:lumMod val="102000"/>
+                <a:tint val="94000"/>
+              </a:schemeClr>
+            </a:gs>
+            <a:gs pos="50000">
+              <a:schemeClr val="phClr">
+                <a:satMod val="110000"/>
+                <a:lumMod val="100000"/>
+                <a:shade val="100000"/>
+              </a:schemeClr>
+            </a:gs>
+            <a:gs pos="100000">
+              <a:schemeClr val="phClr">
+                <a:lumMod val="99000"/>
+                <a:satMod val="120000"/>
+                <a:shade val="78000"/>
+              </a:schemeClr>
+            </a:gs>
+          </a:gsLst>
+          <a:lin ang="5400000" scaled="0"/>
+        </a:gradFill>
+      </a:fillStyleLst>
+      <a:lnStyleLst>
+        <a:ln w="12700" cap="flat" cmpd="sng" algn="ctr">
+          <a:solidFill>
+            <a:schemeClr val="phClr"/>
+          </a:solidFill>
+          <a:prstDash val="solid"/>
+          <a:miter lim="800000"/>
+        </a:ln>
+        <a:ln w="19050" cap="flat" cmpd="sng" algn="ctr">
+          <a:solidFill>
+            <a:schemeClr val="phClr"/>
+          </a:solidFill>
+          <a:prstDash val="solid"/>
+          <a:miter lim="800000"/>
+        </a:ln>
+        <a:ln w="25400" cap="flat" cmpd="sng" algn="ctr">
+          <a:solidFill>
+            <a:schemeClr val="phClr"/>
+          </a:solidFill>
+          <a:prstDash val="solid"/>
+          <a:miter lim="800000"/>
+        </a:ln>
+      </a:lnStyleLst>
+      <a:effectStyleLst>
+        <a:effectStyle>
+          <a:effectLst/>
+        </a:effectStyle>
+        <a:effectStyle>
+          <a:effectLst/>
+        </a:effectStyle>
+        <a:effectStyle>
+          <a:effectLst>
+            <a:outerShdw blurRad="57150" dist="19050" dir="5400000" algn="ctr" rotWithShape="0">
+              <a:srgbClr val="000000">
+                <a:alpha val="63000"/>
+              </a:srgbClr>
+            </a:outerShdw>
+          </a:effectLst>
+        </a:effectStyle>
+      </a:effectStyleLst>
+      <a:bgFillStyleLst>
+        <a:solidFill>
+          <a:schemeClr val="phClr"/>
+        </a:solidFill>
+        <a:solidFill>
+          <a:schemeClr val="phClr">
+            <a:tint val="95000"/>
+            <a:satMod val="170000"/>
+          </a:schemeClr>
+        </a:solidFill>
+        <a:gradFill rotWithShape="1">
+          <a:gsLst>
+            <a:gs pos="0">
+              <a:schemeClr val="phClr">
+                <a:tint val="93000"/>
+                <a:satMod val="150000"/>
+                <a:shade val="98000"/>
+                <a:lumMod val="102000"/>
+              </a:schemeClr>
+            </a:gs>
+            <a:gs pos="50000">
+              <a:schemeClr val="phClr">
+                <a:tint val="98000"/>
+                <a:satMod val="130000"/>
+                <a:shade val="90000"/>
+                <a:lumMod val="103000"/>
+              </a:schemeClr>
+            </a:gs>
+            <a:gs pos="100000">
+              <a:schemeClr val="phClr">
+                <a:shade val="63000"/>
+                <a:satMod val="120000"/>
+              </a:schemeClr>
+            </a:gs>
+          </a:gsLst>
+          <a:lin ang="5400000" scaled="0"/>
+        </a:gradFill>
+      </a:bgFillStyleLst>
+    </a:fmtScheme>
+  </a:themeElements>
+  <a:objectDefaults>
+    <a:lnDef>
+      <a:spPr/>
+      <a:bodyPr/>
+      <a:lstStyle/>
+      <a:style>
+        <a:lnRef idx="2">
+          <a:schemeClr val="accent1"/>
+        </a:lnRef>
+        <a:fillRef idx="0">
+          <a:schemeClr val="accent1"/>
+        </a:fillRef>
+        <a:effectRef idx="1">
+          <a:schemeClr val="accent1"/>
+        </a:effectRef>
+        <a:fontRef idx="minor">
+          <a:schemeClr val="tx1"/>
+        </a:fontRef>
+      </a:style>
+    </a:lnDef>
+  </a:objectDefaults>
+  <a:extraClrSchemeLst/>
+  <a:extLst>
+    <a:ext uri="{05A4C25C-085E-4340-85A3-A5531E510DB2}">
+      <thm15:themeFamily xmlns:thm15="http://schemas.microsoft.com/office/thememl/2012/main" name="Office Theme" id="{2E142A2C-CD16-42D6-873A-C26D2A0506FA}" vid="{1BDDFF52-6CD6-40A5-AB3C-68EB2F1E4D0A}"/>
+    </a:ext>
+  </a:extLst>
+</a:theme>
 </file>